--- a/Lez5.pptx
+++ b/Lez5.pptx
@@ -146,6 +146,11 @@
       </a:defRPr>
     </a:lvl9pPr>
   </p:defaultTextStyle>
+  <p:extLst>
+    <p:ext uri="{EFAFB233-063F-42B5-8137-9DF3F51BA10A}">
+      <p15:sldGuideLst xmlns:p15="http://schemas.microsoft.com/office/powerpoint/2012/main"/>
+    </p:ext>
+  </p:extLst>
 </p:presentation>
 </file>
 
@@ -154,7 +159,7 @@
   <pc:docChgLst>
     <pc:chgData name="Alessandro Di Piazza" userId="242384fd-1746-4b70-8d90-c83f4330e5ed" providerId="ADAL" clId="{FFF1DA74-BEAE-470B-8D8A-B7A1F3E1BF85}"/>
     <pc:docChg chg="undo custSel addSld modSld sldOrd">
-      <pc:chgData name="Alessandro Di Piazza" userId="242384fd-1746-4b70-8d90-c83f4330e5ed" providerId="ADAL" clId="{FFF1DA74-BEAE-470B-8D8A-B7A1F3E1BF85}" dt="2026-05-26T20:30:08.229" v="1353" actId="6549"/>
+      <pc:chgData name="Alessandro Di Piazza" userId="242384fd-1746-4b70-8d90-c83f4330e5ed" providerId="ADAL" clId="{FFF1DA74-BEAE-470B-8D8A-B7A1F3E1BF85}" dt="2026-05-27T13:02:48.320" v="1357" actId="20577"/>
       <pc:docMkLst>
         <pc:docMk/>
       </pc:docMkLst>
@@ -166,7 +171,7 @@
         </pc:sldMkLst>
       </pc:sldChg>
       <pc:sldChg chg="modSp new mod">
-        <pc:chgData name="Alessandro Di Piazza" userId="242384fd-1746-4b70-8d90-c83f4330e5ed" providerId="ADAL" clId="{FFF1DA74-BEAE-470B-8D8A-B7A1F3E1BF85}" dt="2026-05-26T10:42:00.636" v="8"/>
+        <pc:chgData name="Alessandro Di Piazza" userId="242384fd-1746-4b70-8d90-c83f4330e5ed" providerId="ADAL" clId="{FFF1DA74-BEAE-470B-8D8A-B7A1F3E1BF85}" dt="2026-05-27T13:02:48.320" v="1357" actId="20577"/>
         <pc:sldMkLst>
           <pc:docMk/>
           <pc:sldMk cId="3298000338" sldId="257"/>
@@ -180,7 +185,7 @@
           </ac:spMkLst>
         </pc:spChg>
         <pc:spChg chg="mod">
-          <ac:chgData name="Alessandro Di Piazza" userId="242384fd-1746-4b70-8d90-c83f4330e5ed" providerId="ADAL" clId="{FFF1DA74-BEAE-470B-8D8A-B7A1F3E1BF85}" dt="2026-05-26T10:42:00.636" v="8"/>
+          <ac:chgData name="Alessandro Di Piazza" userId="242384fd-1746-4b70-8d90-c83f4330e5ed" providerId="ADAL" clId="{FFF1DA74-BEAE-470B-8D8A-B7A1F3E1BF85}" dt="2026-05-27T13:02:48.320" v="1357" actId="20577"/>
           <ac:spMkLst>
             <pc:docMk/>
             <pc:sldMk cId="3298000338" sldId="257"/>
@@ -4615,7 +4620,7 @@
           <a:p>
             <a:fld id="{2707365B-59C5-4FA9-AEAA-AC43E9C0A68C}" type="datetimeFigureOut">
               <a:rPr lang="en-US" smtClean="0"/>
-              <a:t>5/26/2026</a:t>
+              <a:t>5/27/2026</a:t>
             </a:fld>
             <a:endParaRPr lang="en-US"/>
           </a:p>
@@ -4813,7 +4818,7 @@
           <a:p>
             <a:fld id="{2707365B-59C5-4FA9-AEAA-AC43E9C0A68C}" type="datetimeFigureOut">
               <a:rPr lang="en-US" smtClean="0"/>
-              <a:t>5/26/2026</a:t>
+              <a:t>5/27/2026</a:t>
             </a:fld>
             <a:endParaRPr lang="en-US"/>
           </a:p>
@@ -5021,7 +5026,7 @@
           <a:p>
             <a:fld id="{2707365B-59C5-4FA9-AEAA-AC43E9C0A68C}" type="datetimeFigureOut">
               <a:rPr lang="en-US" smtClean="0"/>
-              <a:t>5/26/2026</a:t>
+              <a:t>5/27/2026</a:t>
             </a:fld>
             <a:endParaRPr lang="en-US"/>
           </a:p>
@@ -5219,7 +5224,7 @@
           <a:p>
             <a:fld id="{2707365B-59C5-4FA9-AEAA-AC43E9C0A68C}" type="datetimeFigureOut">
               <a:rPr lang="en-US" smtClean="0"/>
-              <a:t>5/26/2026</a:t>
+              <a:t>5/27/2026</a:t>
             </a:fld>
             <a:endParaRPr lang="en-US"/>
           </a:p>
@@ -5494,7 +5499,7 @@
           <a:p>
             <a:fld id="{2707365B-59C5-4FA9-AEAA-AC43E9C0A68C}" type="datetimeFigureOut">
               <a:rPr lang="en-US" smtClean="0"/>
-              <a:t>5/26/2026</a:t>
+              <a:t>5/27/2026</a:t>
             </a:fld>
             <a:endParaRPr lang="en-US"/>
           </a:p>
@@ -5759,7 +5764,7 @@
           <a:p>
             <a:fld id="{2707365B-59C5-4FA9-AEAA-AC43E9C0A68C}" type="datetimeFigureOut">
               <a:rPr lang="en-US" smtClean="0"/>
-              <a:t>5/26/2026</a:t>
+              <a:t>5/27/2026</a:t>
             </a:fld>
             <a:endParaRPr lang="en-US"/>
           </a:p>
@@ -6171,7 +6176,7 @@
           <a:p>
             <a:fld id="{2707365B-59C5-4FA9-AEAA-AC43E9C0A68C}" type="datetimeFigureOut">
               <a:rPr lang="en-US" smtClean="0"/>
-              <a:t>5/26/2026</a:t>
+              <a:t>5/27/2026</a:t>
             </a:fld>
             <a:endParaRPr lang="en-US"/>
           </a:p>
@@ -6312,7 +6317,7 @@
           <a:p>
             <a:fld id="{2707365B-59C5-4FA9-AEAA-AC43E9C0A68C}" type="datetimeFigureOut">
               <a:rPr lang="en-US" smtClean="0"/>
-              <a:t>5/26/2026</a:t>
+              <a:t>5/27/2026</a:t>
             </a:fld>
             <a:endParaRPr lang="en-US"/>
           </a:p>
@@ -6425,7 +6430,7 @@
           <a:p>
             <a:fld id="{2707365B-59C5-4FA9-AEAA-AC43E9C0A68C}" type="datetimeFigureOut">
               <a:rPr lang="en-US" smtClean="0"/>
-              <a:t>5/26/2026</a:t>
+              <a:t>5/27/2026</a:t>
             </a:fld>
             <a:endParaRPr lang="en-US"/>
           </a:p>
@@ -6736,7 +6741,7 @@
           <a:p>
             <a:fld id="{2707365B-59C5-4FA9-AEAA-AC43E9C0A68C}" type="datetimeFigureOut">
               <a:rPr lang="en-US" smtClean="0"/>
-              <a:t>5/26/2026</a:t>
+              <a:t>5/27/2026</a:t>
             </a:fld>
             <a:endParaRPr lang="en-US"/>
           </a:p>
@@ -7024,7 +7029,7 @@
           <a:p>
             <a:fld id="{2707365B-59C5-4FA9-AEAA-AC43E9C0A68C}" type="datetimeFigureOut">
               <a:rPr lang="en-US" smtClean="0"/>
-              <a:t>5/26/2026</a:t>
+              <a:t>5/27/2026</a:t>
             </a:fld>
             <a:endParaRPr lang="en-US"/>
           </a:p>
@@ -7265,7 +7270,7 @@
           <a:p>
             <a:fld id="{2707365B-59C5-4FA9-AEAA-AC43E9C0A68C}" type="datetimeFigureOut">
               <a:rPr lang="en-US" smtClean="0"/>
-              <a:t>5/26/2026</a:t>
+              <a:t>5/27/2026</a:t>
             </a:fld>
             <a:endParaRPr lang="en-US"/>
           </a:p>
@@ -8380,8 +8385,8 @@
           </a:p>
         </p:txBody>
       </p:sp>
-      <mc:AlternateContent xmlns:mc="http://schemas.openxmlformats.org/markup-compatibility/2006">
-        <mc:Choice xmlns:a14="http://schemas.microsoft.com/office/drawing/2010/main" Requires="a14">
+      <mc:AlternateContent xmlns:mc="http://schemas.openxmlformats.org/markup-compatibility/2006" xmlns:a14="http://schemas.microsoft.com/office/drawing/2010/main">
+        <mc:Choice Requires="a14">
           <p:sp>
             <p:nvSpPr>
               <p:cNvPr id="3" name="Content Placeholder 2">
@@ -8510,66 +8515,90 @@
                 <a14:m>
                   <m:oMath xmlns:m="http://schemas.openxmlformats.org/officeDocument/2006/math">
                     <m:r>
-                      <a:rPr lang="en-US" i="1"/>
+                      <a:rPr lang="en-US" i="1">
+                        <a:latin typeface="Cambria Math" panose="02040503050406030204" pitchFamily="18" charset="0"/>
+                      </a:rPr>
                       <m:t>𝜎</m:t>
                     </m:r>
                     <m:d>
                       <m:dPr>
                         <m:ctrlPr>
-                          <a:rPr lang="ar-AE" i="1"/>
+                          <a:rPr lang="ar-AE" i="1">
+                            <a:latin typeface="Cambria Math" panose="02040503050406030204" pitchFamily="18" charset="0"/>
+                          </a:rPr>
                         </m:ctrlPr>
                       </m:dPr>
                       <m:e>
                         <m:r>
-                          <a:rPr lang="ar-AE" i="1"/>
+                          <a:rPr lang="ar-AE" i="1">
+                            <a:latin typeface="Cambria Math" panose="02040503050406030204" pitchFamily="18" charset="0"/>
+                          </a:rPr>
                           <m:t>𝑥</m:t>
                         </m:r>
                       </m:e>
                     </m:d>
                     <m:r>
-                      <a:rPr lang="ar-AE"/>
+                      <a:rPr lang="ar-AE">
+                        <a:latin typeface="Cambria Math" panose="02040503050406030204" pitchFamily="18" charset="0"/>
+                      </a:rPr>
                       <m:t>=</m:t>
                     </m:r>
                     <m:f>
                       <m:fPr>
                         <m:ctrlPr>
-                          <a:rPr lang="ar-AE" i="1"/>
+                          <a:rPr lang="ar-AE" i="1">
+                            <a:latin typeface="Cambria Math" panose="02040503050406030204" pitchFamily="18" charset="0"/>
+                          </a:rPr>
                         </m:ctrlPr>
                       </m:fPr>
                       <m:num>
                         <m:r>
-                          <a:rPr lang="ar-AE"/>
+                          <a:rPr lang="ar-AE">
+                            <a:latin typeface="Cambria Math" panose="02040503050406030204" pitchFamily="18" charset="0"/>
+                          </a:rPr>
                           <m:t>1</m:t>
                         </m:r>
                       </m:num>
                       <m:den>
                         <m:r>
-                          <a:rPr lang="ar-AE"/>
+                          <a:rPr lang="ar-AE">
+                            <a:latin typeface="Cambria Math" panose="02040503050406030204" pitchFamily="18" charset="0"/>
+                          </a:rPr>
                           <m:t>1</m:t>
                         </m:r>
                         <m:r>
-                          <a:rPr lang="ar-AE"/>
+                          <a:rPr lang="ar-AE">
+                            <a:latin typeface="Cambria Math" panose="02040503050406030204" pitchFamily="18" charset="0"/>
+                          </a:rPr>
                           <m:t>+</m:t>
                         </m:r>
                         <m:sSup>
                           <m:sSupPr>
                             <m:ctrlPr>
-                              <a:rPr lang="ar-AE" i="1"/>
+                              <a:rPr lang="ar-AE" i="1">
+                                <a:latin typeface="Cambria Math" panose="02040503050406030204" pitchFamily="18" charset="0"/>
+                              </a:rPr>
                             </m:ctrlPr>
                           </m:sSupPr>
                           <m:e>
                             <m:r>
-                              <a:rPr lang="ar-AE" i="1"/>
+                              <a:rPr lang="ar-AE" i="1">
+                                <a:latin typeface="Cambria Math" panose="02040503050406030204" pitchFamily="18" charset="0"/>
+                              </a:rPr>
                               <m:t>𝑒</m:t>
                             </m:r>
                           </m:e>
                           <m:sup>
                             <m:r>
-                              <a:rPr lang="ar-AE"/>
+                              <a:rPr lang="ar-AE">
+                                <a:latin typeface="Cambria Math" panose="02040503050406030204" pitchFamily="18" charset="0"/>
+                              </a:rPr>
                               <m:t>−</m:t>
                             </m:r>
                             <m:r>
-                              <a:rPr lang="ar-AE" i="1"/>
+                              <a:rPr lang="ar-AE" i="1">
+                                <a:latin typeface="Cambria Math" panose="02040503050406030204" pitchFamily="18" charset="0"/>
+                              </a:rPr>
                               <m:t>𝑥</m:t>
                             </m:r>
                           </m:sup>
@@ -8743,36 +8772,50 @@
                     </m:oMathParaPr>
                     <m:oMath xmlns:m="http://schemas.openxmlformats.org/officeDocument/2006/math">
                       <m:r>
-                        <a:rPr lang="en-US" i="1"/>
+                        <a:rPr lang="en-US" i="1">
+                          <a:latin typeface="Cambria Math" panose="02040503050406030204" pitchFamily="18" charset="0"/>
+                        </a:rPr>
                         <m:t>𝑧</m:t>
                       </m:r>
                       <m:r>
-                        <a:rPr lang="en-US"/>
+                        <a:rPr lang="en-US">
+                          <a:latin typeface="Cambria Math" panose="02040503050406030204" pitchFamily="18" charset="0"/>
+                        </a:rPr>
                         <m:t>=</m:t>
                       </m:r>
                       <m:r>
-                        <a:rPr lang="en-US" i="1"/>
+                        <a:rPr lang="en-US" i="1">
+                          <a:latin typeface="Cambria Math" panose="02040503050406030204" pitchFamily="18" charset="0"/>
+                        </a:rPr>
                         <m:t>𝑏</m:t>
                       </m:r>
                       <m:r>
-                        <a:rPr lang="en-US"/>
+                        <a:rPr lang="en-US">
+                          <a:latin typeface="Cambria Math" panose="02040503050406030204" pitchFamily="18" charset="0"/>
+                        </a:rPr>
                         <m:t>+</m:t>
                       </m:r>
                       <m:sSub>
                         <m:sSubPr>
                           <m:ctrlPr>
-                            <a:rPr lang="ar-AE" i="1"/>
+                            <a:rPr lang="ar-AE" i="1">
+                              <a:latin typeface="Cambria Math" panose="02040503050406030204" pitchFamily="18" charset="0"/>
+                            </a:rPr>
                           </m:ctrlPr>
                         </m:sSubPr>
                         <m:e>
                           <m:r>
-                            <a:rPr lang="ar-AE" i="1"/>
+                            <a:rPr lang="ar-AE" i="1">
+                              <a:latin typeface="Cambria Math" panose="02040503050406030204" pitchFamily="18" charset="0"/>
+                            </a:rPr>
                             <m:t>𝑤</m:t>
                           </m:r>
                         </m:e>
                         <m:sub>
                           <m:r>
-                            <a:rPr lang="ar-AE"/>
+                            <a:rPr lang="ar-AE">
+                              <a:latin typeface="Cambria Math" panose="02040503050406030204" pitchFamily="18" charset="0"/>
+                            </a:rPr>
                             <m:t>1</m:t>
                           </m:r>
                         </m:sub>
@@ -8780,41 +8823,55 @@
                       <m:sSub>
                         <m:sSubPr>
                           <m:ctrlPr>
-                            <a:rPr lang="ar-AE" i="1"/>
+                            <a:rPr lang="ar-AE" i="1">
+                              <a:latin typeface="Cambria Math" panose="02040503050406030204" pitchFamily="18" charset="0"/>
+                            </a:rPr>
                           </m:ctrlPr>
                         </m:sSubPr>
                         <m:e>
                           <m:r>
-                            <a:rPr lang="ar-AE" i="1"/>
+                            <a:rPr lang="ar-AE" i="1">
+                              <a:latin typeface="Cambria Math" panose="02040503050406030204" pitchFamily="18" charset="0"/>
+                            </a:rPr>
                             <m:t>𝑥</m:t>
                           </m:r>
                         </m:e>
                         <m:sub>
                           <m:r>
-                            <a:rPr lang="ar-AE"/>
+                            <a:rPr lang="ar-AE">
+                              <a:latin typeface="Cambria Math" panose="02040503050406030204" pitchFamily="18" charset="0"/>
+                            </a:rPr>
                             <m:t>1</m:t>
                           </m:r>
                         </m:sub>
                       </m:sSub>
                       <m:r>
-                        <a:rPr lang="ar-AE"/>
+                        <a:rPr lang="ar-AE">
+                          <a:latin typeface="Cambria Math" panose="02040503050406030204" pitchFamily="18" charset="0"/>
+                        </a:rPr>
                         <m:t>+</m:t>
                       </m:r>
                       <m:sSub>
                         <m:sSubPr>
                           <m:ctrlPr>
-                            <a:rPr lang="ar-AE" i="1"/>
+                            <a:rPr lang="ar-AE" i="1">
+                              <a:latin typeface="Cambria Math" panose="02040503050406030204" pitchFamily="18" charset="0"/>
+                            </a:rPr>
                           </m:ctrlPr>
                         </m:sSubPr>
                         <m:e>
                           <m:r>
-                            <a:rPr lang="ar-AE" i="1"/>
+                            <a:rPr lang="ar-AE" i="1">
+                              <a:latin typeface="Cambria Math" panose="02040503050406030204" pitchFamily="18" charset="0"/>
+                            </a:rPr>
                             <m:t>𝑤</m:t>
                           </m:r>
                         </m:e>
                         <m:sub>
                           <m:r>
-                            <a:rPr lang="ar-AE"/>
+                            <a:rPr lang="ar-AE">
+                              <a:latin typeface="Cambria Math" panose="02040503050406030204" pitchFamily="18" charset="0"/>
+                            </a:rPr>
                             <m:t>2</m:t>
                           </m:r>
                         </m:sub>
@@ -8822,41 +8879,55 @@
                       <m:sSub>
                         <m:sSubPr>
                           <m:ctrlPr>
-                            <a:rPr lang="ar-AE" i="1"/>
+                            <a:rPr lang="ar-AE" i="1">
+                              <a:latin typeface="Cambria Math" panose="02040503050406030204" pitchFamily="18" charset="0"/>
+                            </a:rPr>
                           </m:ctrlPr>
                         </m:sSubPr>
                         <m:e>
                           <m:r>
-                            <a:rPr lang="ar-AE" i="1"/>
+                            <a:rPr lang="ar-AE" i="1">
+                              <a:latin typeface="Cambria Math" panose="02040503050406030204" pitchFamily="18" charset="0"/>
+                            </a:rPr>
                             <m:t>𝑥</m:t>
                           </m:r>
                         </m:e>
                         <m:sub>
                           <m:r>
-                            <a:rPr lang="ar-AE"/>
+                            <a:rPr lang="ar-AE">
+                              <a:latin typeface="Cambria Math" panose="02040503050406030204" pitchFamily="18" charset="0"/>
+                            </a:rPr>
                             <m:t>2</m:t>
                           </m:r>
                         </m:sub>
                       </m:sSub>
                       <m:r>
-                        <a:rPr lang="ar-AE"/>
+                        <a:rPr lang="ar-AE">
+                          <a:latin typeface="Cambria Math" panose="02040503050406030204" pitchFamily="18" charset="0"/>
+                        </a:rPr>
                         <m:t>+⋯+</m:t>
                       </m:r>
                       <m:sSub>
                         <m:sSubPr>
                           <m:ctrlPr>
-                            <a:rPr lang="ar-AE" i="1"/>
+                            <a:rPr lang="ar-AE" i="1">
+                              <a:latin typeface="Cambria Math" panose="02040503050406030204" pitchFamily="18" charset="0"/>
+                            </a:rPr>
                           </m:ctrlPr>
                         </m:sSubPr>
                         <m:e>
                           <m:r>
-                            <a:rPr lang="ar-AE" i="1"/>
+                            <a:rPr lang="ar-AE" i="1">
+                              <a:latin typeface="Cambria Math" panose="02040503050406030204" pitchFamily="18" charset="0"/>
+                            </a:rPr>
                             <m:t>𝑤</m:t>
                           </m:r>
                         </m:e>
                         <m:sub>
                           <m:r>
-                            <a:rPr lang="ar-AE" i="1"/>
+                            <a:rPr lang="ar-AE" i="1">
+                              <a:latin typeface="Cambria Math" panose="02040503050406030204" pitchFamily="18" charset="0"/>
+                            </a:rPr>
                             <m:t>𝑛</m:t>
                           </m:r>
                         </m:sub>
@@ -8864,18 +8935,24 @@
                       <m:sSub>
                         <m:sSubPr>
                           <m:ctrlPr>
-                            <a:rPr lang="ar-AE" i="1"/>
+                            <a:rPr lang="ar-AE" i="1">
+                              <a:latin typeface="Cambria Math" panose="02040503050406030204" pitchFamily="18" charset="0"/>
+                            </a:rPr>
                           </m:ctrlPr>
                         </m:sSubPr>
                         <m:e>
                           <m:r>
-                            <a:rPr lang="ar-AE" i="1"/>
+                            <a:rPr lang="ar-AE" i="1">
+                              <a:latin typeface="Cambria Math" panose="02040503050406030204" pitchFamily="18" charset="0"/>
+                            </a:rPr>
                             <m:t>𝑥</m:t>
                           </m:r>
                         </m:e>
                         <m:sub>
                           <m:r>
-                            <a:rPr lang="ar-AE" i="1"/>
+                            <a:rPr lang="ar-AE" i="1">
+                              <a:latin typeface="Cambria Math" panose="02040503050406030204" pitchFamily="18" charset="0"/>
+                            </a:rPr>
                             <m:t>𝑛</m:t>
                           </m:r>
                         </m:sub>
@@ -8903,18 +8980,24 @@
                     <m:sSub>
                       <m:sSubPr>
                         <m:ctrlPr>
-                          <a:rPr lang="ar-AE"/>
+                          <a:rPr lang="ar-AE" i="1">
+                            <a:latin typeface="Cambria Math" panose="02040503050406030204" pitchFamily="18" charset="0"/>
+                          </a:rPr>
                         </m:ctrlPr>
                       </m:sSubPr>
                       <m:e>
                         <m:r>
-                          <a:rPr lang="ar-AE" i="1"/>
+                          <a:rPr lang="ar-AE" i="1">
+                            <a:latin typeface="Cambria Math" panose="02040503050406030204" pitchFamily="18" charset="0"/>
+                          </a:rPr>
                           <m:t>𝑥</m:t>
                         </m:r>
                       </m:e>
                       <m:sub>
                         <m:r>
-                          <a:rPr lang="ar-AE" i="1"/>
+                          <a:rPr lang="ar-AE" i="1">
+                            <a:latin typeface="Cambria Math" panose="02040503050406030204" pitchFamily="18" charset="0"/>
+                          </a:rPr>
                           <m:t>𝑖</m:t>
                         </m:r>
                       </m:sub>
@@ -8939,18 +9022,24 @@
                     <m:sSub>
                       <m:sSubPr>
                         <m:ctrlPr>
-                          <a:rPr lang="ar-AE"/>
+                          <a:rPr lang="ar-AE" i="1">
+                            <a:latin typeface="Cambria Math" panose="02040503050406030204" pitchFamily="18" charset="0"/>
+                          </a:rPr>
                         </m:ctrlPr>
                       </m:sSubPr>
                       <m:e>
                         <m:r>
-                          <a:rPr lang="ar-AE" i="1"/>
+                          <a:rPr lang="ar-AE" i="1">
+                            <a:latin typeface="Cambria Math" panose="02040503050406030204" pitchFamily="18" charset="0"/>
+                          </a:rPr>
                           <m:t>𝑤</m:t>
                         </m:r>
                       </m:e>
                       <m:sub>
                         <m:r>
-                          <a:rPr lang="ar-AE" i="1"/>
+                          <a:rPr lang="ar-AE" i="1">
+                            <a:latin typeface="Cambria Math" panose="02040503050406030204" pitchFamily="18" charset="0"/>
+                          </a:rPr>
                           <m:t>𝑖</m:t>
                         </m:r>
                       </m:sub>
@@ -8985,7 +9074,9 @@
                 <a14:m>
                   <m:oMath xmlns:m="http://schemas.openxmlformats.org/officeDocument/2006/math">
                     <m:r>
-                      <a:rPr lang="en-US" i="1"/>
+                      <a:rPr lang="en-US" i="1">
+                        <a:latin typeface="Cambria Math" panose="02040503050406030204" pitchFamily="18" charset="0"/>
+                      </a:rPr>
                       <m:t>𝑏</m:t>
                     </m:r>
                   </m:oMath>
@@ -9064,7 +9155,7 @@
             </p:txBody>
           </p:sp>
         </mc:Choice>
-        <mc:Fallback>
+        <mc:Fallback xmlns="">
           <p:sp>
             <p:nvSpPr>
               <p:cNvPr id="3" name="Content Placeholder 2">
@@ -9286,8 +9377,8 @@
           </a:p>
         </p:txBody>
       </p:sp>
-      <mc:AlternateContent xmlns:mc="http://schemas.openxmlformats.org/markup-compatibility/2006">
-        <mc:Choice xmlns:a14="http://schemas.microsoft.com/office/drawing/2010/main" Requires="a14">
+      <mc:AlternateContent xmlns:mc="http://schemas.openxmlformats.org/markup-compatibility/2006" xmlns:a14="http://schemas.microsoft.com/office/drawing/2010/main">
+        <mc:Choice Requires="a14">
           <p:sp>
             <p:nvSpPr>
               <p:cNvPr id="3" name="Content Placeholder 2">
@@ -9382,32 +9473,40 @@
                     </m:oMathParaPr>
                     <m:oMath xmlns:m="http://schemas.openxmlformats.org/officeDocument/2006/math">
                       <m:r>
-                        <a:rPr lang="it-IT" i="1"/>
+                        <a:rPr lang="it-IT" i="1">
+                          <a:latin typeface="Cambria Math" panose="02040503050406030204" pitchFamily="18" charset="0"/>
+                        </a:rPr>
                         <m:t>𝑤</m:t>
                       </m:r>
                       <m:r>
-                        <a:rPr lang="it-IT"/>
+                        <a:rPr lang="it-IT">
+                          <a:latin typeface="Cambria Math" panose="02040503050406030204" pitchFamily="18" charset="0"/>
+                        </a:rPr>
                         <m:t>⋅</m:t>
                       </m:r>
                       <m:r>
-                        <a:rPr lang="it-IT" i="1"/>
+                        <a:rPr lang="it-IT" i="1">
+                          <a:latin typeface="Cambria Math" panose="02040503050406030204" pitchFamily="18" charset="0"/>
+                        </a:rPr>
                         <m:t>𝑥</m:t>
                       </m:r>
                       <m:r>
-                        <a:rPr lang="it-IT"/>
+                        <a:rPr lang="it-IT">
+                          <a:latin typeface="Cambria Math" panose="02040503050406030204" pitchFamily="18" charset="0"/>
+                        </a:rPr>
                         <m:t>+</m:t>
                       </m:r>
                       <m:r>
-                        <a:rPr lang="it-IT" i="1"/>
+                        <a:rPr lang="it-IT" i="1">
+                          <a:latin typeface="Cambria Math" panose="02040503050406030204" pitchFamily="18" charset="0"/>
+                        </a:rPr>
                         <m:t>𝑏</m:t>
                       </m:r>
                       <m:r>
-                        <a:rPr lang="it-IT"/>
-                        <m:t>=</m:t>
-                      </m:r>
-                      <m:r>
-                        <a:rPr lang="it-IT"/>
-                        <m:t>0</m:t>
+                        <a:rPr lang="it-IT">
+                          <a:latin typeface="Cambria Math" panose="02040503050406030204" pitchFamily="18" charset="0"/>
+                        </a:rPr>
+                        <m:t>=0</m:t>
                       </m:r>
                     </m:oMath>
                   </m:oMathPara>
@@ -9430,7 +9529,9 @@
                 <a14:m>
                   <m:oMath xmlns:m="http://schemas.openxmlformats.org/officeDocument/2006/math">
                     <m:r>
-                      <a:rPr lang="it-IT" i="1"/>
+                      <a:rPr lang="it-IT" i="1">
+                        <a:latin typeface="Cambria Math" panose="02040503050406030204" pitchFamily="18" charset="0"/>
+                      </a:rPr>
                       <m:t>𝑤</m:t>
                     </m:r>
                   </m:oMath>
@@ -9447,7 +9548,9 @@
                 <a14:m>
                   <m:oMath xmlns:m="http://schemas.openxmlformats.org/officeDocument/2006/math">
                     <m:r>
-                      <a:rPr lang="it-IT" i="1"/>
+                      <a:rPr lang="it-IT" i="1">
+                        <a:latin typeface="Cambria Math" panose="02040503050406030204" pitchFamily="18" charset="0"/>
+                      </a:rPr>
                       <m:t>𝑥</m:t>
                     </m:r>
                   </m:oMath>
@@ -9464,7 +9567,9 @@
                 <a14:m>
                   <m:oMath xmlns:m="http://schemas.openxmlformats.org/officeDocument/2006/math">
                     <m:r>
-                      <a:rPr lang="it-IT" i="1"/>
+                      <a:rPr lang="it-IT" i="1">
+                        <a:latin typeface="Cambria Math" panose="02040503050406030204" pitchFamily="18" charset="0"/>
+                      </a:rPr>
                       <m:t>𝑏</m:t>
                     </m:r>
                   </m:oMath>
@@ -9510,7 +9615,7 @@
             </p:txBody>
           </p:sp>
         </mc:Choice>
-        <mc:Fallback>
+        <mc:Fallback xmlns="">
           <p:sp>
             <p:nvSpPr>
               <p:cNvPr id="3" name="Content Placeholder 2">
@@ -9902,8 +10007,8 @@
           </a:p>
         </p:txBody>
       </p:sp>
-      <mc:AlternateContent xmlns:mc="http://schemas.openxmlformats.org/markup-compatibility/2006">
-        <mc:Choice xmlns:a14="http://schemas.microsoft.com/office/drawing/2010/main" Requires="a14">
+      <mc:AlternateContent xmlns:mc="http://schemas.openxmlformats.org/markup-compatibility/2006" xmlns:a14="http://schemas.microsoft.com/office/drawing/2010/main">
+        <mc:Choice Requires="a14">
           <p:sp>
             <p:nvSpPr>
               <p:cNvPr id="3" name="Content Placeholder 2">
@@ -10217,19 +10322,27 @@
                     </m:oMathParaPr>
                     <m:oMath xmlns:m="http://schemas.openxmlformats.org/officeDocument/2006/math">
                       <m:r>
-                        <a:rPr lang="en-US" i="1"/>
+                        <a:rPr lang="en-US" i="1">
+                          <a:latin typeface="Cambria Math" panose="02040503050406030204" pitchFamily="18" charset="0"/>
+                        </a:rPr>
                         <m:t>𝐺𝑖𝑛𝑖</m:t>
                       </m:r>
                       <m:r>
-                        <a:rPr lang="en-US"/>
+                        <a:rPr lang="en-US">
+                          <a:latin typeface="Cambria Math" panose="02040503050406030204" pitchFamily="18" charset="0"/>
+                        </a:rPr>
                         <m:t>=</m:t>
                       </m:r>
                       <m:r>
-                        <a:rPr lang="en-US"/>
+                        <a:rPr lang="en-US">
+                          <a:latin typeface="Cambria Math" panose="02040503050406030204" pitchFamily="18" charset="0"/>
+                        </a:rPr>
                         <m:t>1</m:t>
                       </m:r>
                       <m:r>
-                        <a:rPr lang="en-US"/>
+                        <a:rPr lang="en-US">
+                          <a:latin typeface="Cambria Math" panose="02040503050406030204" pitchFamily="18" charset="0"/>
+                        </a:rPr>
                         <m:t>−</m:t>
                       </m:r>
                       <m:nary>
@@ -10238,26 +10351,36 @@
                           <m:limLoc m:val="subSup"/>
                           <m:grow m:val="on"/>
                           <m:ctrlPr>
-                            <a:rPr lang="ar-AE" i="1"/>
+                            <a:rPr lang="ar-AE" i="1">
+                              <a:latin typeface="Cambria Math" panose="02040503050406030204" pitchFamily="18" charset="0"/>
+                            </a:rPr>
                           </m:ctrlPr>
                         </m:naryPr>
                         <m:sub>
                           <m:r>
-                            <a:rPr lang="ar-AE" i="1"/>
+                            <a:rPr lang="ar-AE" i="1">
+                              <a:latin typeface="Cambria Math" panose="02040503050406030204" pitchFamily="18" charset="0"/>
+                            </a:rPr>
                             <m:t>𝑖</m:t>
                           </m:r>
                           <m:r>
-                            <a:rPr lang="ar-AE"/>
+                            <a:rPr lang="ar-AE">
+                              <a:latin typeface="Cambria Math" panose="02040503050406030204" pitchFamily="18" charset="0"/>
+                            </a:rPr>
                             <m:t>=</m:t>
                           </m:r>
                           <m:r>
-                            <a:rPr lang="ar-AE"/>
+                            <a:rPr lang="ar-AE">
+                              <a:latin typeface="Cambria Math" panose="02040503050406030204" pitchFamily="18" charset="0"/>
+                            </a:rPr>
                             <m:t>1</m:t>
                           </m:r>
                         </m:sub>
                         <m:sup>
                           <m:r>
-                            <a:rPr lang="ar-AE" i="1"/>
+                            <a:rPr lang="ar-AE" i="1">
+                              <a:latin typeface="Cambria Math" panose="02040503050406030204" pitchFamily="18" charset="0"/>
+                            </a:rPr>
                             <m:t>𝑛</m:t>
                           </m:r>
                         </m:sup>
@@ -10265,24 +10388,32 @@
                           <m:sSubSup>
                             <m:sSubSupPr>
                               <m:ctrlPr>
-                                <a:rPr lang="ar-AE" i="1"/>
+                                <a:rPr lang="ar-AE" i="1">
+                                  <a:latin typeface="Cambria Math" panose="02040503050406030204" pitchFamily="18" charset="0"/>
+                                </a:rPr>
                               </m:ctrlPr>
                             </m:sSubSupPr>
                             <m:e>
                               <m:r>
-                                <a:rPr lang="ar-AE" i="1"/>
+                                <a:rPr lang="ar-AE" i="1">
+                                  <a:latin typeface="Cambria Math" panose="02040503050406030204" pitchFamily="18" charset="0"/>
+                                </a:rPr>
                                 <m:t>𝑝</m:t>
                               </m:r>
                             </m:e>
                             <m:sub>
                               <m:r>
-                                <a:rPr lang="ar-AE" i="1"/>
+                                <a:rPr lang="ar-AE" i="1">
+                                  <a:latin typeface="Cambria Math" panose="02040503050406030204" pitchFamily="18" charset="0"/>
+                                </a:rPr>
                                 <m:t>𝑖</m:t>
                               </m:r>
                             </m:sub>
                             <m:sup>
                               <m:r>
-                                <a:rPr lang="ar-AE"/>
+                                <a:rPr lang="ar-AE">
+                                  <a:latin typeface="Cambria Math" panose="02040503050406030204" pitchFamily="18" charset="0"/>
+                                </a:rPr>
                                 <m:t>2</m:t>
                               </m:r>
                             </m:sup>
@@ -10316,18 +10447,24 @@
                     <m:sSub>
                       <m:sSubPr>
                         <m:ctrlPr>
-                          <a:rPr lang="ar-AE"/>
+                          <a:rPr lang="ar-AE" i="1">
+                            <a:latin typeface="Cambria Math" panose="02040503050406030204" pitchFamily="18" charset="0"/>
+                          </a:rPr>
                         </m:ctrlPr>
                       </m:sSubPr>
                       <m:e>
                         <m:r>
-                          <a:rPr lang="ar-AE" i="1"/>
+                          <a:rPr lang="ar-AE" i="1">
+                            <a:latin typeface="Cambria Math" panose="02040503050406030204" pitchFamily="18" charset="0"/>
+                          </a:rPr>
                           <m:t>𝑝</m:t>
                         </m:r>
                       </m:e>
                       <m:sub>
                         <m:r>
-                          <a:rPr lang="ar-AE" i="1"/>
+                          <a:rPr lang="ar-AE" i="1">
+                            <a:latin typeface="Cambria Math" panose="02040503050406030204" pitchFamily="18" charset="0"/>
+                          </a:rPr>
                           <m:t>𝑖</m:t>
                         </m:r>
                       </m:sub>
@@ -10365,7 +10502,9 @@
                 <a14:m>
                   <m:oMath xmlns:m="http://schemas.openxmlformats.org/officeDocument/2006/math">
                     <m:r>
-                      <a:rPr lang="en-US" i="1"/>
+                      <a:rPr lang="en-US" i="1">
+                        <a:latin typeface="Cambria Math" panose="02040503050406030204" pitchFamily="18" charset="0"/>
+                      </a:rPr>
                       <m:t>𝑖</m:t>
                     </m:r>
                   </m:oMath>
@@ -10419,7 +10558,7 @@
             </p:txBody>
           </p:sp>
         </mc:Choice>
-        <mc:Fallback>
+        <mc:Fallback xmlns="">
           <p:sp>
             <p:nvSpPr>
               <p:cNvPr id="3" name="Content Placeholder 2">
@@ -10849,39 +10988,6 @@
             <a:pPr marL="0" indent="0">
               <a:buNone/>
             </a:pPr>
-            <a:r>
-              <a:rPr lang="it-IT" dirty="0"/>
-              <a:t>	Introduzione a LLM</a:t>
-            </a:r>
-          </a:p>
-          <a:p>
-            <a:pPr marL="0" indent="0">
-              <a:buNone/>
-            </a:pPr>
-            <a:r>
-              <a:rPr lang="it-IT" dirty="0"/>
-              <a:t>	docker</a:t>
-            </a:r>
-          </a:p>
-          <a:p>
-            <a:pPr marL="0" indent="0">
-              <a:buNone/>
-            </a:pPr>
-            <a:r>
-              <a:rPr lang="it-IT" dirty="0"/>
-              <a:t>	database non relazionali </a:t>
-            </a:r>
-          </a:p>
-          <a:p>
-            <a:pPr marL="0" indent="0">
-              <a:buNone/>
-            </a:pPr>
-            <a:r>
-              <a:rPr lang="it-IT" dirty="0"/>
-              <a:t>	RAG e MCP</a:t>
-            </a:r>
-          </a:p>
-          <a:p>
             <a:endParaRPr lang="en-US" dirty="0"/>
           </a:p>
         </p:txBody>
@@ -10944,8 +11050,8 @@
           </a:p>
         </p:txBody>
       </p:sp>
-      <mc:AlternateContent xmlns:mc="http://schemas.openxmlformats.org/markup-compatibility/2006">
-        <mc:Choice xmlns:a14="http://schemas.microsoft.com/office/drawing/2010/main" Requires="a14">
+      <mc:AlternateContent xmlns:mc="http://schemas.openxmlformats.org/markup-compatibility/2006" xmlns:a14="http://schemas.microsoft.com/office/drawing/2010/main">
+        <mc:Choice Requires="a14">
           <p:sp>
             <p:nvSpPr>
               <p:cNvPr id="3" name="Content Placeholder 2">
@@ -11032,7 +11138,9 @@
                 <a14:m>
                   <m:oMath xmlns:m="http://schemas.openxmlformats.org/officeDocument/2006/math">
                     <m:r>
-                      <a:rPr lang="it-IT" i="1"/>
+                      <a:rPr lang="it-IT" i="1">
+                        <a:latin typeface="Cambria Math" panose="02040503050406030204" pitchFamily="18" charset="0"/>
+                      </a:rPr>
                       <m:t>𝐾</m:t>
                     </m:r>
                   </m:oMath>
@@ -11090,7 +11198,7 @@
             </p:txBody>
           </p:sp>
         </mc:Choice>
-        <mc:Fallback>
+        <mc:Fallback xmlns="">
           <p:sp>
             <p:nvSpPr>
               <p:cNvPr id="3" name="Content Placeholder 2">
@@ -11188,8 +11296,8 @@
           </a:p>
         </p:txBody>
       </p:sp>
-      <mc:AlternateContent xmlns:mc="http://schemas.openxmlformats.org/markup-compatibility/2006">
-        <mc:Choice xmlns:a14="http://schemas.microsoft.com/office/drawing/2010/main" Requires="a14">
+      <mc:AlternateContent xmlns:mc="http://schemas.openxmlformats.org/markup-compatibility/2006" xmlns:a14="http://schemas.microsoft.com/office/drawing/2010/main">
+        <mc:Choice Requires="a14">
           <p:sp>
             <p:nvSpPr>
               <p:cNvPr id="3" name="Content Placeholder 2">
@@ -11302,18 +11410,24 @@
                     <m:sSub>
                       <m:sSubPr>
                         <m:ctrlPr>
-                          <a:rPr lang="ar-AE"/>
+                          <a:rPr lang="ar-AE" i="1">
+                            <a:latin typeface="Cambria Math" panose="02040503050406030204" pitchFamily="18" charset="0"/>
+                          </a:rPr>
                         </m:ctrlPr>
                       </m:sSubPr>
                       <m:e>
                         <m:r>
-                          <a:rPr lang="ar-AE" i="1"/>
+                          <a:rPr lang="ar-AE" i="1">
+                            <a:latin typeface="Cambria Math" panose="02040503050406030204" pitchFamily="18" charset="0"/>
+                          </a:rPr>
                           <m:t>𝑥</m:t>
                         </m:r>
                       </m:e>
                       <m:sub>
                         <m:r>
-                          <a:rPr lang="ar-AE" i="1"/>
+                          <a:rPr lang="ar-AE" i="1">
+                            <a:latin typeface="Cambria Math" panose="02040503050406030204" pitchFamily="18" charset="0"/>
+                          </a:rPr>
                           <m:t>𝑖</m:t>
                         </m:r>
                       </m:sub>
@@ -11338,18 +11452,24 @@
                     <m:sSub>
                       <m:sSubPr>
                         <m:ctrlPr>
-                          <a:rPr lang="ar-AE"/>
+                          <a:rPr lang="ar-AE" i="1">
+                            <a:latin typeface="Cambria Math" panose="02040503050406030204" pitchFamily="18" charset="0"/>
+                          </a:rPr>
                         </m:ctrlPr>
                       </m:sSubPr>
                       <m:e>
                         <m:r>
-                          <a:rPr lang="ar-AE" i="1"/>
+                          <a:rPr lang="ar-AE" i="1">
+                            <a:latin typeface="Cambria Math" panose="02040503050406030204" pitchFamily="18" charset="0"/>
+                          </a:rPr>
                           <m:t>𝑦</m:t>
                         </m:r>
                       </m:e>
                       <m:sub>
                         <m:r>
-                          <a:rPr lang="ar-AE" i="1"/>
+                          <a:rPr lang="ar-AE" i="1">
+                            <a:latin typeface="Cambria Math" panose="02040503050406030204" pitchFamily="18" charset="0"/>
+                          </a:rPr>
                           <m:t>𝑖</m:t>
                         </m:r>
                       </m:sub>
@@ -11391,7 +11511,9 @@
                 <a14:m>
                   <m:oMath xmlns:m="http://schemas.openxmlformats.org/officeDocument/2006/math">
                     <m:r>
-                      <a:rPr lang="it-IT" i="1"/>
+                      <a:rPr lang="it-IT" i="1">
+                        <a:latin typeface="Cambria Math" panose="02040503050406030204" pitchFamily="18" charset="0"/>
+                      </a:rPr>
                       <m:t>𝐾</m:t>
                     </m:r>
                   </m:oMath>
@@ -11458,7 +11580,7 @@
             </p:txBody>
           </p:sp>
         </mc:Choice>
-        <mc:Fallback>
+        <mc:Fallback xmlns="">
           <p:sp>
             <p:nvSpPr>
               <p:cNvPr id="3" name="Content Placeholder 2">
@@ -11620,8 +11742,8 @@
           </a:p>
         </p:txBody>
       </p:sp>
-      <mc:AlternateContent xmlns:mc="http://schemas.openxmlformats.org/markup-compatibility/2006">
-        <mc:Choice xmlns:a14="http://schemas.microsoft.com/office/drawing/2010/main" Requires="a14">
+      <mc:AlternateContent xmlns:mc="http://schemas.openxmlformats.org/markup-compatibility/2006" xmlns:a14="http://schemas.microsoft.com/office/drawing/2010/main">
+        <mc:Choice Requires="a14">
           <p:sp>
             <p:nvSpPr>
               <p:cNvPr id="3" name="Content Placeholder 2">
@@ -11673,7 +11795,9 @@
                 <a14:m>
                   <m:oMath xmlns:m="http://schemas.openxmlformats.org/officeDocument/2006/math">
                     <m:r>
-                      <a:rPr lang="it-IT" i="1"/>
+                      <a:rPr lang="it-IT" i="1">
+                        <a:latin typeface="Cambria Math" panose="02040503050406030204" pitchFamily="18" charset="0"/>
+                      </a:rPr>
                       <m:t>𝐾</m:t>
                     </m:r>
                   </m:oMath>
@@ -11781,7 +11905,9 @@
                 <a14:m>
                   <m:oMath xmlns:m="http://schemas.openxmlformats.org/officeDocument/2006/math">
                     <m:r>
-                      <a:rPr lang="it-IT" i="1"/>
+                      <a:rPr lang="it-IT" i="1">
+                        <a:latin typeface="Cambria Math" panose="02040503050406030204" pitchFamily="18" charset="0"/>
+                      </a:rPr>
                       <m:t>𝐾</m:t>
                     </m:r>
                   </m:oMath>
@@ -11821,7 +11947,7 @@
             </p:txBody>
           </p:sp>
         </mc:Choice>
-        <mc:Fallback>
+        <mc:Fallback xmlns="">
           <p:sp>
             <p:nvSpPr>
               <p:cNvPr id="3" name="Content Placeholder 2">
@@ -11954,8 +12080,8 @@
           </a:p>
         </p:txBody>
       </p:sp>
-      <mc:AlternateContent xmlns:mc="http://schemas.openxmlformats.org/markup-compatibility/2006">
-        <mc:Choice xmlns:a14="http://schemas.microsoft.com/office/drawing/2010/main" Requires="a14">
+      <mc:AlternateContent xmlns:mc="http://schemas.openxmlformats.org/markup-compatibility/2006" xmlns:a14="http://schemas.microsoft.com/office/drawing/2010/main">
+        <mc:Choice Requires="a14">
           <p:sp>
             <p:nvSpPr>
               <p:cNvPr id="3" name="Content Placeholder 2">
@@ -12055,7 +12181,9 @@
                 <a14:m>
                   <m:oMath xmlns:m="http://schemas.openxmlformats.org/officeDocument/2006/math">
                     <m:r>
-                      <a:rPr lang="it-IT" i="1"/>
+                      <a:rPr lang="it-IT" i="1">
+                        <a:latin typeface="Cambria Math" panose="02040503050406030204" pitchFamily="18" charset="0"/>
+                      </a:rPr>
                       <m:t>𝐾</m:t>
                     </m:r>
                   </m:oMath>
@@ -12092,7 +12220,7 @@
             </p:txBody>
           </p:sp>
         </mc:Choice>
-        <mc:Fallback>
+        <mc:Fallback xmlns="">
           <p:sp>
             <p:nvSpPr>
               <p:cNvPr id="3" name="Content Placeholder 2">
@@ -12406,8 +12534,8 @@
           </a:p>
         </p:txBody>
       </p:sp>
-      <mc:AlternateContent xmlns:mc="http://schemas.openxmlformats.org/markup-compatibility/2006">
-        <mc:Choice xmlns:a14="http://schemas.microsoft.com/office/drawing/2010/main" Requires="a14">
+      <mc:AlternateContent xmlns:mc="http://schemas.openxmlformats.org/markup-compatibility/2006" xmlns:a14="http://schemas.microsoft.com/office/drawing/2010/main">
+        <mc:Choice Requires="a14">
           <p:sp>
             <p:nvSpPr>
               <p:cNvPr id="3" name="Content Placeholder 2">
@@ -12529,7 +12657,9 @@
                 <a14:m>
                   <m:oMath xmlns:m="http://schemas.openxmlformats.org/officeDocument/2006/math">
                     <m:r>
-                      <a:rPr lang="it-IT" i="1"/>
+                      <a:rPr lang="it-IT" i="1">
+                        <a:latin typeface="Cambria Math" panose="02040503050406030204" pitchFamily="18" charset="0"/>
+                      </a:rPr>
                       <m:t>𝜀</m:t>
                     </m:r>
                   </m:oMath>
@@ -12565,7 +12695,7 @@
             </p:txBody>
           </p:sp>
         </mc:Choice>
-        <mc:Fallback>
+        <mc:Fallback xmlns="">
           <p:sp>
             <p:nvSpPr>
               <p:cNvPr id="3" name="Content Placeholder 2">
@@ -12951,8 +13081,8 @@
           </a:p>
         </p:txBody>
       </p:sp>
-      <mc:AlternateContent xmlns:mc="http://schemas.openxmlformats.org/markup-compatibility/2006">
-        <mc:Choice xmlns:a14="http://schemas.microsoft.com/office/drawing/2010/main" Requires="a14">
+      <mc:AlternateContent xmlns:mc="http://schemas.openxmlformats.org/markup-compatibility/2006" xmlns:a14="http://schemas.microsoft.com/office/drawing/2010/main">
+        <mc:Choice Requires="a14">
           <p:sp>
             <p:nvSpPr>
               <p:cNvPr id="3" name="Content Placeholder 2">
@@ -13075,11 +13205,15 @@
                     </m:oMathParaPr>
                     <m:oMath xmlns:m="http://schemas.openxmlformats.org/officeDocument/2006/math">
                       <m:r>
-                        <a:rPr lang="en-US" i="1"/>
+                        <a:rPr lang="en-US" i="1">
+                          <a:latin typeface="Cambria Math" panose="02040503050406030204" pitchFamily="18" charset="0"/>
+                        </a:rPr>
                         <m:t>𝑧</m:t>
                       </m:r>
                       <m:r>
-                        <a:rPr lang="en-US"/>
+                        <a:rPr lang="en-US">
+                          <a:latin typeface="Cambria Math" panose="02040503050406030204" pitchFamily="18" charset="0"/>
+                        </a:rPr>
                         <m:t>=</m:t>
                       </m:r>
                       <m:nary>
@@ -13088,26 +13222,36 @@
                           <m:limLoc m:val="subSup"/>
                           <m:grow m:val="on"/>
                           <m:ctrlPr>
-                            <a:rPr lang="ar-AE" i="1"/>
+                            <a:rPr lang="ar-AE" i="1">
+                              <a:latin typeface="Cambria Math" panose="02040503050406030204" pitchFamily="18" charset="0"/>
+                            </a:rPr>
                           </m:ctrlPr>
                         </m:naryPr>
                         <m:sub>
                           <m:r>
-                            <a:rPr lang="ar-AE" i="1"/>
+                            <a:rPr lang="ar-AE" i="1">
+                              <a:latin typeface="Cambria Math" panose="02040503050406030204" pitchFamily="18" charset="0"/>
+                            </a:rPr>
                             <m:t>𝑖</m:t>
                           </m:r>
                           <m:r>
-                            <a:rPr lang="ar-AE"/>
+                            <a:rPr lang="ar-AE">
+                              <a:latin typeface="Cambria Math" panose="02040503050406030204" pitchFamily="18" charset="0"/>
+                            </a:rPr>
                             <m:t>=</m:t>
                           </m:r>
                           <m:r>
-                            <a:rPr lang="ar-AE"/>
+                            <a:rPr lang="ar-AE">
+                              <a:latin typeface="Cambria Math" panose="02040503050406030204" pitchFamily="18" charset="0"/>
+                            </a:rPr>
                             <m:t>1</m:t>
                           </m:r>
                         </m:sub>
                         <m:sup>
                           <m:r>
-                            <a:rPr lang="ar-AE" i="1"/>
+                            <a:rPr lang="ar-AE" i="1">
+                              <a:latin typeface="Cambria Math" panose="02040503050406030204" pitchFamily="18" charset="0"/>
+                            </a:rPr>
                             <m:t>𝑛</m:t>
                           </m:r>
                         </m:sup>
@@ -13115,18 +13259,24 @@
                           <m:sSub>
                             <m:sSubPr>
                               <m:ctrlPr>
-                                <a:rPr lang="ar-AE" i="1"/>
+                                <a:rPr lang="ar-AE" i="1">
+                                  <a:latin typeface="Cambria Math" panose="02040503050406030204" pitchFamily="18" charset="0"/>
+                                </a:rPr>
                               </m:ctrlPr>
                             </m:sSubPr>
                             <m:e>
                               <m:r>
-                                <a:rPr lang="ar-AE" i="1"/>
+                                <a:rPr lang="ar-AE" i="1">
+                                  <a:latin typeface="Cambria Math" panose="02040503050406030204" pitchFamily="18" charset="0"/>
+                                </a:rPr>
                                 <m:t>𝑤</m:t>
                               </m:r>
                             </m:e>
                             <m:sub>
                               <m:r>
-                                <a:rPr lang="ar-AE" i="1"/>
+                                <a:rPr lang="ar-AE" i="1">
+                                  <a:latin typeface="Cambria Math" panose="02040503050406030204" pitchFamily="18" charset="0"/>
+                                </a:rPr>
                                 <m:t>𝑖</m:t>
                               </m:r>
                             </m:sub>
@@ -13136,28 +13286,38 @@
                       <m:sSub>
                         <m:sSubPr>
                           <m:ctrlPr>
-                            <a:rPr lang="ar-AE" i="1"/>
+                            <a:rPr lang="ar-AE" i="1">
+                              <a:latin typeface="Cambria Math" panose="02040503050406030204" pitchFamily="18" charset="0"/>
+                            </a:rPr>
                           </m:ctrlPr>
                         </m:sSubPr>
                         <m:e>
                           <m:r>
-                            <a:rPr lang="ar-AE" i="1"/>
+                            <a:rPr lang="ar-AE" i="1">
+                              <a:latin typeface="Cambria Math" panose="02040503050406030204" pitchFamily="18" charset="0"/>
+                            </a:rPr>
                             <m:t>𝑥</m:t>
                           </m:r>
                         </m:e>
                         <m:sub>
                           <m:r>
-                            <a:rPr lang="ar-AE" i="1"/>
+                            <a:rPr lang="ar-AE" i="1">
+                              <a:latin typeface="Cambria Math" panose="02040503050406030204" pitchFamily="18" charset="0"/>
+                            </a:rPr>
                             <m:t>𝑖</m:t>
                           </m:r>
                         </m:sub>
                       </m:sSub>
                       <m:r>
-                        <a:rPr lang="ar-AE"/>
+                        <a:rPr lang="ar-AE">
+                          <a:latin typeface="Cambria Math" panose="02040503050406030204" pitchFamily="18" charset="0"/>
+                        </a:rPr>
                         <m:t>+</m:t>
                       </m:r>
                       <m:r>
-                        <a:rPr lang="ar-AE" i="1"/>
+                        <a:rPr lang="ar-AE" i="1">
+                          <a:latin typeface="Cambria Math" panose="02040503050406030204" pitchFamily="18" charset="0"/>
+                        </a:rPr>
                         <m:t>𝑏</m:t>
                       </m:r>
                     </m:oMath>
@@ -13183,18 +13343,24 @@
                     <m:sSub>
                       <m:sSubPr>
                         <m:ctrlPr>
-                          <a:rPr lang="ar-AE"/>
+                          <a:rPr lang="ar-AE" i="1">
+                            <a:latin typeface="Cambria Math" panose="02040503050406030204" pitchFamily="18" charset="0"/>
+                          </a:rPr>
                         </m:ctrlPr>
                       </m:sSubPr>
                       <m:e>
                         <m:r>
-                          <a:rPr lang="ar-AE" i="1"/>
+                          <a:rPr lang="ar-AE" i="1">
+                            <a:latin typeface="Cambria Math" panose="02040503050406030204" pitchFamily="18" charset="0"/>
+                          </a:rPr>
                           <m:t>𝑥</m:t>
                         </m:r>
                       </m:e>
                       <m:sub>
                         <m:r>
-                          <a:rPr lang="ar-AE" i="1"/>
+                          <a:rPr lang="ar-AE" i="1">
+                            <a:latin typeface="Cambria Math" panose="02040503050406030204" pitchFamily="18" charset="0"/>
+                          </a:rPr>
                           <m:t>𝑖</m:t>
                         </m:r>
                       </m:sub>
@@ -13219,18 +13385,24 @@
                     <m:sSub>
                       <m:sSubPr>
                         <m:ctrlPr>
-                          <a:rPr lang="ar-AE"/>
+                          <a:rPr lang="ar-AE" i="1">
+                            <a:latin typeface="Cambria Math" panose="02040503050406030204" pitchFamily="18" charset="0"/>
+                          </a:rPr>
                         </m:ctrlPr>
                       </m:sSubPr>
                       <m:e>
                         <m:r>
-                          <a:rPr lang="ar-AE" i="1"/>
+                          <a:rPr lang="ar-AE" i="1">
+                            <a:latin typeface="Cambria Math" panose="02040503050406030204" pitchFamily="18" charset="0"/>
+                          </a:rPr>
                           <m:t>𝑤</m:t>
                         </m:r>
                       </m:e>
                       <m:sub>
                         <m:r>
-                          <a:rPr lang="ar-AE" i="1"/>
+                          <a:rPr lang="ar-AE" i="1">
+                            <a:latin typeface="Cambria Math" panose="02040503050406030204" pitchFamily="18" charset="0"/>
+                          </a:rPr>
                           <m:t>𝑖</m:t>
                         </m:r>
                       </m:sub>
@@ -13261,7 +13433,9 @@
                 <a14:m>
                   <m:oMath xmlns:m="http://schemas.openxmlformats.org/officeDocument/2006/math">
                     <m:r>
-                      <a:rPr lang="en-US" i="1"/>
+                      <a:rPr lang="en-US" i="1">
+                        <a:latin typeface="Cambria Math" panose="02040503050406030204" pitchFamily="18" charset="0"/>
+                      </a:rPr>
                       <m:t>𝑏</m:t>
                     </m:r>
                   </m:oMath>
@@ -13337,7 +13511,7 @@
             </p:txBody>
           </p:sp>
         </mc:Choice>
-        <mc:Fallback>
+        <mc:Fallback xmlns="">
           <p:sp>
             <p:nvSpPr>
               <p:cNvPr id="3" name="Content Placeholder 2">
@@ -13909,8 +14083,8 @@
           </a:p>
         </p:txBody>
       </p:sp>
-      <mc:AlternateContent xmlns:mc="http://schemas.openxmlformats.org/markup-compatibility/2006">
-        <mc:Choice xmlns:a14="http://schemas.microsoft.com/office/drawing/2010/main" Requires="a14">
+      <mc:AlternateContent xmlns:mc="http://schemas.openxmlformats.org/markup-compatibility/2006" xmlns:a14="http://schemas.microsoft.com/office/drawing/2010/main">
+        <mc:Choice Requires="a14">
           <p:sp>
             <p:nvSpPr>
               <p:cNvPr id="3" name="Content Placeholder 2">
@@ -14055,20 +14229,28 @@
                       <m:d>
                         <m:dPr>
                           <m:ctrlPr>
-                            <a:rPr lang="ar-AE"/>
+                            <a:rPr lang="ar-AE" i="1">
+                              <a:latin typeface="Cambria Math" panose="02040503050406030204" pitchFamily="18" charset="0"/>
+                            </a:rPr>
                           </m:ctrlPr>
                         </m:dPr>
                         <m:e>
                           <m:r>
-                            <a:rPr lang="ar-AE" i="1"/>
+                            <a:rPr lang="ar-AE" i="1">
+                              <a:latin typeface="Cambria Math" panose="02040503050406030204" pitchFamily="18" charset="0"/>
+                            </a:rPr>
                             <m:t>𝑓</m:t>
                           </m:r>
                           <m:r>
-                            <a:rPr lang="ar-AE"/>
+                            <a:rPr lang="ar-AE">
+                              <a:latin typeface="Cambria Math" panose="02040503050406030204" pitchFamily="18" charset="0"/>
+                            </a:rPr>
                             <m:t>∗</m:t>
                           </m:r>
                           <m:r>
-                            <a:rPr lang="ar-AE" i="1"/>
+                            <a:rPr lang="ar-AE" i="1">
+                              <a:latin typeface="Cambria Math" panose="02040503050406030204" pitchFamily="18" charset="0"/>
+                            </a:rPr>
                             <m:t>𝑔</m:t>
                           </m:r>
                         </m:e>
@@ -14076,18 +14258,24 @@
                       <m:d>
                         <m:dPr>
                           <m:ctrlPr>
-                            <a:rPr lang="ar-AE" i="1"/>
+                            <a:rPr lang="ar-AE" i="1">
+                              <a:latin typeface="Cambria Math" panose="02040503050406030204" pitchFamily="18" charset="0"/>
+                            </a:rPr>
                           </m:ctrlPr>
                         </m:dPr>
                         <m:e>
                           <m:r>
-                            <a:rPr lang="ar-AE" i="1"/>
+                            <a:rPr lang="ar-AE" i="1">
+                              <a:latin typeface="Cambria Math" panose="02040503050406030204" pitchFamily="18" charset="0"/>
+                            </a:rPr>
                             <m:t>𝑡</m:t>
                           </m:r>
                         </m:e>
                       </m:d>
                       <m:r>
-                        <a:rPr lang="ar-AE"/>
+                        <a:rPr lang="ar-AE">
+                          <a:latin typeface="Cambria Math" panose="02040503050406030204" pitchFamily="18" charset="0"/>
+                        </a:rPr>
                         <m:t>=</m:t>
                       </m:r>
                       <m:nary>
@@ -14097,19 +14285,25 @@
                           <m:grow m:val="on"/>
                           <m:supHide m:val="on"/>
                           <m:ctrlPr>
-                            <a:rPr lang="ar-AE" i="1"/>
+                            <a:rPr lang="ar-AE" i="1">
+                              <a:latin typeface="Cambria Math" panose="02040503050406030204" pitchFamily="18" charset="0"/>
+                            </a:rPr>
                           </m:ctrlPr>
                         </m:naryPr>
                         <m:sub>
                           <m:r>
-                            <a:rPr lang="ar-AE" i="1"/>
+                            <a:rPr lang="ar-AE" i="1">
+                              <a:latin typeface="Cambria Math" panose="02040503050406030204" pitchFamily="18" charset="0"/>
+                            </a:rPr>
                             <m:t>𝜏</m:t>
                           </m:r>
                         </m:sub>
                         <m:sup/>
                         <m:e>
                           <m:r>
-                            <a:rPr lang="ar-AE" i="1"/>
+                            <a:rPr lang="ar-AE" i="1">
+                              <a:latin typeface="Cambria Math" panose="02040503050406030204" pitchFamily="18" charset="0"/>
+                            </a:rPr>
                             <m:t>𝑓</m:t>
                           </m:r>
                         </m:e>
@@ -14117,37 +14311,51 @@
                       <m:d>
                         <m:dPr>
                           <m:ctrlPr>
-                            <a:rPr lang="ar-AE" i="1"/>
+                            <a:rPr lang="ar-AE" i="1">
+                              <a:latin typeface="Cambria Math" panose="02040503050406030204" pitchFamily="18" charset="0"/>
+                            </a:rPr>
                           </m:ctrlPr>
                         </m:dPr>
                         <m:e>
                           <m:r>
-                            <a:rPr lang="ar-AE" i="1"/>
+                            <a:rPr lang="ar-AE" i="1">
+                              <a:latin typeface="Cambria Math" panose="02040503050406030204" pitchFamily="18" charset="0"/>
+                            </a:rPr>
                             <m:t>𝜏</m:t>
                           </m:r>
                         </m:e>
                       </m:d>
                       <m:r>
-                        <a:rPr lang="ar-AE" i="1"/>
+                        <a:rPr lang="ar-AE" i="1">
+                          <a:latin typeface="Cambria Math" panose="02040503050406030204" pitchFamily="18" charset="0"/>
+                        </a:rPr>
                         <m:t>𝑔</m:t>
                       </m:r>
                       <m:d>
                         <m:dPr>
                           <m:ctrlPr>
-                            <a:rPr lang="ar-AE" i="1"/>
+                            <a:rPr lang="ar-AE" i="1">
+                              <a:latin typeface="Cambria Math" panose="02040503050406030204" pitchFamily="18" charset="0"/>
+                            </a:rPr>
                           </m:ctrlPr>
                         </m:dPr>
                         <m:e>
                           <m:r>
-                            <a:rPr lang="ar-AE" i="1"/>
+                            <a:rPr lang="ar-AE" i="1">
+                              <a:latin typeface="Cambria Math" panose="02040503050406030204" pitchFamily="18" charset="0"/>
+                            </a:rPr>
                             <m:t>𝑡</m:t>
                           </m:r>
                           <m:r>
-                            <a:rPr lang="ar-AE"/>
+                            <a:rPr lang="ar-AE">
+                              <a:latin typeface="Cambria Math" panose="02040503050406030204" pitchFamily="18" charset="0"/>
+                            </a:rPr>
                             <m:t>−</m:t>
                           </m:r>
                           <m:r>
-                            <a:rPr lang="ar-AE" i="1"/>
+                            <a:rPr lang="ar-AE" i="1">
+                              <a:latin typeface="Cambria Math" panose="02040503050406030204" pitchFamily="18" charset="0"/>
+                            </a:rPr>
                             <m:t>𝜏</m:t>
                           </m:r>
                         </m:e>
@@ -14268,7 +14476,7 @@
             </p:txBody>
           </p:sp>
         </mc:Choice>
-        <mc:Fallback>
+        <mc:Fallback xmlns="">
           <p:sp>
             <p:nvSpPr>
               <p:cNvPr id="3" name="Content Placeholder 2">
@@ -14366,8 +14574,8 @@
           </a:p>
         </p:txBody>
       </p:sp>
-      <mc:AlternateContent xmlns:mc="http://schemas.openxmlformats.org/markup-compatibility/2006">
-        <mc:Choice xmlns:a14="http://schemas.microsoft.com/office/drawing/2010/main" Requires="a14">
+      <mc:AlternateContent xmlns:mc="http://schemas.openxmlformats.org/markup-compatibility/2006" xmlns:a14="http://schemas.microsoft.com/office/drawing/2010/main">
+        <mc:Choice Requires="a14">
           <p:sp>
             <p:nvSpPr>
               <p:cNvPr id="3" name="Content Placeholder 2">
@@ -14445,101 +14653,139 @@
                       <m:sSub>
                         <m:sSubPr>
                           <m:ctrlPr>
-                            <a:rPr lang="ar-AE"/>
+                            <a:rPr lang="ar-AE" i="1">
+                              <a:latin typeface="Cambria Math" panose="02040503050406030204" pitchFamily="18" charset="0"/>
+                            </a:rPr>
                           </m:ctrlPr>
                         </m:sSubPr>
                         <m:e>
                           <m:r>
-                            <a:rPr lang="ar-AE" i="1"/>
+                            <a:rPr lang="ar-AE" i="1">
+                              <a:latin typeface="Cambria Math" panose="02040503050406030204" pitchFamily="18" charset="0"/>
+                            </a:rPr>
                             <m:t>h</m:t>
                           </m:r>
                         </m:e>
                         <m:sub>
                           <m:r>
-                            <a:rPr lang="ar-AE" i="1"/>
+                            <a:rPr lang="ar-AE" i="1">
+                              <a:latin typeface="Cambria Math" panose="02040503050406030204" pitchFamily="18" charset="0"/>
+                            </a:rPr>
                             <m:t>𝑡</m:t>
                           </m:r>
                         </m:sub>
                       </m:sSub>
                       <m:r>
-                        <a:rPr lang="ar-AE"/>
+                        <a:rPr lang="ar-AE">
+                          <a:latin typeface="Cambria Math" panose="02040503050406030204" pitchFamily="18" charset="0"/>
+                        </a:rPr>
                         <m:t>=</m:t>
                       </m:r>
                       <m:r>
-                        <a:rPr lang="ar-AE" i="1"/>
+                        <a:rPr lang="ar-AE" i="1">
+                          <a:latin typeface="Cambria Math" panose="02040503050406030204" pitchFamily="18" charset="0"/>
+                        </a:rPr>
                         <m:t>𝑓</m:t>
                       </m:r>
                       <m:d>
                         <m:dPr>
                           <m:ctrlPr>
-                            <a:rPr lang="ar-AE" i="1"/>
+                            <a:rPr lang="ar-AE" i="1">
+                              <a:latin typeface="Cambria Math" panose="02040503050406030204" pitchFamily="18" charset="0"/>
+                            </a:rPr>
                           </m:ctrlPr>
                         </m:dPr>
                         <m:e>
                           <m:r>
-                            <a:rPr lang="ar-AE" i="1"/>
+                            <a:rPr lang="ar-AE" i="1">
+                              <a:latin typeface="Cambria Math" panose="02040503050406030204" pitchFamily="18" charset="0"/>
+                            </a:rPr>
                             <m:t>𝑊</m:t>
                           </m:r>
                           <m:sSub>
                             <m:sSubPr>
                               <m:ctrlPr>
-                                <a:rPr lang="ar-AE" i="1"/>
+                                <a:rPr lang="ar-AE" i="1">
+                                  <a:latin typeface="Cambria Math" panose="02040503050406030204" pitchFamily="18" charset="0"/>
+                                </a:rPr>
                               </m:ctrlPr>
                             </m:sSubPr>
                             <m:e>
                               <m:r>
-                                <a:rPr lang="ar-AE" i="1"/>
+                                <a:rPr lang="ar-AE" i="1">
+                                  <a:latin typeface="Cambria Math" panose="02040503050406030204" pitchFamily="18" charset="0"/>
+                                </a:rPr>
                                 <m:t>𝑥</m:t>
                               </m:r>
                             </m:e>
                             <m:sub>
                               <m:r>
-                                <a:rPr lang="ar-AE" i="1"/>
+                                <a:rPr lang="ar-AE" i="1">
+                                  <a:latin typeface="Cambria Math" panose="02040503050406030204" pitchFamily="18" charset="0"/>
+                                </a:rPr>
                                 <m:t>𝑡</m:t>
                               </m:r>
                             </m:sub>
                           </m:sSub>
                           <m:r>
-                            <a:rPr lang="ar-AE"/>
+                            <a:rPr lang="ar-AE">
+                              <a:latin typeface="Cambria Math" panose="02040503050406030204" pitchFamily="18" charset="0"/>
+                            </a:rPr>
                             <m:t>+</m:t>
                           </m:r>
                           <m:r>
-                            <a:rPr lang="ar-AE" i="1"/>
+                            <a:rPr lang="ar-AE" i="1">
+                              <a:latin typeface="Cambria Math" panose="02040503050406030204" pitchFamily="18" charset="0"/>
+                            </a:rPr>
                             <m:t>𝑈</m:t>
                           </m:r>
                           <m:sSub>
                             <m:sSubPr>
                               <m:ctrlPr>
-                                <a:rPr lang="ar-AE" i="1"/>
+                                <a:rPr lang="ar-AE" i="1">
+                                  <a:latin typeface="Cambria Math" panose="02040503050406030204" pitchFamily="18" charset="0"/>
+                                </a:rPr>
                               </m:ctrlPr>
                             </m:sSubPr>
                             <m:e>
                               <m:r>
-                                <a:rPr lang="ar-AE" i="1"/>
+                                <a:rPr lang="ar-AE" i="1">
+                                  <a:latin typeface="Cambria Math" panose="02040503050406030204" pitchFamily="18" charset="0"/>
+                                </a:rPr>
                                 <m:t>h</m:t>
                               </m:r>
                             </m:e>
                             <m:sub>
                               <m:r>
-                                <a:rPr lang="ar-AE" i="1"/>
+                                <a:rPr lang="ar-AE" i="1">
+                                  <a:latin typeface="Cambria Math" panose="02040503050406030204" pitchFamily="18" charset="0"/>
+                                </a:rPr>
                                 <m:t>𝑡</m:t>
                               </m:r>
                               <m:r>
-                                <a:rPr lang="ar-AE"/>
+                                <a:rPr lang="ar-AE">
+                                  <a:latin typeface="Cambria Math" panose="02040503050406030204" pitchFamily="18" charset="0"/>
+                                </a:rPr>
                                 <m:t>−</m:t>
                               </m:r>
                               <m:r>
-                                <a:rPr lang="ar-AE"/>
+                                <a:rPr lang="ar-AE">
+                                  <a:latin typeface="Cambria Math" panose="02040503050406030204" pitchFamily="18" charset="0"/>
+                                </a:rPr>
                                 <m:t>1</m:t>
                               </m:r>
                             </m:sub>
                           </m:sSub>
                           <m:r>
-                            <a:rPr lang="ar-AE"/>
+                            <a:rPr lang="ar-AE">
+                              <a:latin typeface="Cambria Math" panose="02040503050406030204" pitchFamily="18" charset="0"/>
+                            </a:rPr>
                             <m:t>+</m:t>
                           </m:r>
                           <m:r>
-                            <a:rPr lang="ar-AE" i="1"/>
+                            <a:rPr lang="ar-AE" i="1">
+                              <a:latin typeface="Cambria Math" panose="02040503050406030204" pitchFamily="18" charset="0"/>
+                            </a:rPr>
                             <m:t>𝑏</m:t>
                           </m:r>
                         </m:e>
@@ -14567,18 +14813,24 @@
                     <m:sSub>
                       <m:sSubPr>
                         <m:ctrlPr>
-                          <a:rPr lang="ar-AE"/>
+                          <a:rPr lang="ar-AE" i="1">
+                            <a:latin typeface="Cambria Math" panose="02040503050406030204" pitchFamily="18" charset="0"/>
+                          </a:rPr>
                         </m:ctrlPr>
                       </m:sSubPr>
                       <m:e>
                         <m:r>
-                          <a:rPr lang="ar-AE" i="1"/>
+                          <a:rPr lang="ar-AE" i="1">
+                            <a:latin typeface="Cambria Math" panose="02040503050406030204" pitchFamily="18" charset="0"/>
+                          </a:rPr>
                           <m:t>𝑥</m:t>
                         </m:r>
                       </m:e>
                       <m:sub>
                         <m:r>
-                          <a:rPr lang="ar-AE" i="1"/>
+                          <a:rPr lang="ar-AE" i="1">
+                            <a:latin typeface="Cambria Math" panose="02040503050406030204" pitchFamily="18" charset="0"/>
+                          </a:rPr>
                           <m:t>𝑡</m:t>
                         </m:r>
                       </m:sub>
@@ -14611,26 +14863,36 @@
                     <m:sSub>
                       <m:sSubPr>
                         <m:ctrlPr>
-                          <a:rPr lang="ar-AE"/>
+                          <a:rPr lang="ar-AE" i="1">
+                            <a:latin typeface="Cambria Math" panose="02040503050406030204" pitchFamily="18" charset="0"/>
+                          </a:rPr>
                         </m:ctrlPr>
                       </m:sSubPr>
                       <m:e>
                         <m:r>
-                          <a:rPr lang="ar-AE" i="1"/>
+                          <a:rPr lang="ar-AE" i="1">
+                            <a:latin typeface="Cambria Math" panose="02040503050406030204" pitchFamily="18" charset="0"/>
+                          </a:rPr>
                           <m:t>h</m:t>
                         </m:r>
                       </m:e>
                       <m:sub>
                         <m:r>
-                          <a:rPr lang="ar-AE" i="1"/>
+                          <a:rPr lang="ar-AE" i="1">
+                            <a:latin typeface="Cambria Math" panose="02040503050406030204" pitchFamily="18" charset="0"/>
+                          </a:rPr>
                           <m:t>𝑡</m:t>
                         </m:r>
                         <m:r>
-                          <a:rPr lang="ar-AE"/>
+                          <a:rPr lang="ar-AE">
+                            <a:latin typeface="Cambria Math" panose="02040503050406030204" pitchFamily="18" charset="0"/>
+                          </a:rPr>
                           <m:t>−</m:t>
                         </m:r>
                         <m:r>
-                          <a:rPr lang="ar-AE"/>
+                          <a:rPr lang="ar-AE">
+                            <a:latin typeface="Cambria Math" panose="02040503050406030204" pitchFamily="18" charset="0"/>
+                          </a:rPr>
                           <m:t>1</m:t>
                         </m:r>
                       </m:sub>
@@ -14667,18 +14929,24 @@
                     <m:sSub>
                       <m:sSubPr>
                         <m:ctrlPr>
-                          <a:rPr lang="ar-AE"/>
+                          <a:rPr lang="ar-AE" i="1">
+                            <a:latin typeface="Cambria Math" panose="02040503050406030204" pitchFamily="18" charset="0"/>
+                          </a:rPr>
                         </m:ctrlPr>
                       </m:sSubPr>
                       <m:e>
                         <m:r>
-                          <a:rPr lang="ar-AE" i="1"/>
+                          <a:rPr lang="ar-AE" i="1">
+                            <a:latin typeface="Cambria Math" panose="02040503050406030204" pitchFamily="18" charset="0"/>
+                          </a:rPr>
                           <m:t>h</m:t>
                         </m:r>
                       </m:e>
                       <m:sub>
                         <m:r>
-                          <a:rPr lang="ar-AE" i="1"/>
+                          <a:rPr lang="ar-AE" i="1">
+                            <a:latin typeface="Cambria Math" panose="02040503050406030204" pitchFamily="18" charset="0"/>
+                          </a:rPr>
                           <m:t>𝑡</m:t>
                         </m:r>
                       </m:sub>
@@ -14751,7 +15019,7 @@
             </p:txBody>
           </p:sp>
         </mc:Choice>
-        <mc:Fallback>
+        <mc:Fallback xmlns="">
           <p:sp>
             <p:nvSpPr>
               <p:cNvPr id="3" name="Content Placeholder 2">
@@ -14849,8 +15117,8 @@
           </a:p>
         </p:txBody>
       </p:sp>
-      <mc:AlternateContent xmlns:mc="http://schemas.openxmlformats.org/markup-compatibility/2006">
-        <mc:Choice xmlns:a14="http://schemas.microsoft.com/office/drawing/2010/main" Requires="a14">
+      <mc:AlternateContent xmlns:mc="http://schemas.openxmlformats.org/markup-compatibility/2006" xmlns:a14="http://schemas.microsoft.com/office/drawing/2010/main">
+        <mc:Choice Requires="a14">
           <p:sp>
             <p:nvSpPr>
               <p:cNvPr id="3" name="Content Placeholder 2">
@@ -15397,76 +15665,102 @@
                     </m:oMathParaPr>
                     <m:oMath xmlns:m="http://schemas.openxmlformats.org/officeDocument/2006/math">
                       <m:r>
-                        <a:rPr lang="en-US" i="1"/>
+                        <a:rPr lang="en-US" i="1">
+                          <a:latin typeface="Cambria Math" panose="02040503050406030204" pitchFamily="18" charset="0"/>
+                        </a:rPr>
                         <m:t>𝐴𝑡𝑡𝑒𝑛𝑡𝑖𝑜𝑛</m:t>
                       </m:r>
                       <m:d>
                         <m:dPr>
                           <m:sepChr m:val=","/>
                           <m:ctrlPr>
-                            <a:rPr lang="ar-AE" i="1"/>
+                            <a:rPr lang="ar-AE" i="1">
+                              <a:latin typeface="Cambria Math" panose="02040503050406030204" pitchFamily="18" charset="0"/>
+                            </a:rPr>
                           </m:ctrlPr>
                         </m:dPr>
                         <m:e>
                           <m:r>
-                            <a:rPr lang="ar-AE" i="1"/>
+                            <a:rPr lang="ar-AE" i="1">
+                              <a:latin typeface="Cambria Math" panose="02040503050406030204" pitchFamily="18" charset="0"/>
+                            </a:rPr>
                             <m:t>𝑄</m:t>
                           </m:r>
                         </m:e>
                         <m:e>
                           <m:r>
-                            <a:rPr lang="ar-AE" i="1"/>
+                            <a:rPr lang="ar-AE" i="1">
+                              <a:latin typeface="Cambria Math" panose="02040503050406030204" pitchFamily="18" charset="0"/>
+                            </a:rPr>
                             <m:t>𝐾</m:t>
                           </m:r>
                         </m:e>
                         <m:e>
                           <m:r>
-                            <a:rPr lang="ar-AE" i="1"/>
+                            <a:rPr lang="ar-AE" i="1">
+                              <a:latin typeface="Cambria Math" panose="02040503050406030204" pitchFamily="18" charset="0"/>
+                            </a:rPr>
                             <m:t>𝑉</m:t>
                           </m:r>
                         </m:e>
                       </m:d>
                       <m:r>
-                        <a:rPr lang="ar-AE"/>
+                        <a:rPr lang="ar-AE">
+                          <a:latin typeface="Cambria Math" panose="02040503050406030204" pitchFamily="18" charset="0"/>
+                        </a:rPr>
                         <m:t>=</m:t>
                       </m:r>
                       <m:r>
-                        <a:rPr lang="ar-AE" i="1"/>
+                        <a:rPr lang="ar-AE" i="1">
+                          <a:latin typeface="Cambria Math" panose="02040503050406030204" pitchFamily="18" charset="0"/>
+                        </a:rPr>
                         <m:t>𝑠𝑜𝑓𝑡𝑚𝑎𝑥</m:t>
                       </m:r>
                       <m:d>
                         <m:dPr>
                           <m:ctrlPr>
-                            <a:rPr lang="ar-AE" i="1"/>
+                            <a:rPr lang="ar-AE" i="1">
+                              <a:latin typeface="Cambria Math" panose="02040503050406030204" pitchFamily="18" charset="0"/>
+                            </a:rPr>
                           </m:ctrlPr>
                         </m:dPr>
                         <m:e>
                           <m:f>
                             <m:fPr>
                               <m:ctrlPr>
-                                <a:rPr lang="ar-AE" i="1"/>
+                                <a:rPr lang="ar-AE" i="1">
+                                  <a:latin typeface="Cambria Math" panose="02040503050406030204" pitchFamily="18" charset="0"/>
+                                </a:rPr>
                               </m:ctrlPr>
                             </m:fPr>
                             <m:num>
                               <m:r>
-                                <a:rPr lang="ar-AE" i="1"/>
+                                <a:rPr lang="ar-AE" i="1">
+                                  <a:latin typeface="Cambria Math" panose="02040503050406030204" pitchFamily="18" charset="0"/>
+                                </a:rPr>
                                 <m:t>𝑄</m:t>
                               </m:r>
                               <m:sSup>
                                 <m:sSupPr>
                                   <m:ctrlPr>
-                                    <a:rPr lang="ar-AE" i="1"/>
+                                    <a:rPr lang="ar-AE" i="1">
+                                      <a:latin typeface="Cambria Math" panose="02040503050406030204" pitchFamily="18" charset="0"/>
+                                    </a:rPr>
                                   </m:ctrlPr>
                                 </m:sSupPr>
                                 <m:e>
                                   <m:r>
-                                    <a:rPr lang="ar-AE" i="1"/>
+                                    <a:rPr lang="ar-AE" i="1">
+                                      <a:latin typeface="Cambria Math" panose="02040503050406030204" pitchFamily="18" charset="0"/>
+                                    </a:rPr>
                                     <m:t>𝐾</m:t>
                                   </m:r>
                                 </m:e>
                                 <m:sup>
                                   <m:r>
-                                    <a:rPr lang="ar-AE" i="1"/>
+                                    <a:rPr lang="ar-AE" i="1">
+                                      <a:latin typeface="Cambria Math" panose="02040503050406030204" pitchFamily="18" charset="0"/>
+                                    </a:rPr>
                                     <m:t>𝑇</m:t>
                                   </m:r>
                                 </m:sup>
@@ -15477,7 +15771,9 @@
                                 <m:radPr>
                                   <m:degHide m:val="on"/>
                                   <m:ctrlPr>
-                                    <a:rPr lang="ar-AE" i="1"/>
+                                    <a:rPr lang="ar-AE" i="1">
+                                      <a:latin typeface="Cambria Math" panose="02040503050406030204" pitchFamily="18" charset="0"/>
+                                    </a:rPr>
                                   </m:ctrlPr>
                                 </m:radPr>
                                 <m:deg/>
@@ -15485,18 +15781,24 @@
                                   <m:sSub>
                                     <m:sSubPr>
                                       <m:ctrlPr>
-                                        <a:rPr lang="ar-AE" i="1"/>
+                                        <a:rPr lang="ar-AE" i="1">
+                                          <a:latin typeface="Cambria Math" panose="02040503050406030204" pitchFamily="18" charset="0"/>
+                                        </a:rPr>
                                       </m:ctrlPr>
                                     </m:sSubPr>
                                     <m:e>
                                       <m:r>
-                                        <a:rPr lang="ar-AE" i="1"/>
+                                        <a:rPr lang="ar-AE" i="1">
+                                          <a:latin typeface="Cambria Math" panose="02040503050406030204" pitchFamily="18" charset="0"/>
+                                        </a:rPr>
                                         <m:t>𝑑</m:t>
                                       </m:r>
                                     </m:e>
                                     <m:sub>
                                       <m:r>
-                                        <a:rPr lang="ar-AE" i="1"/>
+                                        <a:rPr lang="ar-AE" i="1">
+                                          <a:latin typeface="Cambria Math" panose="02040503050406030204" pitchFamily="18" charset="0"/>
+                                        </a:rPr>
                                         <m:t>𝑘</m:t>
                                       </m:r>
                                     </m:sub>
@@ -15508,7 +15810,9 @@
                         </m:e>
                       </m:d>
                       <m:r>
-                        <a:rPr lang="ar-AE" i="1"/>
+                        <a:rPr lang="ar-AE" i="1">
+                          <a:latin typeface="Cambria Math" panose="02040503050406030204" pitchFamily="18" charset="0"/>
+                        </a:rPr>
                         <m:t>𝑉</m:t>
                       </m:r>
                     </m:oMath>
@@ -15525,7 +15829,7 @@
             </p:txBody>
           </p:sp>
         </mc:Choice>
-        <mc:Fallback>
+        <mc:Fallback xmlns="">
           <p:sp>
             <p:nvSpPr>
               <p:cNvPr id="3" name="Content Placeholder 2">

--- a/Lez5.pptx
+++ b/Lez5.pptx
@@ -30,24 +30,25 @@
     <p:sldId id="284" r:id="rId24"/>
     <p:sldId id="285" r:id="rId25"/>
     <p:sldId id="286" r:id="rId26"/>
-    <p:sldId id="277" r:id="rId27"/>
-    <p:sldId id="278" r:id="rId28"/>
-    <p:sldId id="279" r:id="rId29"/>
-    <p:sldId id="280" r:id="rId30"/>
-    <p:sldId id="281" r:id="rId31"/>
-    <p:sldId id="282" r:id="rId32"/>
-    <p:sldId id="287" r:id="rId33"/>
-    <p:sldId id="288" r:id="rId34"/>
-    <p:sldId id="289" r:id="rId35"/>
-    <p:sldId id="290" r:id="rId36"/>
-    <p:sldId id="291" r:id="rId37"/>
-    <p:sldId id="292" r:id="rId38"/>
-    <p:sldId id="293" r:id="rId39"/>
-    <p:sldId id="294" r:id="rId40"/>
-    <p:sldId id="295" r:id="rId41"/>
-    <p:sldId id="296" r:id="rId42"/>
-    <p:sldId id="297" r:id="rId43"/>
-    <p:sldId id="298" r:id="rId44"/>
+    <p:sldId id="299" r:id="rId27"/>
+    <p:sldId id="277" r:id="rId28"/>
+    <p:sldId id="278" r:id="rId29"/>
+    <p:sldId id="279" r:id="rId30"/>
+    <p:sldId id="280" r:id="rId31"/>
+    <p:sldId id="281" r:id="rId32"/>
+    <p:sldId id="282" r:id="rId33"/>
+    <p:sldId id="287" r:id="rId34"/>
+    <p:sldId id="288" r:id="rId35"/>
+    <p:sldId id="289" r:id="rId36"/>
+    <p:sldId id="290" r:id="rId37"/>
+    <p:sldId id="291" r:id="rId38"/>
+    <p:sldId id="292" r:id="rId39"/>
+    <p:sldId id="293" r:id="rId40"/>
+    <p:sldId id="294" r:id="rId41"/>
+    <p:sldId id="295" r:id="rId42"/>
+    <p:sldId id="296" r:id="rId43"/>
+    <p:sldId id="297" r:id="rId44"/>
+    <p:sldId id="298" r:id="rId45"/>
   </p:sldIdLst>
   <p:sldSz cx="12192000" cy="6858000"/>
   <p:notesSz cx="6858000" cy="9144000"/>
@@ -159,7 +160,7 @@
   <pc:docChgLst>
     <pc:chgData name="Alessandro Di Piazza" userId="242384fd-1746-4b70-8d90-c83f4330e5ed" providerId="ADAL" clId="{FFF1DA74-BEAE-470B-8D8A-B7A1F3E1BF85}"/>
     <pc:docChg chg="undo custSel addSld modSld sldOrd">
-      <pc:chgData name="Alessandro Di Piazza" userId="242384fd-1746-4b70-8d90-c83f4330e5ed" providerId="ADAL" clId="{FFF1DA74-BEAE-470B-8D8A-B7A1F3E1BF85}" dt="2026-05-27T13:02:48.320" v="1357" actId="20577"/>
+      <pc:chgData name="Alessandro Di Piazza" userId="242384fd-1746-4b70-8d90-c83f4330e5ed" providerId="ADAL" clId="{FFF1DA74-BEAE-470B-8D8A-B7A1F3E1BF85}" dt="2026-06-05T08:30:46.914" v="1408" actId="20577"/>
       <pc:docMkLst>
         <pc:docMk/>
       </pc:docMkLst>
@@ -213,22 +214,6 @@
             <pc:docMk/>
             <pc:sldMk cId="603801049" sldId="258"/>
             <ac:spMk id="3" creationId="{C7C8D3CC-E76D-7DD5-BC42-B07D262A80CE}"/>
-          </ac:spMkLst>
-        </pc:spChg>
-        <pc:spChg chg="add del">
-          <ac:chgData name="Alessandro Di Piazza" userId="242384fd-1746-4b70-8d90-c83f4330e5ed" providerId="ADAL" clId="{FFF1DA74-BEAE-470B-8D8A-B7A1F3E1BF85}" dt="2026-05-26T14:01:55.331" v="15" actId="478"/>
-          <ac:spMkLst>
-            <pc:docMk/>
-            <pc:sldMk cId="603801049" sldId="258"/>
-            <ac:spMk id="4" creationId="{0BDFDBE6-2A8E-8D0C-4991-BB0A28007C70}"/>
-          </ac:spMkLst>
-        </pc:spChg>
-        <pc:spChg chg="add del">
-          <ac:chgData name="Alessandro Di Piazza" userId="242384fd-1746-4b70-8d90-c83f4330e5ed" providerId="ADAL" clId="{FFF1DA74-BEAE-470B-8D8A-B7A1F3E1BF85}" dt="2026-05-26T14:02:14.951" v="17" actId="478"/>
-          <ac:spMkLst>
-            <pc:docMk/>
-            <pc:sldMk cId="603801049" sldId="258"/>
-            <ac:spMk id="5" creationId="{D022E601-2980-4E9C-F505-B15EC92CADF5}"/>
           </ac:spMkLst>
         </pc:spChg>
         <pc:graphicFrameChg chg="add mod modGraphic">
@@ -323,14 +308,6 @@
             <ac:spMk id="2" creationId="{AC3C907E-EA63-DD78-CC6D-7B5B925BEEE8}"/>
           </ac:spMkLst>
         </pc:spChg>
-        <pc:spChg chg="del">
-          <ac:chgData name="Alessandro Di Piazza" userId="242384fd-1746-4b70-8d90-c83f4330e5ed" providerId="ADAL" clId="{FFF1DA74-BEAE-470B-8D8A-B7A1F3E1BF85}" dt="2026-05-26T14:06:48.336" v="134"/>
-          <ac:spMkLst>
-            <pc:docMk/>
-            <pc:sldMk cId="2803164454" sldId="262"/>
-            <ac:spMk id="3" creationId="{ED8E2D16-1D7F-2C5B-B201-46A3219F5D19}"/>
-          </ac:spMkLst>
-        </pc:spChg>
         <pc:graphicFrameChg chg="add mod modGraphic">
           <ac:chgData name="Alessandro Di Piazza" userId="242384fd-1746-4b70-8d90-c83f4330e5ed" providerId="ADAL" clId="{FFF1DA74-BEAE-470B-8D8A-B7A1F3E1BF85}" dt="2026-05-26T14:06:58.107" v="146" actId="113"/>
           <ac:graphicFrameMkLst>
@@ -385,14 +362,6 @@
             <ac:spMk id="2" creationId="{D8610A42-FCDE-FC4D-8D34-75E9A1133B70}"/>
           </ac:spMkLst>
         </pc:spChg>
-        <pc:spChg chg="del">
-          <ac:chgData name="Alessandro Di Piazza" userId="242384fd-1746-4b70-8d90-c83f4330e5ed" providerId="ADAL" clId="{FFF1DA74-BEAE-470B-8D8A-B7A1F3E1BF85}" dt="2026-05-26T14:09:01.357" v="174" actId="22"/>
-          <ac:spMkLst>
-            <pc:docMk/>
-            <pc:sldMk cId="3185145009" sldId="264"/>
-            <ac:spMk id="3" creationId="{AAB005E6-4F4F-E1DB-4EC2-4D0E641D7657}"/>
-          </ac:spMkLst>
-        </pc:spChg>
         <pc:spChg chg="add mod">
           <ac:chgData name="Alessandro Di Piazza" userId="242384fd-1746-4b70-8d90-c83f4330e5ed" providerId="ADAL" clId="{FFF1DA74-BEAE-470B-8D8A-B7A1F3E1BF85}" dt="2026-05-26T14:10:43.318" v="207" actId="27636"/>
           <ac:spMkLst>
@@ -401,14 +370,6 @@
             <ac:spMk id="7" creationId="{84B24F45-200C-9A0D-6443-34D611C11E7D}"/>
           </ac:spMkLst>
         </pc:spChg>
-        <pc:picChg chg="add del mod ord">
-          <ac:chgData name="Alessandro Di Piazza" userId="242384fd-1746-4b70-8d90-c83f4330e5ed" providerId="ADAL" clId="{FFF1DA74-BEAE-470B-8D8A-B7A1F3E1BF85}" dt="2026-05-26T14:09:08.922" v="175" actId="21"/>
-          <ac:picMkLst>
-            <pc:docMk/>
-            <pc:sldMk cId="3185145009" sldId="264"/>
-            <ac:picMk id="5" creationId="{9AE4866E-95D0-213C-1EAC-4479F1731CB6}"/>
-          </ac:picMkLst>
-        </pc:picChg>
         <pc:picChg chg="add mod">
           <ac:chgData name="Alessandro Di Piazza" userId="242384fd-1746-4b70-8d90-c83f4330e5ed" providerId="ADAL" clId="{FFF1DA74-BEAE-470B-8D8A-B7A1F3E1BF85}" dt="2026-05-26T14:10:45.423" v="209" actId="1076"/>
           <ac:picMkLst>
@@ -532,14 +493,6 @@
             <ac:spMk id="2" creationId="{B5C7F404-6591-DDF4-68AD-5AA57151FD94}"/>
           </ac:spMkLst>
         </pc:spChg>
-        <pc:spChg chg="del">
-          <ac:chgData name="Alessandro Di Piazza" userId="242384fd-1746-4b70-8d90-c83f4330e5ed" providerId="ADAL" clId="{FFF1DA74-BEAE-470B-8D8A-B7A1F3E1BF85}" dt="2026-05-26T14:19:44.041" v="311" actId="22"/>
-          <ac:spMkLst>
-            <pc:docMk/>
-            <pc:sldMk cId="1743464979" sldId="269"/>
-            <ac:spMk id="3" creationId="{0C3F2E78-81EA-7D56-1E2E-EA1A27B2AB27}"/>
-          </ac:spMkLst>
-        </pc:spChg>
         <pc:picChg chg="add mod ord">
           <ac:chgData name="Alessandro Di Piazza" userId="242384fd-1746-4b70-8d90-c83f4330e5ed" providerId="ADAL" clId="{FFF1DA74-BEAE-470B-8D8A-B7A1F3E1BF85}" dt="2026-05-26T14:20:02.206" v="333" actId="1076"/>
           <ac:picMkLst>
@@ -592,14 +545,6 @@
             <pc:docMk/>
             <pc:sldMk cId="4072792203" sldId="271"/>
             <ac:spMk id="2" creationId="{14133510-2BDA-DBA3-579B-98519D001F71}"/>
-          </ac:spMkLst>
-        </pc:spChg>
-        <pc:spChg chg="del">
-          <ac:chgData name="Alessandro Di Piazza" userId="242384fd-1746-4b70-8d90-c83f4330e5ed" providerId="ADAL" clId="{FFF1DA74-BEAE-470B-8D8A-B7A1F3E1BF85}" dt="2026-05-26T14:21:39.281" v="352" actId="478"/>
-          <ac:spMkLst>
-            <pc:docMk/>
-            <pc:sldMk cId="4072792203" sldId="271"/>
-            <ac:spMk id="3" creationId="{4D9F458A-13BE-358F-6F00-E8743A10C4B8}"/>
           </ac:spMkLst>
         </pc:spChg>
         <pc:picChg chg="add mod">
@@ -842,14 +787,6 @@
             <ac:spMk id="3" creationId="{8E4C810F-1791-AE01-3428-808B1EE255A9}"/>
           </ac:spMkLst>
         </pc:spChg>
-        <pc:spChg chg="add">
-          <ac:chgData name="Alessandro Di Piazza" userId="242384fd-1746-4b70-8d90-c83f4330e5ed" providerId="ADAL" clId="{FFF1DA74-BEAE-470B-8D8A-B7A1F3E1BF85}" dt="2026-05-26T19:43:39.089" v="565"/>
-          <ac:spMkLst>
-            <pc:docMk/>
-            <pc:sldMk cId="3059613203" sldId="279"/>
-            <ac:spMk id="4" creationId="{2377A1F9-141C-8118-1A97-E6D9E5E7B8FB}"/>
-          </ac:spMkLst>
-        </pc:spChg>
       </pc:sldChg>
       <pc:sldChg chg="modSp new mod">
         <pc:chgData name="Alessandro Di Piazza" userId="242384fd-1746-4b70-8d90-c83f4330e5ed" providerId="ADAL" clId="{FFF1DA74-BEAE-470B-8D8A-B7A1F3E1BF85}" dt="2026-05-26T19:45:51.616" v="592" actId="20577"/>
@@ -988,14 +925,6 @@
             <ac:spMk id="2" creationId="{F6007D31-C9B2-461B-616F-9A547979AE52}"/>
           </ac:spMkLst>
         </pc:spChg>
-        <pc:spChg chg="del">
-          <ac:chgData name="Alessandro Di Piazza" userId="242384fd-1746-4b70-8d90-c83f4330e5ed" providerId="ADAL" clId="{FFF1DA74-BEAE-470B-8D8A-B7A1F3E1BF85}" dt="2026-05-26T19:55:44.261" v="756" actId="22"/>
-          <ac:spMkLst>
-            <pc:docMk/>
-            <pc:sldMk cId="4055616886" sldId="285"/>
-            <ac:spMk id="3" creationId="{927192E6-6721-AFA8-F45C-1A0A65AE334F}"/>
-          </ac:spMkLst>
-        </pc:spChg>
         <pc:spChg chg="add mod">
           <ac:chgData name="Alessandro Di Piazza" userId="242384fd-1746-4b70-8d90-c83f4330e5ed" providerId="ADAL" clId="{FFF1DA74-BEAE-470B-8D8A-B7A1F3E1BF85}" dt="2026-05-26T19:56:18.388" v="760" actId="1076"/>
           <ac:spMkLst>
@@ -1089,14 +1018,6 @@
             <ac:spMk id="3" creationId="{3C4B2F39-BAD8-0777-44CA-F38E802803DC}"/>
           </ac:spMkLst>
         </pc:spChg>
-        <pc:spChg chg="add del mod">
-          <ac:chgData name="Alessandro Di Piazza" userId="242384fd-1746-4b70-8d90-c83f4330e5ed" providerId="ADAL" clId="{FFF1DA74-BEAE-470B-8D8A-B7A1F3E1BF85}" dt="2026-05-26T20:01:30.619" v="843" actId="22"/>
-          <ac:spMkLst>
-            <pc:docMk/>
-            <pc:sldMk cId="3041017729" sldId="288"/>
-            <ac:spMk id="5" creationId="{149A544A-A7C6-65BA-1DCF-BEB161858CC4}"/>
-          </ac:spMkLst>
-        </pc:spChg>
       </pc:sldChg>
       <pc:sldChg chg="modSp new mod">
         <pc:chgData name="Alessandro Di Piazza" userId="242384fd-1746-4b70-8d90-c83f4330e5ed" providerId="ADAL" clId="{FFF1DA74-BEAE-470B-8D8A-B7A1F3E1BF85}" dt="2026-05-26T20:03:46.323" v="891" actId="20577"/>
@@ -1180,30 +1101,6 @@
             <pc:docMk/>
             <pc:sldMk cId="3987577383" sldId="291"/>
             <ac:spMk id="3" creationId="{68A16CB3-37BD-729C-AA72-DC3433017267}"/>
-          </ac:spMkLst>
-        </pc:spChg>
-        <pc:spChg chg="add">
-          <ac:chgData name="Alessandro Di Piazza" userId="242384fd-1746-4b70-8d90-c83f4330e5ed" providerId="ADAL" clId="{FFF1DA74-BEAE-470B-8D8A-B7A1F3E1BF85}" dt="2026-05-26T20:09:30.584" v="1091"/>
-          <ac:spMkLst>
-            <pc:docMk/>
-            <pc:sldMk cId="3987577383" sldId="291"/>
-            <ac:spMk id="4" creationId="{CA12D97A-56AF-EAEA-CC26-192FE10C89CB}"/>
-          </ac:spMkLst>
-        </pc:spChg>
-        <pc:spChg chg="add mod">
-          <ac:chgData name="Alessandro Di Piazza" userId="242384fd-1746-4b70-8d90-c83f4330e5ed" providerId="ADAL" clId="{FFF1DA74-BEAE-470B-8D8A-B7A1F3E1BF85}" dt="2026-05-26T20:09:32.833" v="1093"/>
-          <ac:spMkLst>
-            <pc:docMk/>
-            <pc:sldMk cId="3987577383" sldId="291"/>
-            <ac:spMk id="5" creationId="{EAD8AD3D-66AF-4875-4F26-797A67137F5C}"/>
-          </ac:spMkLst>
-        </pc:spChg>
-        <pc:spChg chg="add">
-          <ac:chgData name="Alessandro Di Piazza" userId="242384fd-1746-4b70-8d90-c83f4330e5ed" providerId="ADAL" clId="{FFF1DA74-BEAE-470B-8D8A-B7A1F3E1BF85}" dt="2026-05-26T20:09:33.955" v="1094"/>
-          <ac:spMkLst>
-            <pc:docMk/>
-            <pc:sldMk cId="3987577383" sldId="291"/>
-            <ac:spMk id="6" creationId="{82791C8F-B77C-E9E4-35AE-837A74A8B9CF}"/>
           </ac:spMkLst>
         </pc:spChg>
         <pc:spChg chg="add mod">
@@ -1329,22 +1226,6 @@
             <ac:spMk id="2" creationId="{76A83DB0-901B-3EB9-F009-65E4EF4EF4DB}"/>
           </ac:spMkLst>
         </pc:spChg>
-        <pc:spChg chg="del mod">
-          <ac:chgData name="Alessandro Di Piazza" userId="242384fd-1746-4b70-8d90-c83f4330e5ed" providerId="ADAL" clId="{FFF1DA74-BEAE-470B-8D8A-B7A1F3E1BF85}" dt="2026-05-26T20:17:32.801" v="1281" actId="478"/>
-          <ac:spMkLst>
-            <pc:docMk/>
-            <pc:sldMk cId="3883227857" sldId="296"/>
-            <ac:spMk id="3" creationId="{EA4502E7-1010-34EC-8122-4BA9D581BC81}"/>
-          </ac:spMkLst>
-        </pc:spChg>
-        <pc:spChg chg="add del mod">
-          <ac:chgData name="Alessandro Di Piazza" userId="242384fd-1746-4b70-8d90-c83f4330e5ed" providerId="ADAL" clId="{FFF1DA74-BEAE-470B-8D8A-B7A1F3E1BF85}" dt="2026-05-26T20:17:34.355" v="1282" actId="478"/>
-          <ac:spMkLst>
-            <pc:docMk/>
-            <pc:sldMk cId="3883227857" sldId="296"/>
-            <ac:spMk id="5" creationId="{D02FB9B0-FDF0-C5B9-335B-98531D373A24}"/>
-          </ac:spMkLst>
-        </pc:spChg>
         <pc:picChg chg="add mod">
           <ac:chgData name="Alessandro Di Piazza" userId="242384fd-1746-4b70-8d90-c83f4330e5ed" providerId="ADAL" clId="{FFF1DA74-BEAE-470B-8D8A-B7A1F3E1BF85}" dt="2026-05-26T20:18:10.801" v="1310" actId="1076"/>
           <ac:picMkLst>
@@ -1376,14 +1257,6 @@
             <ac:spMk id="2" creationId="{17992D18-9419-73D3-92F9-6F118FA23CEF}"/>
           </ac:spMkLst>
         </pc:spChg>
-        <pc:spChg chg="del">
-          <ac:chgData name="Alessandro Di Piazza" userId="242384fd-1746-4b70-8d90-c83f4330e5ed" providerId="ADAL" clId="{FFF1DA74-BEAE-470B-8D8A-B7A1F3E1BF85}" dt="2026-05-26T20:18:43.652" v="1312" actId="22"/>
-          <ac:spMkLst>
-            <pc:docMk/>
-            <pc:sldMk cId="1483995482" sldId="297"/>
-            <ac:spMk id="3" creationId="{E1449350-BCF6-2172-BE79-B6187D85FD0A}"/>
-          </ac:spMkLst>
-        </pc:spChg>
         <pc:picChg chg="add mod ord">
           <ac:chgData name="Alessandro Di Piazza" userId="242384fd-1746-4b70-8d90-c83f4330e5ed" providerId="ADAL" clId="{FFF1DA74-BEAE-470B-8D8A-B7A1F3E1BF85}" dt="2026-05-26T20:18:43.652" v="1312" actId="22"/>
           <ac:picMkLst>
@@ -1407,14 +1280,6 @@
             <ac:spMk id="2" creationId="{A74BE66E-F5D4-0FBB-428C-DAC5A3A589F3}"/>
           </ac:spMkLst>
         </pc:spChg>
-        <pc:spChg chg="del">
-          <ac:chgData name="Alessandro Di Piazza" userId="242384fd-1746-4b70-8d90-c83f4330e5ed" providerId="ADAL" clId="{FFF1DA74-BEAE-470B-8D8A-B7A1F3E1BF85}" dt="2026-05-26T20:28:54.947" v="1336"/>
-          <ac:spMkLst>
-            <pc:docMk/>
-            <pc:sldMk cId="4000501046" sldId="298"/>
-            <ac:spMk id="3" creationId="{5F5A3EA2-DE60-BE80-97CC-D18ADDE7337D}"/>
-          </ac:spMkLst>
-        </pc:spChg>
         <pc:spChg chg="add mod">
           <ac:chgData name="Alessandro Di Piazza" userId="242384fd-1746-4b70-8d90-c83f4330e5ed" providerId="ADAL" clId="{FFF1DA74-BEAE-470B-8D8A-B7A1F3E1BF85}" dt="2026-05-26T20:30:08.229" v="1353" actId="6549"/>
           <ac:spMkLst>
@@ -1431,6 +1296,29 @@
             <ac:picMk id="5122" creationId="{BCF5A754-360F-E569-555E-04F1FD08BD0C}"/>
           </ac:picMkLst>
         </pc:picChg>
+      </pc:sldChg>
+      <pc:sldChg chg="modSp new mod ord">
+        <pc:chgData name="Alessandro Di Piazza" userId="242384fd-1746-4b70-8d90-c83f4330e5ed" providerId="ADAL" clId="{FFF1DA74-BEAE-470B-8D8A-B7A1F3E1BF85}" dt="2026-06-05T08:30:46.914" v="1408" actId="20577"/>
+        <pc:sldMkLst>
+          <pc:docMk/>
+          <pc:sldMk cId="3510661408" sldId="299"/>
+        </pc:sldMkLst>
+        <pc:spChg chg="mod">
+          <ac:chgData name="Alessandro Di Piazza" userId="242384fd-1746-4b70-8d90-c83f4330e5ed" providerId="ADAL" clId="{FFF1DA74-BEAE-470B-8D8A-B7A1F3E1BF85}" dt="2026-06-05T08:30:40.094" v="1371" actId="20577"/>
+          <ac:spMkLst>
+            <pc:docMk/>
+            <pc:sldMk cId="3510661408" sldId="299"/>
+            <ac:spMk id="2" creationId="{EA96CD4B-7BD5-6A0E-3402-1C9C472E4D32}"/>
+          </ac:spMkLst>
+        </pc:spChg>
+        <pc:spChg chg="mod">
+          <ac:chgData name="Alessandro Di Piazza" userId="242384fd-1746-4b70-8d90-c83f4330e5ed" providerId="ADAL" clId="{FFF1DA74-BEAE-470B-8D8A-B7A1F3E1BF85}" dt="2026-06-05T08:30:46.914" v="1408" actId="20577"/>
+          <ac:spMkLst>
+            <pc:docMk/>
+            <pc:sldMk cId="3510661408" sldId="299"/>
+            <ac:spMk id="3" creationId="{A664F70B-711A-2C41-DF4D-363464FEFCF8}"/>
+          </ac:spMkLst>
+        </pc:spChg>
       </pc:sldChg>
     </pc:docChg>
   </pc:docChgLst>
@@ -4620,7 +4508,7 @@
           <a:p>
             <a:fld id="{2707365B-59C5-4FA9-AEAA-AC43E9C0A68C}" type="datetimeFigureOut">
               <a:rPr lang="en-US" smtClean="0"/>
-              <a:t>5/27/2026</a:t>
+              <a:t>6/5/2026</a:t>
             </a:fld>
             <a:endParaRPr lang="en-US"/>
           </a:p>
@@ -4818,7 +4706,7 @@
           <a:p>
             <a:fld id="{2707365B-59C5-4FA9-AEAA-AC43E9C0A68C}" type="datetimeFigureOut">
               <a:rPr lang="en-US" smtClean="0"/>
-              <a:t>5/27/2026</a:t>
+              <a:t>6/5/2026</a:t>
             </a:fld>
             <a:endParaRPr lang="en-US"/>
           </a:p>
@@ -5026,7 +4914,7 @@
           <a:p>
             <a:fld id="{2707365B-59C5-4FA9-AEAA-AC43E9C0A68C}" type="datetimeFigureOut">
               <a:rPr lang="en-US" smtClean="0"/>
-              <a:t>5/27/2026</a:t>
+              <a:t>6/5/2026</a:t>
             </a:fld>
             <a:endParaRPr lang="en-US"/>
           </a:p>
@@ -5224,7 +5112,7 @@
           <a:p>
             <a:fld id="{2707365B-59C5-4FA9-AEAA-AC43E9C0A68C}" type="datetimeFigureOut">
               <a:rPr lang="en-US" smtClean="0"/>
-              <a:t>5/27/2026</a:t>
+              <a:t>6/5/2026</a:t>
             </a:fld>
             <a:endParaRPr lang="en-US"/>
           </a:p>
@@ -5499,7 +5387,7 @@
           <a:p>
             <a:fld id="{2707365B-59C5-4FA9-AEAA-AC43E9C0A68C}" type="datetimeFigureOut">
               <a:rPr lang="en-US" smtClean="0"/>
-              <a:t>5/27/2026</a:t>
+              <a:t>6/5/2026</a:t>
             </a:fld>
             <a:endParaRPr lang="en-US"/>
           </a:p>
@@ -5764,7 +5652,7 @@
           <a:p>
             <a:fld id="{2707365B-59C5-4FA9-AEAA-AC43E9C0A68C}" type="datetimeFigureOut">
               <a:rPr lang="en-US" smtClean="0"/>
-              <a:t>5/27/2026</a:t>
+              <a:t>6/5/2026</a:t>
             </a:fld>
             <a:endParaRPr lang="en-US"/>
           </a:p>
@@ -6176,7 +6064,7 @@
           <a:p>
             <a:fld id="{2707365B-59C5-4FA9-AEAA-AC43E9C0A68C}" type="datetimeFigureOut">
               <a:rPr lang="en-US" smtClean="0"/>
-              <a:t>5/27/2026</a:t>
+              <a:t>6/5/2026</a:t>
             </a:fld>
             <a:endParaRPr lang="en-US"/>
           </a:p>
@@ -6317,7 +6205,7 @@
           <a:p>
             <a:fld id="{2707365B-59C5-4FA9-AEAA-AC43E9C0A68C}" type="datetimeFigureOut">
               <a:rPr lang="en-US" smtClean="0"/>
-              <a:t>5/27/2026</a:t>
+              <a:t>6/5/2026</a:t>
             </a:fld>
             <a:endParaRPr lang="en-US"/>
           </a:p>
@@ -6430,7 +6318,7 @@
           <a:p>
             <a:fld id="{2707365B-59C5-4FA9-AEAA-AC43E9C0A68C}" type="datetimeFigureOut">
               <a:rPr lang="en-US" smtClean="0"/>
-              <a:t>5/27/2026</a:t>
+              <a:t>6/5/2026</a:t>
             </a:fld>
             <a:endParaRPr lang="en-US"/>
           </a:p>
@@ -6741,7 +6629,7 @@
           <a:p>
             <a:fld id="{2707365B-59C5-4FA9-AEAA-AC43E9C0A68C}" type="datetimeFigureOut">
               <a:rPr lang="en-US" smtClean="0"/>
-              <a:t>5/27/2026</a:t>
+              <a:t>6/5/2026</a:t>
             </a:fld>
             <a:endParaRPr lang="en-US"/>
           </a:p>
@@ -7029,7 +6917,7 @@
           <a:p>
             <a:fld id="{2707365B-59C5-4FA9-AEAA-AC43E9C0A68C}" type="datetimeFigureOut">
               <a:rPr lang="en-US" smtClean="0"/>
-              <a:t>5/27/2026</a:t>
+              <a:t>6/5/2026</a:t>
             </a:fld>
             <a:endParaRPr lang="en-US"/>
           </a:p>
@@ -7270,7 +7158,7 @@
           <a:p>
             <a:fld id="{2707365B-59C5-4FA9-AEAA-AC43E9C0A68C}" type="datetimeFigureOut">
               <a:rPr lang="en-US" smtClean="0"/>
-              <a:t>5/27/2026</a:t>
+              <a:t>6/5/2026</a:t>
             </a:fld>
             <a:endParaRPr lang="en-US"/>
           </a:p>
@@ -9506,7 +9394,13 @@
                         <a:rPr lang="it-IT">
                           <a:latin typeface="Cambria Math" panose="02040503050406030204" pitchFamily="18" charset="0"/>
                         </a:rPr>
-                        <m:t>=0</m:t>
+                        <m:t>=</m:t>
+                      </m:r>
+                      <m:r>
+                        <a:rPr lang="it-IT">
+                          <a:latin typeface="Cambria Math" panose="02040503050406030204" pitchFamily="18" charset="0"/>
+                        </a:rPr>
+                        <m:t>0</m:t>
                       </m:r>
                     </m:oMath>
                   </m:oMathPara>
@@ -12804,6 +12698,108 @@
           <p:cNvPr id="2" name="Title 1">
             <a:extLst>
               <a:ext uri="{FF2B5EF4-FFF2-40B4-BE49-F238E27FC236}">
+                <a16:creationId xmlns:a16="http://schemas.microsoft.com/office/drawing/2014/main" id="{EA96CD4B-7BD5-6A0E-3402-1C9C472E4D32}"/>
+              </a:ext>
+            </a:extLst>
+          </p:cNvPr>
+          <p:cNvSpPr>
+            <a:spLocks noGrp="1"/>
+          </p:cNvSpPr>
+          <p:nvPr>
+            <p:ph type="title"/>
+          </p:nvPr>
+        </p:nvSpPr>
+        <p:spPr/>
+        <p:txBody>
+          <a:bodyPr/>
+          <a:lstStyle/>
+          <a:p>
+            <a:r>
+              <a:rPr lang="en-US" dirty="0"/>
+              <a:t>Pausa</a:t>
+            </a:r>
+          </a:p>
+        </p:txBody>
+      </p:sp>
+      <p:sp>
+        <p:nvSpPr>
+          <p:cNvPr id="3" name="Content Placeholder 2">
+            <a:extLst>
+              <a:ext uri="{FF2B5EF4-FFF2-40B4-BE49-F238E27FC236}">
+                <a16:creationId xmlns:a16="http://schemas.microsoft.com/office/drawing/2014/main" id="{A664F70B-711A-2C41-DF4D-363464FEFCF8}"/>
+              </a:ext>
+            </a:extLst>
+          </p:cNvPr>
+          <p:cNvSpPr>
+            <a:spLocks noGrp="1"/>
+          </p:cNvSpPr>
+          <p:nvPr>
+            <p:ph idx="1"/>
+          </p:nvPr>
+        </p:nvSpPr>
+        <p:spPr/>
+        <p:txBody>
+          <a:bodyPr/>
+          <a:lstStyle/>
+          <a:p>
+            <a:r>
+              <a:rPr lang="en-US" dirty="0"/>
+              <a:t>Le </a:t>
+            </a:r>
+            <a:r>
+              <a:rPr lang="en-US" dirty="0" err="1"/>
+              <a:t>lezioni</a:t>
+            </a:r>
+            <a:r>
+              <a:rPr lang="en-US" dirty="0"/>
+              <a:t> </a:t>
+            </a:r>
+            <a:r>
+              <a:rPr lang="en-US" dirty="0" err="1"/>
+              <a:t>riprenderanno</a:t>
+            </a:r>
+            <a:r>
+              <a:rPr lang="en-US"/>
+              <a:t> alle 11.45</a:t>
+            </a:r>
+          </a:p>
+        </p:txBody>
+      </p:sp>
+    </p:spTree>
+    <p:extLst>
+      <p:ext uri="{BB962C8B-B14F-4D97-AF65-F5344CB8AC3E}">
+        <p14:creationId xmlns:p14="http://schemas.microsoft.com/office/powerpoint/2010/main" val="3510661408"/>
+      </p:ext>
+    </p:extLst>
+  </p:cSld>
+  <p:clrMapOvr>
+    <a:masterClrMapping/>
+  </p:clrMapOvr>
+</p:sld>
+</file>
+
+<file path=ppt/slides/slide27.xml><?xml version="1.0" encoding="utf-8"?>
+<p:sld xmlns:a="http://schemas.openxmlformats.org/drawingml/2006/main" xmlns:r="http://schemas.openxmlformats.org/officeDocument/2006/relationships" xmlns:p="http://schemas.openxmlformats.org/presentationml/2006/main">
+  <p:cSld>
+    <p:spTree>
+      <p:nvGrpSpPr>
+        <p:cNvPr id="1" name=""/>
+        <p:cNvGrpSpPr/>
+        <p:nvPr/>
+      </p:nvGrpSpPr>
+      <p:grpSpPr>
+        <a:xfrm>
+          <a:off x="0" y="0"/>
+          <a:ext cx="0" cy="0"/>
+          <a:chOff x="0" y="0"/>
+          <a:chExt cx="0" cy="0"/>
+        </a:xfrm>
+      </p:grpSpPr>
+      <p:sp>
+        <p:nvSpPr>
+          <p:cNvPr id="2" name="Title 1">
+            <a:extLst>
+              <a:ext uri="{FF2B5EF4-FFF2-40B4-BE49-F238E27FC236}">
                 <a16:creationId xmlns:a16="http://schemas.microsoft.com/office/drawing/2014/main" id="{8D4643D6-070F-7B4D-9252-E2E1ADDD1F29}"/>
               </a:ext>
             </a:extLst>
@@ -13035,7 +13031,7 @@
 </p:sld>
 </file>
 
-<file path=ppt/slides/slide27.xml><?xml version="1.0" encoding="utf-8"?>
+<file path=ppt/slides/slide28.xml><?xml version="1.0" encoding="utf-8"?>
 <p:sld xmlns:a="http://schemas.openxmlformats.org/drawingml/2006/main" xmlns:r="http://schemas.openxmlformats.org/officeDocument/2006/relationships" xmlns:p="http://schemas.openxmlformats.org/presentationml/2006/main">
   <p:cSld>
     <p:spTree>
@@ -13564,7 +13560,7 @@
 </p:sld>
 </file>
 
-<file path=ppt/slides/slide28.xml><?xml version="1.0" encoding="utf-8"?>
+<file path=ppt/slides/slide29.xml><?xml version="1.0" encoding="utf-8"?>
 <p:sld xmlns:a="http://schemas.openxmlformats.org/drawingml/2006/main" xmlns:r="http://schemas.openxmlformats.org/officeDocument/2006/relationships" xmlns:p="http://schemas.openxmlformats.org/presentationml/2006/main">
   <p:cSld>
     <p:spTree>
@@ -13771,138 +13767,6 @@
     <p:extLst>
       <p:ext uri="{BB962C8B-B14F-4D97-AF65-F5344CB8AC3E}">
         <p14:creationId xmlns:p14="http://schemas.microsoft.com/office/powerpoint/2010/main" val="3059613203"/>
-      </p:ext>
-    </p:extLst>
-  </p:cSld>
-  <p:clrMapOvr>
-    <a:masterClrMapping/>
-  </p:clrMapOvr>
-</p:sld>
-</file>
-
-<file path=ppt/slides/slide29.xml><?xml version="1.0" encoding="utf-8"?>
-<p:sld xmlns:a="http://schemas.openxmlformats.org/drawingml/2006/main" xmlns:r="http://schemas.openxmlformats.org/officeDocument/2006/relationships" xmlns:p="http://schemas.openxmlformats.org/presentationml/2006/main">
-  <p:cSld>
-    <p:spTree>
-      <p:nvGrpSpPr>
-        <p:cNvPr id="1" name=""/>
-        <p:cNvGrpSpPr/>
-        <p:nvPr/>
-      </p:nvGrpSpPr>
-      <p:grpSpPr>
-        <a:xfrm>
-          <a:off x="0" y="0"/>
-          <a:ext cx="0" cy="0"/>
-          <a:chOff x="0" y="0"/>
-          <a:chExt cx="0" cy="0"/>
-        </a:xfrm>
-      </p:grpSpPr>
-      <p:sp>
-        <p:nvSpPr>
-          <p:cNvPr id="2" name="Title 1">
-            <a:extLst>
-              <a:ext uri="{FF2B5EF4-FFF2-40B4-BE49-F238E27FC236}">
-                <a16:creationId xmlns:a16="http://schemas.microsoft.com/office/drawing/2014/main" id="{471E23DB-9A0A-C454-3543-B9646CFEF3D0}"/>
-              </a:ext>
-            </a:extLst>
-          </p:cNvPr>
-          <p:cNvSpPr>
-            <a:spLocks noGrp="1"/>
-          </p:cNvSpPr>
-          <p:nvPr>
-            <p:ph type="title"/>
-          </p:nvPr>
-        </p:nvSpPr>
-        <p:spPr/>
-        <p:txBody>
-          <a:bodyPr/>
-          <a:lstStyle/>
-          <a:p>
-            <a:r>
-              <a:rPr lang="it-IT" dirty="0"/>
-              <a:t>Neural Networks - </a:t>
-            </a:r>
-            <a:r>
-              <a:rPr lang="en-US" dirty="0"/>
-              <a:t>RNN e CNN</a:t>
-            </a:r>
-          </a:p>
-        </p:txBody>
-      </p:sp>
-      <p:sp>
-        <p:nvSpPr>
-          <p:cNvPr id="3" name="Content Placeholder 2">
-            <a:extLst>
-              <a:ext uri="{FF2B5EF4-FFF2-40B4-BE49-F238E27FC236}">
-                <a16:creationId xmlns:a16="http://schemas.microsoft.com/office/drawing/2014/main" id="{91395FDB-9A0C-7DDD-37FE-D26F4FC5DE81}"/>
-              </a:ext>
-            </a:extLst>
-          </p:cNvPr>
-          <p:cNvSpPr>
-            <a:spLocks noGrp="1"/>
-          </p:cNvSpPr>
-          <p:nvPr>
-            <p:ph idx="1"/>
-          </p:nvPr>
-        </p:nvSpPr>
-        <p:spPr/>
-        <p:txBody>
-          <a:bodyPr/>
-          <a:lstStyle/>
-          <a:p>
-            <a:pPr marL="0" indent="0">
-              <a:buNone/>
-            </a:pPr>
-            <a:r>
-              <a:rPr lang="it-IT" dirty="0"/>
-              <a:t>sono due architetture avanzate di reti neurali</a:t>
-            </a:r>
-          </a:p>
-          <a:p>
-            <a:pPr marL="0" indent="0">
-              <a:buNone/>
-            </a:pPr>
-            <a:endParaRPr lang="it-IT" dirty="0"/>
-          </a:p>
-          <a:p>
-            <a:pPr marL="0" indent="0">
-              <a:buNone/>
-            </a:pPr>
-            <a:r>
-              <a:rPr lang="it-IT" dirty="0"/>
-              <a:t>Sono progettate per affrontare problemi differenti:</a:t>
-            </a:r>
-          </a:p>
-          <a:p>
-            <a:pPr marL="0" indent="0">
-              <a:buNone/>
-            </a:pPr>
-            <a:endParaRPr lang="it-IT" dirty="0"/>
-          </a:p>
-          <a:p>
-            <a:r>
-              <a:rPr lang="it-IT" dirty="0"/>
-              <a:t>Le CNN sono specializzate nell’analisi di immagini e dati spaziali. </a:t>
-            </a:r>
-          </a:p>
-          <a:p>
-            <a:r>
-              <a:rPr lang="it-IT" dirty="0"/>
-              <a:t>Le RNN sono progettate per dati sequenziali e temporali.</a:t>
-            </a:r>
-          </a:p>
-          <a:p>
-            <a:pPr marL="0" indent="0">
-              <a:buNone/>
-            </a:pPr>
-            <a:endParaRPr lang="en-US" dirty="0"/>
-          </a:p>
-        </p:txBody>
-      </p:sp>
-    </p:spTree>
-    <p:extLst>
-      <p:ext uri="{BB962C8B-B14F-4D97-AF65-F5344CB8AC3E}">
-        <p14:creationId xmlns:p14="http://schemas.microsoft.com/office/powerpoint/2010/main" val="2062724380"/>
       </p:ext>
     </p:extLst>
   </p:cSld>
@@ -14039,6 +13903,138 @@
 </file>
 
 <file path=ppt/slides/slide30.xml><?xml version="1.0" encoding="utf-8"?>
+<p:sld xmlns:a="http://schemas.openxmlformats.org/drawingml/2006/main" xmlns:r="http://schemas.openxmlformats.org/officeDocument/2006/relationships" xmlns:p="http://schemas.openxmlformats.org/presentationml/2006/main">
+  <p:cSld>
+    <p:spTree>
+      <p:nvGrpSpPr>
+        <p:cNvPr id="1" name=""/>
+        <p:cNvGrpSpPr/>
+        <p:nvPr/>
+      </p:nvGrpSpPr>
+      <p:grpSpPr>
+        <a:xfrm>
+          <a:off x="0" y="0"/>
+          <a:ext cx="0" cy="0"/>
+          <a:chOff x="0" y="0"/>
+          <a:chExt cx="0" cy="0"/>
+        </a:xfrm>
+      </p:grpSpPr>
+      <p:sp>
+        <p:nvSpPr>
+          <p:cNvPr id="2" name="Title 1">
+            <a:extLst>
+              <a:ext uri="{FF2B5EF4-FFF2-40B4-BE49-F238E27FC236}">
+                <a16:creationId xmlns:a16="http://schemas.microsoft.com/office/drawing/2014/main" id="{471E23DB-9A0A-C454-3543-B9646CFEF3D0}"/>
+              </a:ext>
+            </a:extLst>
+          </p:cNvPr>
+          <p:cNvSpPr>
+            <a:spLocks noGrp="1"/>
+          </p:cNvSpPr>
+          <p:nvPr>
+            <p:ph type="title"/>
+          </p:nvPr>
+        </p:nvSpPr>
+        <p:spPr/>
+        <p:txBody>
+          <a:bodyPr/>
+          <a:lstStyle/>
+          <a:p>
+            <a:r>
+              <a:rPr lang="it-IT" dirty="0"/>
+              <a:t>Neural Networks - </a:t>
+            </a:r>
+            <a:r>
+              <a:rPr lang="en-US" dirty="0"/>
+              <a:t>RNN e CNN</a:t>
+            </a:r>
+          </a:p>
+        </p:txBody>
+      </p:sp>
+      <p:sp>
+        <p:nvSpPr>
+          <p:cNvPr id="3" name="Content Placeholder 2">
+            <a:extLst>
+              <a:ext uri="{FF2B5EF4-FFF2-40B4-BE49-F238E27FC236}">
+                <a16:creationId xmlns:a16="http://schemas.microsoft.com/office/drawing/2014/main" id="{91395FDB-9A0C-7DDD-37FE-D26F4FC5DE81}"/>
+              </a:ext>
+            </a:extLst>
+          </p:cNvPr>
+          <p:cNvSpPr>
+            <a:spLocks noGrp="1"/>
+          </p:cNvSpPr>
+          <p:nvPr>
+            <p:ph idx="1"/>
+          </p:nvPr>
+        </p:nvSpPr>
+        <p:spPr/>
+        <p:txBody>
+          <a:bodyPr/>
+          <a:lstStyle/>
+          <a:p>
+            <a:pPr marL="0" indent="0">
+              <a:buNone/>
+            </a:pPr>
+            <a:r>
+              <a:rPr lang="it-IT" dirty="0"/>
+              <a:t>sono due architetture avanzate di reti neurali</a:t>
+            </a:r>
+          </a:p>
+          <a:p>
+            <a:pPr marL="0" indent="0">
+              <a:buNone/>
+            </a:pPr>
+            <a:endParaRPr lang="it-IT" dirty="0"/>
+          </a:p>
+          <a:p>
+            <a:pPr marL="0" indent="0">
+              <a:buNone/>
+            </a:pPr>
+            <a:r>
+              <a:rPr lang="it-IT" dirty="0"/>
+              <a:t>Sono progettate per affrontare problemi differenti:</a:t>
+            </a:r>
+          </a:p>
+          <a:p>
+            <a:pPr marL="0" indent="0">
+              <a:buNone/>
+            </a:pPr>
+            <a:endParaRPr lang="it-IT" dirty="0"/>
+          </a:p>
+          <a:p>
+            <a:r>
+              <a:rPr lang="it-IT" dirty="0"/>
+              <a:t>Le CNN sono specializzate nell’analisi di immagini e dati spaziali. </a:t>
+            </a:r>
+          </a:p>
+          <a:p>
+            <a:r>
+              <a:rPr lang="it-IT" dirty="0"/>
+              <a:t>Le RNN sono progettate per dati sequenziali e temporali.</a:t>
+            </a:r>
+          </a:p>
+          <a:p>
+            <a:pPr marL="0" indent="0">
+              <a:buNone/>
+            </a:pPr>
+            <a:endParaRPr lang="en-US" dirty="0"/>
+          </a:p>
+        </p:txBody>
+      </p:sp>
+    </p:spTree>
+    <p:extLst>
+      <p:ext uri="{BB962C8B-B14F-4D97-AF65-F5344CB8AC3E}">
+        <p14:creationId xmlns:p14="http://schemas.microsoft.com/office/powerpoint/2010/main" val="2062724380"/>
+      </p:ext>
+    </p:extLst>
+  </p:cSld>
+  <p:clrMapOvr>
+    <a:masterClrMapping/>
+  </p:clrMapOvr>
+</p:sld>
+</file>
+
+<file path=ppt/slides/slide31.xml><?xml version="1.0" encoding="utf-8"?>
 <p:sld xmlns:a="http://schemas.openxmlformats.org/drawingml/2006/main" xmlns:r="http://schemas.openxmlformats.org/officeDocument/2006/relationships" xmlns:p="http://schemas.openxmlformats.org/presentationml/2006/main">
   <p:cSld>
     <p:spTree>
@@ -14529,7 +14525,7 @@
 </p:sld>
 </file>
 
-<file path=ppt/slides/slide31.xml><?xml version="1.0" encoding="utf-8"?>
+<file path=ppt/slides/slide32.xml><?xml version="1.0" encoding="utf-8"?>
 <p:sld xmlns:a="http://schemas.openxmlformats.org/drawingml/2006/main" xmlns:r="http://schemas.openxmlformats.org/officeDocument/2006/relationships" xmlns:p="http://schemas.openxmlformats.org/presentationml/2006/main">
   <p:cSld>
     <p:spTree>
@@ -15072,7 +15068,7 @@
 </p:sld>
 </file>
 
-<file path=ppt/slides/slide32.xml><?xml version="1.0" encoding="utf-8"?>
+<file path=ppt/slides/slide33.xml><?xml version="1.0" encoding="utf-8"?>
 <p:sld xmlns:a="http://schemas.openxmlformats.org/drawingml/2006/main" xmlns:r="http://schemas.openxmlformats.org/officeDocument/2006/relationships" xmlns:p="http://schemas.openxmlformats.org/presentationml/2006/main">
   <p:cSld>
     <p:spTree>
@@ -15882,7 +15878,7 @@
 </p:sld>
 </file>
 
-<file path=ppt/slides/slide33.xml><?xml version="1.0" encoding="utf-8"?>
+<file path=ppt/slides/slide34.xml><?xml version="1.0" encoding="utf-8"?>
 <p:sld xmlns:a="http://schemas.openxmlformats.org/drawingml/2006/main" xmlns:r="http://schemas.openxmlformats.org/officeDocument/2006/relationships" xmlns:p="http://schemas.openxmlformats.org/presentationml/2006/main">
   <p:cSld>
     <p:spTree>
@@ -16083,7 +16079,7 @@
 </p:sld>
 </file>
 
-<file path=ppt/slides/slide34.xml><?xml version="1.0" encoding="utf-8"?>
+<file path=ppt/slides/slide35.xml><?xml version="1.0" encoding="utf-8"?>
 <p:sld xmlns:a="http://schemas.openxmlformats.org/drawingml/2006/main" xmlns:r="http://schemas.openxmlformats.org/officeDocument/2006/relationships" xmlns:p="http://schemas.openxmlformats.org/presentationml/2006/main">
   <p:cSld>
     <p:spTree>
@@ -16225,7 +16221,7 @@
 </p:sld>
 </file>
 
-<file path=ppt/slides/slide35.xml><?xml version="1.0" encoding="utf-8"?>
+<file path=ppt/slides/slide36.xml><?xml version="1.0" encoding="utf-8"?>
 <p:sld xmlns:a="http://schemas.openxmlformats.org/drawingml/2006/main" xmlns:r="http://schemas.openxmlformats.org/officeDocument/2006/relationships" xmlns:p="http://schemas.openxmlformats.org/presentationml/2006/main">
   <p:cSld>
     <p:spTree>
@@ -16426,7 +16422,7 @@
 </p:sld>
 </file>
 
-<file path=ppt/slides/slide36.xml><?xml version="1.0" encoding="utf-8"?>
+<file path=ppt/slides/slide37.xml><?xml version="1.0" encoding="utf-8"?>
 <p:sld xmlns:a="http://schemas.openxmlformats.org/drawingml/2006/main" xmlns:r="http://schemas.openxmlformats.org/officeDocument/2006/relationships" xmlns:p="http://schemas.openxmlformats.org/presentationml/2006/main">
   <p:cSld>
     <p:spTree>
@@ -16719,7 +16715,7 @@
 </p:sld>
 </file>
 
-<file path=ppt/slides/slide37.xml><?xml version="1.0" encoding="utf-8"?>
+<file path=ppt/slides/slide38.xml><?xml version="1.0" encoding="utf-8"?>
 <p:sld xmlns:a="http://schemas.openxmlformats.org/drawingml/2006/main" xmlns:r="http://schemas.openxmlformats.org/officeDocument/2006/relationships" xmlns:p="http://schemas.openxmlformats.org/presentationml/2006/main">
   <p:cSld>
     <p:spTree>
@@ -16894,7 +16890,7 @@
 </p:sld>
 </file>
 
-<file path=ppt/slides/slide38.xml><?xml version="1.0" encoding="utf-8"?>
+<file path=ppt/slides/slide39.xml><?xml version="1.0" encoding="utf-8"?>
 <p:sld xmlns:a="http://schemas.openxmlformats.org/drawingml/2006/main" xmlns:r="http://schemas.openxmlformats.org/officeDocument/2006/relationships" xmlns:p="http://schemas.openxmlformats.org/presentationml/2006/main">
   <p:cSld>
     <p:spTree>
@@ -17067,158 +17063,6 @@
     <p:extLst>
       <p:ext uri="{BB962C8B-B14F-4D97-AF65-F5344CB8AC3E}">
         <p14:creationId xmlns:p14="http://schemas.microsoft.com/office/powerpoint/2010/main" val="3126151954"/>
-      </p:ext>
-    </p:extLst>
-  </p:cSld>
-  <p:clrMapOvr>
-    <a:masterClrMapping/>
-  </p:clrMapOvr>
-</p:sld>
-</file>
-
-<file path=ppt/slides/slide39.xml><?xml version="1.0" encoding="utf-8"?>
-<p:sld xmlns:a="http://schemas.openxmlformats.org/drawingml/2006/main" xmlns:r="http://schemas.openxmlformats.org/officeDocument/2006/relationships" xmlns:p="http://schemas.openxmlformats.org/presentationml/2006/main">
-  <p:cSld>
-    <p:spTree>
-      <p:nvGrpSpPr>
-        <p:cNvPr id="1" name=""/>
-        <p:cNvGrpSpPr/>
-        <p:nvPr/>
-      </p:nvGrpSpPr>
-      <p:grpSpPr>
-        <a:xfrm>
-          <a:off x="0" y="0"/>
-          <a:ext cx="0" cy="0"/>
-          <a:chOff x="0" y="0"/>
-          <a:chExt cx="0" cy="0"/>
-        </a:xfrm>
-      </p:grpSpPr>
-      <p:sp>
-        <p:nvSpPr>
-          <p:cNvPr id="2" name="Title 1">
-            <a:extLst>
-              <a:ext uri="{FF2B5EF4-FFF2-40B4-BE49-F238E27FC236}">
-                <a16:creationId xmlns:a16="http://schemas.microsoft.com/office/drawing/2014/main" id="{E1233015-29FB-501F-2E61-1DCE6D7B6EE8}"/>
-              </a:ext>
-            </a:extLst>
-          </p:cNvPr>
-          <p:cNvSpPr>
-            <a:spLocks noGrp="1"/>
-          </p:cNvSpPr>
-          <p:nvPr>
-            <p:ph type="title"/>
-          </p:nvPr>
-        </p:nvSpPr>
-        <p:spPr/>
-        <p:txBody>
-          <a:bodyPr/>
-          <a:lstStyle/>
-          <a:p>
-            <a:r>
-              <a:rPr lang="en-US" dirty="0" err="1"/>
-              <a:t>Iperparametri</a:t>
-            </a:r>
-            <a:endParaRPr lang="en-US" dirty="0"/>
-          </a:p>
-        </p:txBody>
-      </p:sp>
-      <p:sp>
-        <p:nvSpPr>
-          <p:cNvPr id="3" name="Content Placeholder 2">
-            <a:extLst>
-              <a:ext uri="{FF2B5EF4-FFF2-40B4-BE49-F238E27FC236}">
-                <a16:creationId xmlns:a16="http://schemas.microsoft.com/office/drawing/2014/main" id="{CF1564A0-2A6F-0C49-E25C-617C1547EC1C}"/>
-              </a:ext>
-            </a:extLst>
-          </p:cNvPr>
-          <p:cNvSpPr>
-            <a:spLocks noGrp="1"/>
-          </p:cNvSpPr>
-          <p:nvPr>
-            <p:ph idx="1"/>
-          </p:nvPr>
-        </p:nvSpPr>
-        <p:spPr/>
-        <p:txBody>
-          <a:bodyPr>
-            <a:normAutofit fontScale="85000" lnSpcReduction="20000"/>
-          </a:bodyPr>
-          <a:lstStyle/>
-          <a:p>
-            <a:pPr marL="0" indent="0">
-              <a:buNone/>
-            </a:pPr>
-            <a:r>
-              <a:rPr lang="it-IT" dirty="0"/>
-              <a:t>Gli iperparametri sono configurazioni impostate prima dell’addestramento di un modello di Machine Learning.</a:t>
-            </a:r>
-          </a:p>
-          <a:p>
-            <a:pPr marL="0" indent="0">
-              <a:buNone/>
-            </a:pPr>
-            <a:r>
-              <a:rPr lang="it-IT" dirty="0"/>
-              <a:t>A differenza dei parametri del modello, non vengono appresi automaticamente durante il training.</a:t>
-            </a:r>
-          </a:p>
-          <a:p>
-            <a:pPr marL="0" indent="0">
-              <a:buNone/>
-            </a:pPr>
-            <a:br>
-              <a:rPr lang="it-IT" dirty="0"/>
-            </a:br>
-            <a:endParaRPr lang="it-IT" dirty="0"/>
-          </a:p>
-          <a:p>
-            <a:pPr marL="0" indent="0">
-              <a:buNone/>
-            </a:pPr>
-            <a:r>
-              <a:rPr lang="it-IT" b="1" dirty="0"/>
-              <a:t>A cosa servono</a:t>
-            </a:r>
-          </a:p>
-          <a:p>
-            <a:r>
-              <a:rPr lang="it-IT" dirty="0"/>
-              <a:t>Gli iperparametri controllano:</a:t>
-            </a:r>
-          </a:p>
-          <a:p>
-            <a:r>
-              <a:rPr lang="it-IT" dirty="0"/>
-              <a:t>comportamento del modello </a:t>
-            </a:r>
-          </a:p>
-          <a:p>
-            <a:r>
-              <a:rPr lang="it-IT" dirty="0"/>
-              <a:t>velocità di apprendimento </a:t>
-            </a:r>
-          </a:p>
-          <a:p>
-            <a:r>
-              <a:rPr lang="it-IT" dirty="0"/>
-              <a:t>complessità </a:t>
-            </a:r>
-          </a:p>
-          <a:p>
-            <a:r>
-              <a:rPr lang="it-IT" dirty="0"/>
-              <a:t>qualità delle predizioni</a:t>
-            </a:r>
-          </a:p>
-          <a:p>
-            <a:endParaRPr lang="en-US" dirty="0"/>
-          </a:p>
-        </p:txBody>
-      </p:sp>
-    </p:spTree>
-    <p:extLst>
-      <p:ext uri="{BB962C8B-B14F-4D97-AF65-F5344CB8AC3E}">
-        <p14:creationId xmlns:p14="http://schemas.microsoft.com/office/powerpoint/2010/main" val="1393319334"/>
       </p:ext>
     </p:extLst>
   </p:cSld>
@@ -17425,6 +17269,158 @@
           <p:cNvPr id="2" name="Title 1">
             <a:extLst>
               <a:ext uri="{FF2B5EF4-FFF2-40B4-BE49-F238E27FC236}">
+                <a16:creationId xmlns:a16="http://schemas.microsoft.com/office/drawing/2014/main" id="{E1233015-29FB-501F-2E61-1DCE6D7B6EE8}"/>
+              </a:ext>
+            </a:extLst>
+          </p:cNvPr>
+          <p:cNvSpPr>
+            <a:spLocks noGrp="1"/>
+          </p:cNvSpPr>
+          <p:nvPr>
+            <p:ph type="title"/>
+          </p:nvPr>
+        </p:nvSpPr>
+        <p:spPr/>
+        <p:txBody>
+          <a:bodyPr/>
+          <a:lstStyle/>
+          <a:p>
+            <a:r>
+              <a:rPr lang="en-US" dirty="0" err="1"/>
+              <a:t>Iperparametri</a:t>
+            </a:r>
+            <a:endParaRPr lang="en-US" dirty="0"/>
+          </a:p>
+        </p:txBody>
+      </p:sp>
+      <p:sp>
+        <p:nvSpPr>
+          <p:cNvPr id="3" name="Content Placeholder 2">
+            <a:extLst>
+              <a:ext uri="{FF2B5EF4-FFF2-40B4-BE49-F238E27FC236}">
+                <a16:creationId xmlns:a16="http://schemas.microsoft.com/office/drawing/2014/main" id="{CF1564A0-2A6F-0C49-E25C-617C1547EC1C}"/>
+              </a:ext>
+            </a:extLst>
+          </p:cNvPr>
+          <p:cNvSpPr>
+            <a:spLocks noGrp="1"/>
+          </p:cNvSpPr>
+          <p:nvPr>
+            <p:ph idx="1"/>
+          </p:nvPr>
+        </p:nvSpPr>
+        <p:spPr/>
+        <p:txBody>
+          <a:bodyPr>
+            <a:normAutofit fontScale="85000" lnSpcReduction="20000"/>
+          </a:bodyPr>
+          <a:lstStyle/>
+          <a:p>
+            <a:pPr marL="0" indent="0">
+              <a:buNone/>
+            </a:pPr>
+            <a:r>
+              <a:rPr lang="it-IT" dirty="0"/>
+              <a:t>Gli iperparametri sono configurazioni impostate prima dell’addestramento di un modello di Machine Learning.</a:t>
+            </a:r>
+          </a:p>
+          <a:p>
+            <a:pPr marL="0" indent="0">
+              <a:buNone/>
+            </a:pPr>
+            <a:r>
+              <a:rPr lang="it-IT" dirty="0"/>
+              <a:t>A differenza dei parametri del modello, non vengono appresi automaticamente durante il training.</a:t>
+            </a:r>
+          </a:p>
+          <a:p>
+            <a:pPr marL="0" indent="0">
+              <a:buNone/>
+            </a:pPr>
+            <a:br>
+              <a:rPr lang="it-IT" dirty="0"/>
+            </a:br>
+            <a:endParaRPr lang="it-IT" dirty="0"/>
+          </a:p>
+          <a:p>
+            <a:pPr marL="0" indent="0">
+              <a:buNone/>
+            </a:pPr>
+            <a:r>
+              <a:rPr lang="it-IT" b="1" dirty="0"/>
+              <a:t>A cosa servono</a:t>
+            </a:r>
+          </a:p>
+          <a:p>
+            <a:r>
+              <a:rPr lang="it-IT" dirty="0"/>
+              <a:t>Gli iperparametri controllano:</a:t>
+            </a:r>
+          </a:p>
+          <a:p>
+            <a:r>
+              <a:rPr lang="it-IT" dirty="0"/>
+              <a:t>comportamento del modello </a:t>
+            </a:r>
+          </a:p>
+          <a:p>
+            <a:r>
+              <a:rPr lang="it-IT" dirty="0"/>
+              <a:t>velocità di apprendimento </a:t>
+            </a:r>
+          </a:p>
+          <a:p>
+            <a:r>
+              <a:rPr lang="it-IT" dirty="0"/>
+              <a:t>complessità </a:t>
+            </a:r>
+          </a:p>
+          <a:p>
+            <a:r>
+              <a:rPr lang="it-IT" dirty="0"/>
+              <a:t>qualità delle predizioni</a:t>
+            </a:r>
+          </a:p>
+          <a:p>
+            <a:endParaRPr lang="en-US" dirty="0"/>
+          </a:p>
+        </p:txBody>
+      </p:sp>
+    </p:spTree>
+    <p:extLst>
+      <p:ext uri="{BB962C8B-B14F-4D97-AF65-F5344CB8AC3E}">
+        <p14:creationId xmlns:p14="http://schemas.microsoft.com/office/powerpoint/2010/main" val="1393319334"/>
+      </p:ext>
+    </p:extLst>
+  </p:cSld>
+  <p:clrMapOvr>
+    <a:masterClrMapping/>
+  </p:clrMapOvr>
+</p:sld>
+</file>
+
+<file path=ppt/slides/slide41.xml><?xml version="1.0" encoding="utf-8"?>
+<p:sld xmlns:a="http://schemas.openxmlformats.org/drawingml/2006/main" xmlns:r="http://schemas.openxmlformats.org/officeDocument/2006/relationships" xmlns:p="http://schemas.openxmlformats.org/presentationml/2006/main">
+  <p:cSld>
+    <p:spTree>
+      <p:nvGrpSpPr>
+        <p:cNvPr id="1" name=""/>
+        <p:cNvGrpSpPr/>
+        <p:nvPr/>
+      </p:nvGrpSpPr>
+      <p:grpSpPr>
+        <a:xfrm>
+          <a:off x="0" y="0"/>
+          <a:ext cx="0" cy="0"/>
+          <a:chOff x="0" y="0"/>
+          <a:chExt cx="0" cy="0"/>
+        </a:xfrm>
+      </p:grpSpPr>
+      <p:sp>
+        <p:nvSpPr>
+          <p:cNvPr id="2" name="Title 1">
+            <a:extLst>
+              <a:ext uri="{FF2B5EF4-FFF2-40B4-BE49-F238E27FC236}">
                 <a16:creationId xmlns:a16="http://schemas.microsoft.com/office/drawing/2014/main" id="{C3C340EE-6B83-AD3D-3931-ECBB56C3AE7A}"/>
               </a:ext>
             </a:extLst>
@@ -18030,7 +18026,7 @@
 </p:sld>
 </file>
 
-<file path=ppt/slides/slide41.xml><?xml version="1.0" encoding="utf-8"?>
+<file path=ppt/slides/slide42.xml><?xml version="1.0" encoding="utf-8"?>
 <p:sld xmlns:a="http://schemas.openxmlformats.org/drawingml/2006/main" xmlns:r="http://schemas.openxmlformats.org/officeDocument/2006/relationships" xmlns:p="http://schemas.openxmlformats.org/presentationml/2006/main">
   <p:cSld>
     <p:spTree>
@@ -18152,7 +18148,7 @@
 </p:sld>
 </file>
 
-<file path=ppt/slides/slide42.xml><?xml version="1.0" encoding="utf-8"?>
+<file path=ppt/slides/slide43.xml><?xml version="1.0" encoding="utf-8"?>
 <p:sld xmlns:a="http://schemas.openxmlformats.org/drawingml/2006/main" xmlns:r="http://schemas.openxmlformats.org/officeDocument/2006/relationships" xmlns:p="http://schemas.openxmlformats.org/presentationml/2006/main">
   <p:cSld>
     <p:spTree>
@@ -18243,7 +18239,7 @@
 </p:sld>
 </file>
 
-<file path=ppt/slides/slide43.xml><?xml version="1.0" encoding="utf-8"?>
+<file path=ppt/slides/slide44.xml><?xml version="1.0" encoding="utf-8"?>
 <p:sld xmlns:a="http://schemas.openxmlformats.org/drawingml/2006/main" xmlns:r="http://schemas.openxmlformats.org/officeDocument/2006/relationships" xmlns:p="http://schemas.openxmlformats.org/presentationml/2006/main">
   <p:cSld>
     <p:spTree>

--- a/Lez5.pptx
+++ b/Lez5.pptx
@@ -49,6 +49,8 @@
     <p:sldId id="296" r:id="rId43"/>
     <p:sldId id="297" r:id="rId44"/>
     <p:sldId id="298" r:id="rId45"/>
+    <p:sldId id="300" r:id="rId46"/>
+    <p:sldId id="302" r:id="rId47"/>
   </p:sldIdLst>
   <p:sldSz cx="12192000" cy="6858000"/>
   <p:notesSz cx="6858000" cy="9144000"/>
@@ -159,8 +161,8 @@
 <pc:chgInfo xmlns:a="http://schemas.openxmlformats.org/drawingml/2006/main" xmlns:r="http://schemas.openxmlformats.org/officeDocument/2006/relationships" xmlns:ac="http://schemas.microsoft.com/office/drawing/2013/main/command" xmlns:pc="http://schemas.microsoft.com/office/powerpoint/2013/main/command">
   <pc:docChgLst>
     <pc:chgData name="Alessandro Di Piazza" userId="242384fd-1746-4b70-8d90-c83f4330e5ed" providerId="ADAL" clId="{FFF1DA74-BEAE-470B-8D8A-B7A1F3E1BF85}"/>
-    <pc:docChg chg="undo custSel addSld modSld sldOrd">
-      <pc:chgData name="Alessandro Di Piazza" userId="242384fd-1746-4b70-8d90-c83f4330e5ed" providerId="ADAL" clId="{FFF1DA74-BEAE-470B-8D8A-B7A1F3E1BF85}" dt="2026-06-05T08:30:46.914" v="1408" actId="20577"/>
+    <pc:docChg chg="undo custSel addSld delSld modSld sldOrd">
+      <pc:chgData name="Alessandro Di Piazza" userId="242384fd-1746-4b70-8d90-c83f4330e5ed" providerId="ADAL" clId="{FFF1DA74-BEAE-470B-8D8A-B7A1F3E1BF85}" dt="2026-06-05T16:01:12.721" v="1628" actId="2696"/>
       <pc:docMkLst>
         <pc:docMk/>
       </pc:docMkLst>
@@ -1317,6 +1319,99 @@
             <pc:docMk/>
             <pc:sldMk cId="3510661408" sldId="299"/>
             <ac:spMk id="3" creationId="{A664F70B-711A-2C41-DF4D-363464FEFCF8}"/>
+          </ac:spMkLst>
+        </pc:spChg>
+      </pc:sldChg>
+      <pc:sldChg chg="addSp modSp new mod">
+        <pc:chgData name="Alessandro Di Piazza" userId="242384fd-1746-4b70-8d90-c83f4330e5ed" providerId="ADAL" clId="{FFF1DA74-BEAE-470B-8D8A-B7A1F3E1BF85}" dt="2026-06-05T12:58:16.764" v="1549" actId="1076"/>
+        <pc:sldMkLst>
+          <pc:docMk/>
+          <pc:sldMk cId="1432981980" sldId="300"/>
+        </pc:sldMkLst>
+        <pc:spChg chg="mod">
+          <ac:chgData name="Alessandro Di Piazza" userId="242384fd-1746-4b70-8d90-c83f4330e5ed" providerId="ADAL" clId="{FFF1DA74-BEAE-470B-8D8A-B7A1F3E1BF85}" dt="2026-06-05T12:55:09.934" v="1416" actId="20577"/>
+          <ac:spMkLst>
+            <pc:docMk/>
+            <pc:sldMk cId="1432981980" sldId="300"/>
+            <ac:spMk id="2" creationId="{B1E39EDA-7820-365B-0E77-435F983A2CF4}"/>
+          </ac:spMkLst>
+        </pc:spChg>
+        <pc:spChg chg="mod">
+          <ac:chgData name="Alessandro Di Piazza" userId="242384fd-1746-4b70-8d90-c83f4330e5ed" providerId="ADAL" clId="{FFF1DA74-BEAE-470B-8D8A-B7A1F3E1BF85}" dt="2026-06-05T12:58:16.764" v="1549" actId="1076"/>
+          <ac:spMkLst>
+            <pc:docMk/>
+            <pc:sldMk cId="1432981980" sldId="300"/>
+            <ac:spMk id="3" creationId="{21BB1DF1-53C2-EBDB-F29B-F26166408043}"/>
+          </ac:spMkLst>
+        </pc:spChg>
+        <pc:spChg chg="add mod">
+          <ac:chgData name="Alessandro Di Piazza" userId="242384fd-1746-4b70-8d90-c83f4330e5ed" providerId="ADAL" clId="{FFF1DA74-BEAE-470B-8D8A-B7A1F3E1BF85}" dt="2026-06-05T12:58:07.320" v="1546" actId="1076"/>
+          <ac:spMkLst>
+            <pc:docMk/>
+            <pc:sldMk cId="1432981980" sldId="300"/>
+            <ac:spMk id="5" creationId="{D253AB77-E78D-D68C-DDBB-8938447E2244}"/>
+          </ac:spMkLst>
+        </pc:spChg>
+      </pc:sldChg>
+      <pc:sldChg chg="modSp new del mod">
+        <pc:chgData name="Alessandro Di Piazza" userId="242384fd-1746-4b70-8d90-c83f4330e5ed" providerId="ADAL" clId="{FFF1DA74-BEAE-470B-8D8A-B7A1F3E1BF85}" dt="2026-06-05T16:01:12.721" v="1628" actId="2696"/>
+        <pc:sldMkLst>
+          <pc:docMk/>
+          <pc:sldMk cId="659453596" sldId="301"/>
+        </pc:sldMkLst>
+        <pc:spChg chg="mod">
+          <ac:chgData name="Alessandro Di Piazza" userId="242384fd-1746-4b70-8d90-c83f4330e5ed" providerId="ADAL" clId="{FFF1DA74-BEAE-470B-8D8A-B7A1F3E1BF85}" dt="2026-06-05T13:27:29.462" v="1561" actId="20577"/>
+          <ac:spMkLst>
+            <pc:docMk/>
+            <pc:sldMk cId="659453596" sldId="301"/>
+            <ac:spMk id="2" creationId="{6DB4AFCC-DA9F-AF0F-B329-400AF3C6058F}"/>
+          </ac:spMkLst>
+        </pc:spChg>
+        <pc:spChg chg="mod">
+          <ac:chgData name="Alessandro Di Piazza" userId="242384fd-1746-4b70-8d90-c83f4330e5ed" providerId="ADAL" clId="{FFF1DA74-BEAE-470B-8D8A-B7A1F3E1BF85}" dt="2026-06-05T14:59:35.015" v="1585" actId="20577"/>
+          <ac:spMkLst>
+            <pc:docMk/>
+            <pc:sldMk cId="659453596" sldId="301"/>
+            <ac:spMk id="3" creationId="{7D054F3C-632B-8E18-AAAA-10B53FB0F084}"/>
+          </ac:spMkLst>
+        </pc:spChg>
+      </pc:sldChg>
+      <pc:sldChg chg="addSp modSp new mod">
+        <pc:chgData name="Alessandro Di Piazza" userId="242384fd-1746-4b70-8d90-c83f4330e5ed" providerId="ADAL" clId="{FFF1DA74-BEAE-470B-8D8A-B7A1F3E1BF85}" dt="2026-06-05T15:23:33.570" v="1627" actId="20577"/>
+        <pc:sldMkLst>
+          <pc:docMk/>
+          <pc:sldMk cId="525261099" sldId="302"/>
+        </pc:sldMkLst>
+        <pc:spChg chg="mod">
+          <ac:chgData name="Alessandro Di Piazza" userId="242384fd-1746-4b70-8d90-c83f4330e5ed" providerId="ADAL" clId="{FFF1DA74-BEAE-470B-8D8A-B7A1F3E1BF85}" dt="2026-06-05T15:22:16.645" v="1596" actId="20577"/>
+          <ac:spMkLst>
+            <pc:docMk/>
+            <pc:sldMk cId="525261099" sldId="302"/>
+            <ac:spMk id="2" creationId="{513F2487-C0E6-6A04-C54E-AFB4AE7D2C49}"/>
+          </ac:spMkLst>
+        </pc:spChg>
+        <pc:spChg chg="mod">
+          <ac:chgData name="Alessandro Di Piazza" userId="242384fd-1746-4b70-8d90-c83f4330e5ed" providerId="ADAL" clId="{FFF1DA74-BEAE-470B-8D8A-B7A1F3E1BF85}" dt="2026-06-05T15:23:33.570" v="1627" actId="20577"/>
+          <ac:spMkLst>
+            <pc:docMk/>
+            <pc:sldMk cId="525261099" sldId="302"/>
+            <ac:spMk id="3" creationId="{A1C20FA2-AF16-C6EF-B1BC-8C98894158FE}"/>
+          </ac:spMkLst>
+        </pc:spChg>
+        <pc:spChg chg="add">
+          <ac:chgData name="Alessandro Di Piazza" userId="242384fd-1746-4b70-8d90-c83f4330e5ed" providerId="ADAL" clId="{FFF1DA74-BEAE-470B-8D8A-B7A1F3E1BF85}" dt="2026-06-05T15:23:09.008" v="1602"/>
+          <ac:spMkLst>
+            <pc:docMk/>
+            <pc:sldMk cId="525261099" sldId="302"/>
+            <ac:spMk id="4" creationId="{5F17E074-FE90-1243-88EF-E4B80A421EF2}"/>
+          </ac:spMkLst>
+        </pc:spChg>
+        <pc:spChg chg="add">
+          <ac:chgData name="Alessandro Di Piazza" userId="242384fd-1746-4b70-8d90-c83f4330e5ed" providerId="ADAL" clId="{FFF1DA74-BEAE-470B-8D8A-B7A1F3E1BF85}" dt="2026-06-05T15:23:11.182" v="1604"/>
+          <ac:spMkLst>
+            <pc:docMk/>
+            <pc:sldMk cId="525261099" sldId="302"/>
+            <ac:spMk id="5" creationId="{D682373A-FAD3-285E-6AA6-E432D8A1CE2E}"/>
           </ac:spMkLst>
         </pc:spChg>
       </pc:sldChg>
@@ -12759,7 +12854,7 @@
               <a:t>riprenderanno</a:t>
             </a:r>
             <a:r>
-              <a:rPr lang="en-US"/>
+              <a:rPr lang="en-US" dirty="0"/>
               <a:t> alle 11.45</a:t>
             </a:r>
           </a:p>
@@ -18510,6 +18605,1672 @@
     <p:extLst>
       <p:ext uri="{BB962C8B-B14F-4D97-AF65-F5344CB8AC3E}">
         <p14:creationId xmlns:p14="http://schemas.microsoft.com/office/powerpoint/2010/main" val="4000501046"/>
+      </p:ext>
+    </p:extLst>
+  </p:cSld>
+  <p:clrMapOvr>
+    <a:masterClrMapping/>
+  </p:clrMapOvr>
+</p:sld>
+</file>
+
+<file path=ppt/slides/slide45.xml><?xml version="1.0" encoding="utf-8"?>
+<p:sld xmlns:a="http://schemas.openxmlformats.org/drawingml/2006/main" xmlns:r="http://schemas.openxmlformats.org/officeDocument/2006/relationships" xmlns:p="http://schemas.openxmlformats.org/presentationml/2006/main">
+  <p:cSld>
+    <p:spTree>
+      <p:nvGrpSpPr>
+        <p:cNvPr id="1" name=""/>
+        <p:cNvGrpSpPr/>
+        <p:nvPr/>
+      </p:nvGrpSpPr>
+      <p:grpSpPr>
+        <a:xfrm>
+          <a:off x="0" y="0"/>
+          <a:ext cx="0" cy="0"/>
+          <a:chOff x="0" y="0"/>
+          <a:chExt cx="0" cy="0"/>
+        </a:xfrm>
+      </p:grpSpPr>
+      <p:sp>
+        <p:nvSpPr>
+          <p:cNvPr id="2" name="Title 1">
+            <a:extLst>
+              <a:ext uri="{FF2B5EF4-FFF2-40B4-BE49-F238E27FC236}">
+                <a16:creationId xmlns:a16="http://schemas.microsoft.com/office/drawing/2014/main" id="{B1E39EDA-7820-365B-0E77-435F983A2CF4}"/>
+              </a:ext>
+            </a:extLst>
+          </p:cNvPr>
+          <p:cNvSpPr>
+            <a:spLocks noGrp="1"/>
+          </p:cNvSpPr>
+          <p:nvPr>
+            <p:ph type="title"/>
+          </p:nvPr>
+        </p:nvSpPr>
+        <p:spPr/>
+        <p:txBody>
+          <a:bodyPr/>
+          <a:lstStyle/>
+          <a:p>
+            <a:r>
+              <a:rPr lang="en-US" dirty="0"/>
+              <a:t>Titanic</a:t>
+            </a:r>
+          </a:p>
+        </p:txBody>
+      </p:sp>
+      <p:sp>
+        <p:nvSpPr>
+          <p:cNvPr id="3" name="Content Placeholder 2">
+            <a:extLst>
+              <a:ext uri="{FF2B5EF4-FFF2-40B4-BE49-F238E27FC236}">
+                <a16:creationId xmlns:a16="http://schemas.microsoft.com/office/drawing/2014/main" id="{21BB1DF1-53C2-EBDB-F29B-F26166408043}"/>
+              </a:ext>
+            </a:extLst>
+          </p:cNvPr>
+          <p:cNvSpPr>
+            <a:spLocks noGrp="1"/>
+          </p:cNvSpPr>
+          <p:nvPr>
+            <p:ph idx="1"/>
+          </p:nvPr>
+        </p:nvSpPr>
+        <p:spPr>
+          <a:xfrm>
+            <a:off x="4019550" y="211977"/>
+            <a:ext cx="7375711" cy="2244352"/>
+          </a:xfrm>
+        </p:spPr>
+        <p:txBody>
+          <a:bodyPr/>
+          <a:lstStyle/>
+          <a:p>
+            <a:endParaRPr lang="en-US" dirty="0"/>
+          </a:p>
+          <a:p>
+            <a:pPr marL="0" indent="0">
+              <a:buNone/>
+            </a:pPr>
+            <a:r>
+              <a:rPr lang="en-US" dirty="0" err="1"/>
+              <a:t>Creare</a:t>
+            </a:r>
+            <a:r>
+              <a:rPr lang="en-US" dirty="0"/>
+              <a:t> un </a:t>
+            </a:r>
+            <a:r>
+              <a:rPr lang="en-US" dirty="0" err="1"/>
+              <a:t>classificatore</a:t>
+            </a:r>
+            <a:r>
+              <a:rPr lang="en-US" dirty="0"/>
+              <a:t> per </a:t>
+            </a:r>
+            <a:r>
+              <a:rPr lang="en-US" dirty="0" err="1"/>
+              <a:t>verificare</a:t>
+            </a:r>
+            <a:r>
+              <a:rPr lang="en-US" dirty="0"/>
+              <a:t> se un </a:t>
+            </a:r>
+            <a:r>
+              <a:rPr lang="en-US" dirty="0" err="1"/>
+              <a:t>passeggero</a:t>
+            </a:r>
+            <a:r>
+              <a:rPr lang="en-US" dirty="0"/>
+              <a:t> </a:t>
+            </a:r>
+            <a:r>
+              <a:rPr lang="en-US" dirty="0" err="1"/>
+              <a:t>si</a:t>
+            </a:r>
+            <a:r>
+              <a:rPr lang="en-US" dirty="0"/>
+              <a:t> è Salvato o no.</a:t>
+            </a:r>
+          </a:p>
+          <a:p>
+            <a:pPr marL="0" indent="0">
+              <a:buNone/>
+            </a:pPr>
+            <a:endParaRPr lang="en-US" dirty="0"/>
+          </a:p>
+        </p:txBody>
+      </p:sp>
+      <p:sp>
+        <p:nvSpPr>
+          <p:cNvPr id="5" name="TextBox 4">
+            <a:extLst>
+              <a:ext uri="{FF2B5EF4-FFF2-40B4-BE49-F238E27FC236}">
+                <a16:creationId xmlns:a16="http://schemas.microsoft.com/office/drawing/2014/main" id="{D253AB77-E78D-D68C-DDBB-8938447E2244}"/>
+              </a:ext>
+            </a:extLst>
+          </p:cNvPr>
+          <p:cNvSpPr txBox="1"/>
+          <p:nvPr/>
+        </p:nvSpPr>
+        <p:spPr>
+          <a:xfrm>
+            <a:off x="4061011" y="1690688"/>
+            <a:ext cx="7375711" cy="4415696"/>
+          </a:xfrm>
+          <a:prstGeom prst="rect">
+            <a:avLst/>
+          </a:prstGeom>
+        </p:spPr>
+        <p:style>
+          <a:lnRef idx="2">
+            <a:schemeClr val="dk1">
+              <a:shade val="15000"/>
+            </a:schemeClr>
+          </a:lnRef>
+          <a:fillRef idx="1">
+            <a:schemeClr val="dk1"/>
+          </a:fillRef>
+          <a:effectRef idx="0">
+            <a:schemeClr val="dk1"/>
+          </a:effectRef>
+          <a:fontRef idx="minor">
+            <a:schemeClr val="lt1"/>
+          </a:fontRef>
+        </p:style>
+        <p:txBody>
+          <a:bodyPr wrap="square">
+            <a:spAutoFit/>
+          </a:bodyPr>
+          <a:lstStyle/>
+          <a:p>
+            <a:pPr>
+              <a:lnSpc>
+                <a:spcPts val="1425"/>
+              </a:lnSpc>
+              <a:buNone/>
+            </a:pPr>
+            <a:r>
+              <a:rPr lang="en-US" b="0" dirty="0">
+                <a:solidFill>
+                  <a:srgbClr val="C586C0"/>
+                </a:solidFill>
+                <a:effectLst/>
+                <a:latin typeface="Consolas" panose="020B0609020204030204" pitchFamily="49" charset="0"/>
+              </a:rPr>
+              <a:t>import</a:t>
+            </a:r>
+            <a:r>
+              <a:rPr lang="en-US" b="0" dirty="0">
+                <a:solidFill>
+                  <a:srgbClr val="BBBEBF"/>
+                </a:solidFill>
+                <a:effectLst/>
+                <a:latin typeface="Consolas" panose="020B0609020204030204" pitchFamily="49" charset="0"/>
+              </a:rPr>
+              <a:t> </a:t>
+            </a:r>
+            <a:r>
+              <a:rPr lang="en-US" b="0" dirty="0">
+                <a:solidFill>
+                  <a:srgbClr val="4EC9B0"/>
+                </a:solidFill>
+                <a:effectLst/>
+                <a:latin typeface="Consolas" panose="020B0609020204030204" pitchFamily="49" charset="0"/>
+              </a:rPr>
+              <a:t>pandas</a:t>
+            </a:r>
+            <a:r>
+              <a:rPr lang="en-US" b="0" dirty="0">
+                <a:solidFill>
+                  <a:srgbClr val="BBBEBF"/>
+                </a:solidFill>
+                <a:effectLst/>
+                <a:latin typeface="Consolas" panose="020B0609020204030204" pitchFamily="49" charset="0"/>
+              </a:rPr>
+              <a:t> </a:t>
+            </a:r>
+            <a:r>
+              <a:rPr lang="en-US" b="0" dirty="0">
+                <a:solidFill>
+                  <a:srgbClr val="C586C0"/>
+                </a:solidFill>
+                <a:effectLst/>
+                <a:latin typeface="Consolas" panose="020B0609020204030204" pitchFamily="49" charset="0"/>
+              </a:rPr>
+              <a:t>as</a:t>
+            </a:r>
+            <a:r>
+              <a:rPr lang="en-US" b="0" dirty="0">
+                <a:solidFill>
+                  <a:srgbClr val="BBBEBF"/>
+                </a:solidFill>
+                <a:effectLst/>
+                <a:latin typeface="Consolas" panose="020B0609020204030204" pitchFamily="49" charset="0"/>
+              </a:rPr>
+              <a:t> </a:t>
+            </a:r>
+            <a:r>
+              <a:rPr lang="en-US" b="0" dirty="0">
+                <a:solidFill>
+                  <a:srgbClr val="4EC9B0"/>
+                </a:solidFill>
+                <a:effectLst/>
+                <a:latin typeface="Consolas" panose="020B0609020204030204" pitchFamily="49" charset="0"/>
+              </a:rPr>
+              <a:t>pd</a:t>
+            </a:r>
+            <a:endParaRPr lang="en-US" b="0" dirty="0">
+              <a:solidFill>
+                <a:srgbClr val="BBBEBF"/>
+              </a:solidFill>
+              <a:effectLst/>
+              <a:latin typeface="Consolas" panose="020B0609020204030204" pitchFamily="49" charset="0"/>
+            </a:endParaRPr>
+          </a:p>
+          <a:p>
+            <a:pPr>
+              <a:lnSpc>
+                <a:spcPts val="1425"/>
+              </a:lnSpc>
+              <a:buNone/>
+            </a:pPr>
+            <a:r>
+              <a:rPr lang="en-US" b="0" dirty="0">
+                <a:solidFill>
+                  <a:srgbClr val="C586C0"/>
+                </a:solidFill>
+                <a:effectLst/>
+                <a:latin typeface="Consolas" panose="020B0609020204030204" pitchFamily="49" charset="0"/>
+              </a:rPr>
+              <a:t>import</a:t>
+            </a:r>
+            <a:r>
+              <a:rPr lang="en-US" b="0" dirty="0">
+                <a:solidFill>
+                  <a:srgbClr val="BBBEBF"/>
+                </a:solidFill>
+                <a:effectLst/>
+                <a:latin typeface="Consolas" panose="020B0609020204030204" pitchFamily="49" charset="0"/>
+              </a:rPr>
+              <a:t> </a:t>
+            </a:r>
+            <a:r>
+              <a:rPr lang="en-US" b="0" dirty="0" err="1">
+                <a:solidFill>
+                  <a:srgbClr val="4EC9B0"/>
+                </a:solidFill>
+                <a:effectLst/>
+                <a:latin typeface="Consolas" panose="020B0609020204030204" pitchFamily="49" charset="0"/>
+              </a:rPr>
+              <a:t>matplotlib</a:t>
+            </a:r>
+            <a:r>
+              <a:rPr lang="en-US" b="0" dirty="0" err="1">
+                <a:solidFill>
+                  <a:srgbClr val="BBBEBF"/>
+                </a:solidFill>
+                <a:effectLst/>
+                <a:latin typeface="Consolas" panose="020B0609020204030204" pitchFamily="49" charset="0"/>
+              </a:rPr>
+              <a:t>.</a:t>
+            </a:r>
+            <a:r>
+              <a:rPr lang="en-US" b="0" dirty="0" err="1">
+                <a:solidFill>
+                  <a:srgbClr val="4EC9B0"/>
+                </a:solidFill>
+                <a:effectLst/>
+                <a:latin typeface="Consolas" panose="020B0609020204030204" pitchFamily="49" charset="0"/>
+              </a:rPr>
+              <a:t>pyplot</a:t>
+            </a:r>
+            <a:r>
+              <a:rPr lang="en-US" b="0" dirty="0">
+                <a:solidFill>
+                  <a:srgbClr val="BBBEBF"/>
+                </a:solidFill>
+                <a:effectLst/>
+                <a:latin typeface="Consolas" panose="020B0609020204030204" pitchFamily="49" charset="0"/>
+              </a:rPr>
+              <a:t> </a:t>
+            </a:r>
+            <a:r>
+              <a:rPr lang="en-US" b="0" dirty="0">
+                <a:solidFill>
+                  <a:srgbClr val="C586C0"/>
+                </a:solidFill>
+                <a:effectLst/>
+                <a:latin typeface="Consolas" panose="020B0609020204030204" pitchFamily="49" charset="0"/>
+              </a:rPr>
+              <a:t>as</a:t>
+            </a:r>
+            <a:r>
+              <a:rPr lang="en-US" b="0" dirty="0">
+                <a:solidFill>
+                  <a:srgbClr val="BBBEBF"/>
+                </a:solidFill>
+                <a:effectLst/>
+                <a:latin typeface="Consolas" panose="020B0609020204030204" pitchFamily="49" charset="0"/>
+              </a:rPr>
+              <a:t> </a:t>
+            </a:r>
+            <a:r>
+              <a:rPr lang="en-US" b="0" dirty="0" err="1">
+                <a:solidFill>
+                  <a:srgbClr val="4EC9B0"/>
+                </a:solidFill>
+                <a:effectLst/>
+                <a:latin typeface="Consolas" panose="020B0609020204030204" pitchFamily="49" charset="0"/>
+              </a:rPr>
+              <a:t>plt</a:t>
+            </a:r>
+            <a:endParaRPr lang="en-US" b="0" dirty="0">
+              <a:solidFill>
+                <a:srgbClr val="BBBEBF"/>
+              </a:solidFill>
+              <a:effectLst/>
+              <a:latin typeface="Consolas" panose="020B0609020204030204" pitchFamily="49" charset="0"/>
+            </a:endParaRPr>
+          </a:p>
+          <a:p>
+            <a:pPr>
+              <a:lnSpc>
+                <a:spcPts val="1425"/>
+              </a:lnSpc>
+              <a:buNone/>
+            </a:pPr>
+            <a:br>
+              <a:rPr lang="en-US" b="0" dirty="0">
+                <a:solidFill>
+                  <a:srgbClr val="BBBEBF"/>
+                </a:solidFill>
+                <a:effectLst/>
+                <a:latin typeface="Consolas" panose="020B0609020204030204" pitchFamily="49" charset="0"/>
+              </a:rPr>
+            </a:br>
+            <a:endParaRPr lang="en-US" b="0" dirty="0">
+              <a:solidFill>
+                <a:srgbClr val="BBBEBF"/>
+              </a:solidFill>
+              <a:effectLst/>
+              <a:latin typeface="Consolas" panose="020B0609020204030204" pitchFamily="49" charset="0"/>
+            </a:endParaRPr>
+          </a:p>
+          <a:p>
+            <a:pPr>
+              <a:lnSpc>
+                <a:spcPts val="1425"/>
+              </a:lnSpc>
+              <a:buNone/>
+            </a:pPr>
+            <a:r>
+              <a:rPr lang="en-US" b="0" dirty="0">
+                <a:solidFill>
+                  <a:srgbClr val="C586C0"/>
+                </a:solidFill>
+                <a:effectLst/>
+                <a:latin typeface="Consolas" panose="020B0609020204030204" pitchFamily="49" charset="0"/>
+              </a:rPr>
+              <a:t>from</a:t>
+            </a:r>
+            <a:r>
+              <a:rPr lang="en-US" b="0" dirty="0">
+                <a:solidFill>
+                  <a:srgbClr val="BBBEBF"/>
+                </a:solidFill>
+                <a:effectLst/>
+                <a:latin typeface="Consolas" panose="020B0609020204030204" pitchFamily="49" charset="0"/>
+              </a:rPr>
+              <a:t> </a:t>
+            </a:r>
+            <a:r>
+              <a:rPr lang="en-US" b="0" dirty="0" err="1">
+                <a:solidFill>
+                  <a:srgbClr val="4EC9B0"/>
+                </a:solidFill>
+                <a:effectLst/>
+                <a:latin typeface="Consolas" panose="020B0609020204030204" pitchFamily="49" charset="0"/>
+              </a:rPr>
+              <a:t>sklearn</a:t>
+            </a:r>
+            <a:r>
+              <a:rPr lang="en-US" b="0" dirty="0" err="1">
+                <a:solidFill>
+                  <a:srgbClr val="BBBEBF"/>
+                </a:solidFill>
+                <a:effectLst/>
+                <a:latin typeface="Consolas" panose="020B0609020204030204" pitchFamily="49" charset="0"/>
+              </a:rPr>
+              <a:t>.</a:t>
+            </a:r>
+            <a:r>
+              <a:rPr lang="en-US" b="0" dirty="0" err="1">
+                <a:solidFill>
+                  <a:srgbClr val="4EC9B0"/>
+                </a:solidFill>
+                <a:effectLst/>
+                <a:latin typeface="Consolas" panose="020B0609020204030204" pitchFamily="49" charset="0"/>
+              </a:rPr>
+              <a:t>model_selection</a:t>
+            </a:r>
+            <a:r>
+              <a:rPr lang="en-US" b="0" dirty="0">
+                <a:solidFill>
+                  <a:srgbClr val="BBBEBF"/>
+                </a:solidFill>
+                <a:effectLst/>
+                <a:latin typeface="Consolas" panose="020B0609020204030204" pitchFamily="49" charset="0"/>
+              </a:rPr>
+              <a:t> </a:t>
+            </a:r>
+            <a:r>
+              <a:rPr lang="en-US" b="0" dirty="0">
+                <a:solidFill>
+                  <a:srgbClr val="C586C0"/>
+                </a:solidFill>
+                <a:effectLst/>
+                <a:latin typeface="Consolas" panose="020B0609020204030204" pitchFamily="49" charset="0"/>
+              </a:rPr>
+              <a:t>import</a:t>
+            </a:r>
+            <a:r>
+              <a:rPr lang="en-US" b="0" dirty="0">
+                <a:solidFill>
+                  <a:srgbClr val="BBBEBF"/>
+                </a:solidFill>
+                <a:effectLst/>
+                <a:latin typeface="Consolas" panose="020B0609020204030204" pitchFamily="49" charset="0"/>
+              </a:rPr>
+              <a:t> </a:t>
+            </a:r>
+            <a:r>
+              <a:rPr lang="en-US" b="0" dirty="0" err="1">
+                <a:solidFill>
+                  <a:srgbClr val="D2A8FF"/>
+                </a:solidFill>
+                <a:effectLst/>
+                <a:latin typeface="Consolas" panose="020B0609020204030204" pitchFamily="49" charset="0"/>
+              </a:rPr>
+              <a:t>train_test_split</a:t>
+            </a:r>
+            <a:endParaRPr lang="en-US" b="0" dirty="0">
+              <a:solidFill>
+                <a:srgbClr val="BBBEBF"/>
+              </a:solidFill>
+              <a:effectLst/>
+              <a:latin typeface="Consolas" panose="020B0609020204030204" pitchFamily="49" charset="0"/>
+            </a:endParaRPr>
+          </a:p>
+          <a:p>
+            <a:pPr>
+              <a:lnSpc>
+                <a:spcPts val="1425"/>
+              </a:lnSpc>
+              <a:buNone/>
+            </a:pPr>
+            <a:r>
+              <a:rPr lang="en-US" b="0" dirty="0">
+                <a:solidFill>
+                  <a:srgbClr val="C586C0"/>
+                </a:solidFill>
+                <a:effectLst/>
+                <a:latin typeface="Consolas" panose="020B0609020204030204" pitchFamily="49" charset="0"/>
+              </a:rPr>
+              <a:t>from</a:t>
+            </a:r>
+            <a:r>
+              <a:rPr lang="en-US" b="0" dirty="0">
+                <a:solidFill>
+                  <a:srgbClr val="BBBEBF"/>
+                </a:solidFill>
+                <a:effectLst/>
+                <a:latin typeface="Consolas" panose="020B0609020204030204" pitchFamily="49" charset="0"/>
+              </a:rPr>
+              <a:t> </a:t>
+            </a:r>
+            <a:r>
+              <a:rPr lang="en-US" b="0" dirty="0" err="1">
+                <a:solidFill>
+                  <a:srgbClr val="4EC9B0"/>
+                </a:solidFill>
+                <a:effectLst/>
+                <a:latin typeface="Consolas" panose="020B0609020204030204" pitchFamily="49" charset="0"/>
+              </a:rPr>
+              <a:t>sklearn</a:t>
+            </a:r>
+            <a:r>
+              <a:rPr lang="en-US" b="0" dirty="0" err="1">
+                <a:solidFill>
+                  <a:srgbClr val="BBBEBF"/>
+                </a:solidFill>
+                <a:effectLst/>
+                <a:latin typeface="Consolas" panose="020B0609020204030204" pitchFamily="49" charset="0"/>
+              </a:rPr>
+              <a:t>.</a:t>
+            </a:r>
+            <a:r>
+              <a:rPr lang="en-US" b="0" dirty="0" err="1">
+                <a:solidFill>
+                  <a:srgbClr val="4EC9B0"/>
+                </a:solidFill>
+                <a:effectLst/>
+                <a:latin typeface="Consolas" panose="020B0609020204030204" pitchFamily="49" charset="0"/>
+              </a:rPr>
+              <a:t>tree</a:t>
+            </a:r>
+            <a:r>
+              <a:rPr lang="en-US" b="0" dirty="0">
+                <a:solidFill>
+                  <a:srgbClr val="BBBEBF"/>
+                </a:solidFill>
+                <a:effectLst/>
+                <a:latin typeface="Consolas" panose="020B0609020204030204" pitchFamily="49" charset="0"/>
+              </a:rPr>
+              <a:t> </a:t>
+            </a:r>
+            <a:r>
+              <a:rPr lang="en-US" b="0" dirty="0">
+                <a:solidFill>
+                  <a:srgbClr val="C586C0"/>
+                </a:solidFill>
+                <a:effectLst/>
+                <a:latin typeface="Consolas" panose="020B0609020204030204" pitchFamily="49" charset="0"/>
+              </a:rPr>
+              <a:t>import</a:t>
+            </a:r>
+            <a:r>
+              <a:rPr lang="en-US" b="0" dirty="0">
+                <a:solidFill>
+                  <a:srgbClr val="BBBEBF"/>
+                </a:solidFill>
+                <a:effectLst/>
+                <a:latin typeface="Consolas" panose="020B0609020204030204" pitchFamily="49" charset="0"/>
+              </a:rPr>
+              <a:t> </a:t>
+            </a:r>
+            <a:r>
+              <a:rPr lang="en-US" b="0" dirty="0" err="1">
+                <a:solidFill>
+                  <a:srgbClr val="4EC9B0"/>
+                </a:solidFill>
+                <a:effectLst/>
+                <a:latin typeface="Consolas" panose="020B0609020204030204" pitchFamily="49" charset="0"/>
+              </a:rPr>
+              <a:t>DecisionTreeClassifier</a:t>
+            </a:r>
+            <a:endParaRPr lang="en-US" b="0" dirty="0">
+              <a:solidFill>
+                <a:srgbClr val="BBBEBF"/>
+              </a:solidFill>
+              <a:effectLst/>
+              <a:latin typeface="Consolas" panose="020B0609020204030204" pitchFamily="49" charset="0"/>
+            </a:endParaRPr>
+          </a:p>
+          <a:p>
+            <a:pPr>
+              <a:lnSpc>
+                <a:spcPts val="1425"/>
+              </a:lnSpc>
+              <a:buNone/>
+            </a:pPr>
+            <a:r>
+              <a:rPr lang="en-US" b="0" dirty="0">
+                <a:solidFill>
+                  <a:srgbClr val="C586C0"/>
+                </a:solidFill>
+                <a:effectLst/>
+                <a:latin typeface="Consolas" panose="020B0609020204030204" pitchFamily="49" charset="0"/>
+              </a:rPr>
+              <a:t>from</a:t>
+            </a:r>
+            <a:r>
+              <a:rPr lang="en-US" b="0" dirty="0">
+                <a:solidFill>
+                  <a:srgbClr val="BBBEBF"/>
+                </a:solidFill>
+                <a:effectLst/>
+                <a:latin typeface="Consolas" panose="020B0609020204030204" pitchFamily="49" charset="0"/>
+              </a:rPr>
+              <a:t> </a:t>
+            </a:r>
+            <a:r>
+              <a:rPr lang="en-US" b="0" dirty="0" err="1">
+                <a:solidFill>
+                  <a:srgbClr val="4EC9B0"/>
+                </a:solidFill>
+                <a:effectLst/>
+                <a:latin typeface="Consolas" panose="020B0609020204030204" pitchFamily="49" charset="0"/>
+              </a:rPr>
+              <a:t>sklearn</a:t>
+            </a:r>
+            <a:r>
+              <a:rPr lang="en-US" b="0" dirty="0" err="1">
+                <a:solidFill>
+                  <a:srgbClr val="BBBEBF"/>
+                </a:solidFill>
+                <a:effectLst/>
+                <a:latin typeface="Consolas" panose="020B0609020204030204" pitchFamily="49" charset="0"/>
+              </a:rPr>
+              <a:t>.</a:t>
+            </a:r>
+            <a:r>
+              <a:rPr lang="en-US" b="0" dirty="0" err="1">
+                <a:solidFill>
+                  <a:srgbClr val="4EC9B0"/>
+                </a:solidFill>
+                <a:effectLst/>
+                <a:latin typeface="Consolas" panose="020B0609020204030204" pitchFamily="49" charset="0"/>
+              </a:rPr>
+              <a:t>ensemble</a:t>
+            </a:r>
+            <a:r>
+              <a:rPr lang="en-US" b="0" dirty="0">
+                <a:solidFill>
+                  <a:srgbClr val="BBBEBF"/>
+                </a:solidFill>
+                <a:effectLst/>
+                <a:latin typeface="Consolas" panose="020B0609020204030204" pitchFamily="49" charset="0"/>
+              </a:rPr>
+              <a:t> </a:t>
+            </a:r>
+            <a:r>
+              <a:rPr lang="en-US" b="0" dirty="0">
+                <a:solidFill>
+                  <a:srgbClr val="C586C0"/>
+                </a:solidFill>
+                <a:effectLst/>
+                <a:latin typeface="Consolas" panose="020B0609020204030204" pitchFamily="49" charset="0"/>
+              </a:rPr>
+              <a:t>import</a:t>
+            </a:r>
+            <a:r>
+              <a:rPr lang="en-US" b="0" dirty="0">
+                <a:solidFill>
+                  <a:srgbClr val="BBBEBF"/>
+                </a:solidFill>
+                <a:effectLst/>
+                <a:latin typeface="Consolas" panose="020B0609020204030204" pitchFamily="49" charset="0"/>
+              </a:rPr>
+              <a:t> </a:t>
+            </a:r>
+            <a:r>
+              <a:rPr lang="en-US" b="0" dirty="0" err="1">
+                <a:solidFill>
+                  <a:srgbClr val="4EC9B0"/>
+                </a:solidFill>
+                <a:effectLst/>
+                <a:latin typeface="Consolas" panose="020B0609020204030204" pitchFamily="49" charset="0"/>
+              </a:rPr>
+              <a:t>RandomForestClassifier</a:t>
+            </a:r>
+            <a:endParaRPr lang="en-US" b="0" dirty="0">
+              <a:solidFill>
+                <a:srgbClr val="BBBEBF"/>
+              </a:solidFill>
+              <a:effectLst/>
+              <a:latin typeface="Consolas" panose="020B0609020204030204" pitchFamily="49" charset="0"/>
+            </a:endParaRPr>
+          </a:p>
+          <a:p>
+            <a:pPr>
+              <a:lnSpc>
+                <a:spcPts val="1425"/>
+              </a:lnSpc>
+              <a:buNone/>
+            </a:pPr>
+            <a:r>
+              <a:rPr lang="en-US" b="0" dirty="0">
+                <a:solidFill>
+                  <a:srgbClr val="C586C0"/>
+                </a:solidFill>
+                <a:effectLst/>
+                <a:latin typeface="Consolas" panose="020B0609020204030204" pitchFamily="49" charset="0"/>
+              </a:rPr>
+              <a:t>from</a:t>
+            </a:r>
+            <a:r>
+              <a:rPr lang="en-US" b="0" dirty="0">
+                <a:solidFill>
+                  <a:srgbClr val="BBBEBF"/>
+                </a:solidFill>
+                <a:effectLst/>
+                <a:latin typeface="Consolas" panose="020B0609020204030204" pitchFamily="49" charset="0"/>
+              </a:rPr>
+              <a:t> </a:t>
+            </a:r>
+            <a:r>
+              <a:rPr lang="en-US" b="0" dirty="0" err="1">
+                <a:solidFill>
+                  <a:srgbClr val="4EC9B0"/>
+                </a:solidFill>
+                <a:effectLst/>
+                <a:latin typeface="Consolas" panose="020B0609020204030204" pitchFamily="49" charset="0"/>
+              </a:rPr>
+              <a:t>sklearn</a:t>
+            </a:r>
+            <a:r>
+              <a:rPr lang="en-US" b="0" dirty="0" err="1">
+                <a:solidFill>
+                  <a:srgbClr val="BBBEBF"/>
+                </a:solidFill>
+                <a:effectLst/>
+                <a:latin typeface="Consolas" panose="020B0609020204030204" pitchFamily="49" charset="0"/>
+              </a:rPr>
+              <a:t>.</a:t>
+            </a:r>
+            <a:r>
+              <a:rPr lang="en-US" b="0" dirty="0" err="1">
+                <a:solidFill>
+                  <a:srgbClr val="4EC9B0"/>
+                </a:solidFill>
+                <a:effectLst/>
+                <a:latin typeface="Consolas" panose="020B0609020204030204" pitchFamily="49" charset="0"/>
+              </a:rPr>
+              <a:t>neighbors</a:t>
+            </a:r>
+            <a:r>
+              <a:rPr lang="en-US" b="0" dirty="0">
+                <a:solidFill>
+                  <a:srgbClr val="BBBEBF"/>
+                </a:solidFill>
+                <a:effectLst/>
+                <a:latin typeface="Consolas" panose="020B0609020204030204" pitchFamily="49" charset="0"/>
+              </a:rPr>
+              <a:t> </a:t>
+            </a:r>
+            <a:r>
+              <a:rPr lang="en-US" b="0" dirty="0">
+                <a:solidFill>
+                  <a:srgbClr val="C586C0"/>
+                </a:solidFill>
+                <a:effectLst/>
+                <a:latin typeface="Consolas" panose="020B0609020204030204" pitchFamily="49" charset="0"/>
+              </a:rPr>
+              <a:t>import</a:t>
+            </a:r>
+            <a:r>
+              <a:rPr lang="en-US" b="0" dirty="0">
+                <a:solidFill>
+                  <a:srgbClr val="BBBEBF"/>
+                </a:solidFill>
+                <a:effectLst/>
+                <a:latin typeface="Consolas" panose="020B0609020204030204" pitchFamily="49" charset="0"/>
+              </a:rPr>
+              <a:t> </a:t>
+            </a:r>
+            <a:r>
+              <a:rPr lang="en-US" b="0" dirty="0" err="1">
+                <a:solidFill>
+                  <a:srgbClr val="4EC9B0"/>
+                </a:solidFill>
+                <a:effectLst/>
+                <a:latin typeface="Consolas" panose="020B0609020204030204" pitchFamily="49" charset="0"/>
+              </a:rPr>
+              <a:t>KNeighborsClassifier</a:t>
+            </a:r>
+            <a:endParaRPr lang="en-US" b="0" dirty="0">
+              <a:solidFill>
+                <a:srgbClr val="BBBEBF"/>
+              </a:solidFill>
+              <a:effectLst/>
+              <a:latin typeface="Consolas" panose="020B0609020204030204" pitchFamily="49" charset="0"/>
+            </a:endParaRPr>
+          </a:p>
+          <a:p>
+            <a:pPr>
+              <a:lnSpc>
+                <a:spcPts val="1425"/>
+              </a:lnSpc>
+              <a:buNone/>
+            </a:pPr>
+            <a:br>
+              <a:rPr lang="en-US" b="0" dirty="0">
+                <a:solidFill>
+                  <a:srgbClr val="BBBEBF"/>
+                </a:solidFill>
+                <a:effectLst/>
+                <a:latin typeface="Consolas" panose="020B0609020204030204" pitchFamily="49" charset="0"/>
+              </a:rPr>
+            </a:br>
+            <a:endParaRPr lang="en-US" b="0" dirty="0">
+              <a:solidFill>
+                <a:srgbClr val="BBBEBF"/>
+              </a:solidFill>
+              <a:effectLst/>
+              <a:latin typeface="Consolas" panose="020B0609020204030204" pitchFamily="49" charset="0"/>
+            </a:endParaRPr>
+          </a:p>
+          <a:p>
+            <a:pPr>
+              <a:lnSpc>
+                <a:spcPts val="1425"/>
+              </a:lnSpc>
+              <a:buNone/>
+            </a:pPr>
+            <a:r>
+              <a:rPr lang="en-US" b="0" dirty="0">
+                <a:solidFill>
+                  <a:srgbClr val="C586C0"/>
+                </a:solidFill>
+                <a:effectLst/>
+                <a:latin typeface="Consolas" panose="020B0609020204030204" pitchFamily="49" charset="0"/>
+              </a:rPr>
+              <a:t>from</a:t>
+            </a:r>
+            <a:r>
+              <a:rPr lang="en-US" b="0" dirty="0">
+                <a:solidFill>
+                  <a:srgbClr val="BBBEBF"/>
+                </a:solidFill>
+                <a:effectLst/>
+                <a:latin typeface="Consolas" panose="020B0609020204030204" pitchFamily="49" charset="0"/>
+              </a:rPr>
+              <a:t> </a:t>
+            </a:r>
+            <a:r>
+              <a:rPr lang="en-US" b="0" dirty="0" err="1">
+                <a:solidFill>
+                  <a:srgbClr val="4EC9B0"/>
+                </a:solidFill>
+                <a:effectLst/>
+                <a:latin typeface="Consolas" panose="020B0609020204030204" pitchFamily="49" charset="0"/>
+              </a:rPr>
+              <a:t>sklearn</a:t>
+            </a:r>
+            <a:r>
+              <a:rPr lang="en-US" b="0" dirty="0" err="1">
+                <a:solidFill>
+                  <a:srgbClr val="BBBEBF"/>
+                </a:solidFill>
+                <a:effectLst/>
+                <a:latin typeface="Consolas" panose="020B0609020204030204" pitchFamily="49" charset="0"/>
+              </a:rPr>
+              <a:t>.</a:t>
+            </a:r>
+            <a:r>
+              <a:rPr lang="en-US" b="0" dirty="0" err="1">
+                <a:solidFill>
+                  <a:srgbClr val="4EC9B0"/>
+                </a:solidFill>
+                <a:effectLst/>
+                <a:latin typeface="Consolas" panose="020B0609020204030204" pitchFamily="49" charset="0"/>
+              </a:rPr>
+              <a:t>metrics</a:t>
+            </a:r>
+            <a:r>
+              <a:rPr lang="en-US" b="0" dirty="0">
+                <a:solidFill>
+                  <a:srgbClr val="BBBEBF"/>
+                </a:solidFill>
+                <a:effectLst/>
+                <a:latin typeface="Consolas" panose="020B0609020204030204" pitchFamily="49" charset="0"/>
+              </a:rPr>
+              <a:t> </a:t>
+            </a:r>
+            <a:r>
+              <a:rPr lang="en-US" b="0" dirty="0">
+                <a:solidFill>
+                  <a:srgbClr val="C586C0"/>
+                </a:solidFill>
+                <a:effectLst/>
+                <a:latin typeface="Consolas" panose="020B0609020204030204" pitchFamily="49" charset="0"/>
+              </a:rPr>
+              <a:t>import</a:t>
+            </a:r>
+            <a:r>
+              <a:rPr lang="en-US" b="0" dirty="0">
+                <a:solidFill>
+                  <a:srgbClr val="BBBEBF"/>
+                </a:solidFill>
+                <a:effectLst/>
+                <a:latin typeface="Consolas" panose="020B0609020204030204" pitchFamily="49" charset="0"/>
+              </a:rPr>
+              <a:t> </a:t>
+            </a:r>
+            <a:r>
+              <a:rPr lang="en-US" b="0" dirty="0" err="1">
+                <a:solidFill>
+                  <a:srgbClr val="D2A8FF"/>
+                </a:solidFill>
+                <a:effectLst/>
+                <a:latin typeface="Consolas" panose="020B0609020204030204" pitchFamily="49" charset="0"/>
+              </a:rPr>
+              <a:t>accuracy_score</a:t>
+            </a:r>
+            <a:r>
+              <a:rPr lang="en-US" b="0" dirty="0">
+                <a:solidFill>
+                  <a:srgbClr val="BBBEBF"/>
+                </a:solidFill>
+                <a:effectLst/>
+                <a:latin typeface="Consolas" panose="020B0609020204030204" pitchFamily="49" charset="0"/>
+              </a:rPr>
+              <a:t>, </a:t>
+            </a:r>
+            <a:r>
+              <a:rPr lang="en-US" b="0" dirty="0" err="1">
+                <a:solidFill>
+                  <a:srgbClr val="D2A8FF"/>
+                </a:solidFill>
+                <a:effectLst/>
+                <a:latin typeface="Consolas" panose="020B0609020204030204" pitchFamily="49" charset="0"/>
+              </a:rPr>
+              <a:t>confusion_matrix</a:t>
+            </a:r>
+            <a:r>
+              <a:rPr lang="en-US" b="0" dirty="0">
+                <a:solidFill>
+                  <a:srgbClr val="BBBEBF"/>
+                </a:solidFill>
+                <a:effectLst/>
+                <a:latin typeface="Consolas" panose="020B0609020204030204" pitchFamily="49" charset="0"/>
+              </a:rPr>
+              <a:t>, </a:t>
+            </a:r>
+            <a:r>
+              <a:rPr lang="en-US" b="0" dirty="0" err="1">
+                <a:solidFill>
+                  <a:srgbClr val="D2A8FF"/>
+                </a:solidFill>
+                <a:effectLst/>
+                <a:latin typeface="Consolas" panose="020B0609020204030204" pitchFamily="49" charset="0"/>
+              </a:rPr>
+              <a:t>classification_report</a:t>
+            </a:r>
+            <a:endParaRPr lang="en-US" b="0" dirty="0">
+              <a:solidFill>
+                <a:srgbClr val="BBBEBF"/>
+              </a:solidFill>
+              <a:effectLst/>
+              <a:latin typeface="Consolas" panose="020B0609020204030204" pitchFamily="49" charset="0"/>
+            </a:endParaRPr>
+          </a:p>
+          <a:p>
+            <a:pPr>
+              <a:lnSpc>
+                <a:spcPts val="1425"/>
+              </a:lnSpc>
+              <a:buNone/>
+            </a:pPr>
+            <a:br>
+              <a:rPr lang="en-US" b="0" dirty="0">
+                <a:solidFill>
+                  <a:srgbClr val="BBBEBF"/>
+                </a:solidFill>
+                <a:effectLst/>
+                <a:latin typeface="Consolas" panose="020B0609020204030204" pitchFamily="49" charset="0"/>
+              </a:rPr>
+            </a:br>
+            <a:endParaRPr lang="en-US" b="0" dirty="0">
+              <a:solidFill>
+                <a:srgbClr val="BBBEBF"/>
+              </a:solidFill>
+              <a:effectLst/>
+              <a:latin typeface="Consolas" panose="020B0609020204030204" pitchFamily="49" charset="0"/>
+            </a:endParaRPr>
+          </a:p>
+          <a:p>
+            <a:pPr>
+              <a:lnSpc>
+                <a:spcPts val="1425"/>
+              </a:lnSpc>
+              <a:buNone/>
+            </a:pPr>
+            <a:r>
+              <a:rPr lang="en-US" b="0" dirty="0">
+                <a:solidFill>
+                  <a:srgbClr val="8B949E"/>
+                </a:solidFill>
+                <a:effectLst/>
+                <a:latin typeface="Consolas" panose="020B0609020204030204" pitchFamily="49" charset="0"/>
+              </a:rPr>
+              <a:t># 1. </a:t>
+            </a:r>
+            <a:r>
+              <a:rPr lang="en-US" b="0" dirty="0" err="1">
+                <a:solidFill>
+                  <a:srgbClr val="8B949E"/>
+                </a:solidFill>
+                <a:effectLst/>
+                <a:latin typeface="Consolas" panose="020B0609020204030204" pitchFamily="49" charset="0"/>
+              </a:rPr>
+              <a:t>Caricamento</a:t>
+            </a:r>
+            <a:r>
+              <a:rPr lang="en-US" b="0" dirty="0">
+                <a:solidFill>
+                  <a:srgbClr val="8B949E"/>
+                </a:solidFill>
+                <a:effectLst/>
+                <a:latin typeface="Consolas" panose="020B0609020204030204" pitchFamily="49" charset="0"/>
+              </a:rPr>
+              <a:t> dataset</a:t>
+            </a:r>
+            <a:endParaRPr lang="en-US" b="0" dirty="0">
+              <a:solidFill>
+                <a:srgbClr val="BBBEBF"/>
+              </a:solidFill>
+              <a:effectLst/>
+              <a:latin typeface="Consolas" panose="020B0609020204030204" pitchFamily="49" charset="0"/>
+            </a:endParaRPr>
+          </a:p>
+          <a:p>
+            <a:pPr>
+              <a:lnSpc>
+                <a:spcPts val="1425"/>
+              </a:lnSpc>
+              <a:buNone/>
+            </a:pPr>
+            <a:r>
+              <a:rPr lang="en-US" b="0" dirty="0" err="1">
+                <a:solidFill>
+                  <a:srgbClr val="C9D1D9"/>
+                </a:solidFill>
+                <a:effectLst/>
+                <a:latin typeface="Consolas" panose="020B0609020204030204" pitchFamily="49" charset="0"/>
+              </a:rPr>
+              <a:t>url</a:t>
+            </a:r>
+            <a:r>
+              <a:rPr lang="en-US" b="0" dirty="0">
+                <a:solidFill>
+                  <a:srgbClr val="BBBEBF"/>
+                </a:solidFill>
+                <a:effectLst/>
+                <a:latin typeface="Consolas" panose="020B0609020204030204" pitchFamily="49" charset="0"/>
+              </a:rPr>
+              <a:t> </a:t>
+            </a:r>
+            <a:r>
+              <a:rPr lang="en-US" b="0" dirty="0">
+                <a:solidFill>
+                  <a:srgbClr val="D4D4D4"/>
+                </a:solidFill>
+                <a:effectLst/>
+                <a:latin typeface="Consolas" panose="020B0609020204030204" pitchFamily="49" charset="0"/>
+              </a:rPr>
+              <a:t>=</a:t>
+            </a:r>
+            <a:r>
+              <a:rPr lang="en-US" b="0" dirty="0">
+                <a:solidFill>
+                  <a:srgbClr val="BBBEBF"/>
+                </a:solidFill>
+                <a:effectLst/>
+                <a:latin typeface="Consolas" panose="020B0609020204030204" pitchFamily="49" charset="0"/>
+              </a:rPr>
+              <a:t> </a:t>
+            </a:r>
+            <a:r>
+              <a:rPr lang="en-US" b="0" dirty="0">
+                <a:solidFill>
+                  <a:srgbClr val="A5D6FF"/>
+                </a:solidFill>
+                <a:effectLst/>
+                <a:latin typeface="Consolas" panose="020B0609020204030204" pitchFamily="49" charset="0"/>
+              </a:rPr>
+              <a:t>"https://raw.githubusercontent.com/</a:t>
+            </a:r>
+            <a:r>
+              <a:rPr lang="en-US" b="0" dirty="0" err="1">
+                <a:solidFill>
+                  <a:srgbClr val="A5D6FF"/>
+                </a:solidFill>
+                <a:effectLst/>
+                <a:latin typeface="Consolas" panose="020B0609020204030204" pitchFamily="49" charset="0"/>
+              </a:rPr>
+              <a:t>datasciencedojo</a:t>
+            </a:r>
+            <a:r>
+              <a:rPr lang="en-US" b="0" dirty="0">
+                <a:solidFill>
+                  <a:srgbClr val="A5D6FF"/>
+                </a:solidFill>
+                <a:effectLst/>
+                <a:latin typeface="Consolas" panose="020B0609020204030204" pitchFamily="49" charset="0"/>
+              </a:rPr>
+              <a:t>/datasets/master/titanic.csv"</a:t>
+            </a:r>
+            <a:endParaRPr lang="en-US" b="0" dirty="0">
+              <a:solidFill>
+                <a:srgbClr val="BBBEBF"/>
+              </a:solidFill>
+              <a:effectLst/>
+              <a:latin typeface="Consolas" panose="020B0609020204030204" pitchFamily="49" charset="0"/>
+            </a:endParaRPr>
+          </a:p>
+          <a:p>
+            <a:pPr>
+              <a:lnSpc>
+                <a:spcPts val="1425"/>
+              </a:lnSpc>
+              <a:buNone/>
+            </a:pPr>
+            <a:r>
+              <a:rPr lang="en-US" b="0" dirty="0" err="1">
+                <a:solidFill>
+                  <a:srgbClr val="C9D1D9"/>
+                </a:solidFill>
+                <a:effectLst/>
+                <a:latin typeface="Consolas" panose="020B0609020204030204" pitchFamily="49" charset="0"/>
+              </a:rPr>
+              <a:t>df</a:t>
+            </a:r>
+            <a:r>
+              <a:rPr lang="en-US" b="0" dirty="0">
+                <a:solidFill>
+                  <a:srgbClr val="BBBEBF"/>
+                </a:solidFill>
+                <a:effectLst/>
+                <a:latin typeface="Consolas" panose="020B0609020204030204" pitchFamily="49" charset="0"/>
+              </a:rPr>
+              <a:t> </a:t>
+            </a:r>
+            <a:r>
+              <a:rPr lang="en-US" b="0" dirty="0">
+                <a:solidFill>
+                  <a:srgbClr val="D4D4D4"/>
+                </a:solidFill>
+                <a:effectLst/>
+                <a:latin typeface="Consolas" panose="020B0609020204030204" pitchFamily="49" charset="0"/>
+              </a:rPr>
+              <a:t>=</a:t>
+            </a:r>
+            <a:r>
+              <a:rPr lang="en-US" b="0" dirty="0">
+                <a:solidFill>
+                  <a:srgbClr val="BBBEBF"/>
+                </a:solidFill>
+                <a:effectLst/>
+                <a:latin typeface="Consolas" panose="020B0609020204030204" pitchFamily="49" charset="0"/>
+              </a:rPr>
+              <a:t> </a:t>
+            </a:r>
+            <a:r>
+              <a:rPr lang="en-US" b="0" dirty="0" err="1">
+                <a:solidFill>
+                  <a:srgbClr val="4EC9B0"/>
+                </a:solidFill>
+                <a:effectLst/>
+                <a:latin typeface="Consolas" panose="020B0609020204030204" pitchFamily="49" charset="0"/>
+              </a:rPr>
+              <a:t>pd</a:t>
+            </a:r>
+            <a:r>
+              <a:rPr lang="en-US" b="0" dirty="0" err="1">
+                <a:solidFill>
+                  <a:srgbClr val="BBBEBF"/>
+                </a:solidFill>
+                <a:effectLst/>
+                <a:latin typeface="Consolas" panose="020B0609020204030204" pitchFamily="49" charset="0"/>
+              </a:rPr>
+              <a:t>.</a:t>
+            </a:r>
+            <a:r>
+              <a:rPr lang="en-US" b="0" dirty="0" err="1">
+                <a:solidFill>
+                  <a:srgbClr val="D2A8FF"/>
+                </a:solidFill>
+                <a:effectLst/>
+                <a:latin typeface="Consolas" panose="020B0609020204030204" pitchFamily="49" charset="0"/>
+              </a:rPr>
+              <a:t>read_csv</a:t>
+            </a:r>
+            <a:r>
+              <a:rPr lang="en-US" b="0" dirty="0">
+                <a:solidFill>
+                  <a:srgbClr val="BBBEBF"/>
+                </a:solidFill>
+                <a:effectLst/>
+                <a:latin typeface="Consolas" panose="020B0609020204030204" pitchFamily="49" charset="0"/>
+              </a:rPr>
+              <a:t>(</a:t>
+            </a:r>
+            <a:r>
+              <a:rPr lang="en-US" b="0" dirty="0" err="1">
+                <a:solidFill>
+                  <a:srgbClr val="C9D1D9"/>
+                </a:solidFill>
+                <a:effectLst/>
+                <a:latin typeface="Consolas" panose="020B0609020204030204" pitchFamily="49" charset="0"/>
+              </a:rPr>
+              <a:t>url</a:t>
+            </a:r>
+            <a:r>
+              <a:rPr lang="en-US" b="0" dirty="0">
+                <a:solidFill>
+                  <a:srgbClr val="BBBEBF"/>
+                </a:solidFill>
+                <a:effectLst/>
+                <a:latin typeface="Consolas" panose="020B0609020204030204" pitchFamily="49" charset="0"/>
+              </a:rPr>
+              <a:t>)</a:t>
+            </a:r>
+          </a:p>
+          <a:p>
+            <a:pPr>
+              <a:lnSpc>
+                <a:spcPts val="1425"/>
+              </a:lnSpc>
+              <a:buNone/>
+            </a:pPr>
+            <a:br>
+              <a:rPr lang="en-US" b="0" dirty="0">
+                <a:solidFill>
+                  <a:srgbClr val="BBBEBF"/>
+                </a:solidFill>
+                <a:effectLst/>
+                <a:latin typeface="Consolas" panose="020B0609020204030204" pitchFamily="49" charset="0"/>
+              </a:rPr>
+            </a:br>
+            <a:endParaRPr lang="en-US" b="0" dirty="0">
+              <a:solidFill>
+                <a:srgbClr val="BBBEBF"/>
+              </a:solidFill>
+              <a:effectLst/>
+              <a:latin typeface="Consolas" panose="020B0609020204030204" pitchFamily="49" charset="0"/>
+            </a:endParaRPr>
+          </a:p>
+          <a:p>
+            <a:pPr>
+              <a:lnSpc>
+                <a:spcPts val="1425"/>
+              </a:lnSpc>
+              <a:buNone/>
+            </a:pPr>
+            <a:r>
+              <a:rPr lang="en-US" b="0" dirty="0">
+                <a:solidFill>
+                  <a:srgbClr val="D2A8FF"/>
+                </a:solidFill>
+                <a:effectLst/>
+                <a:latin typeface="Consolas" panose="020B0609020204030204" pitchFamily="49" charset="0"/>
+              </a:rPr>
+              <a:t>print</a:t>
+            </a:r>
+            <a:r>
+              <a:rPr lang="en-US" b="0" dirty="0">
+                <a:solidFill>
+                  <a:srgbClr val="BBBEBF"/>
+                </a:solidFill>
+                <a:effectLst/>
+                <a:latin typeface="Consolas" panose="020B0609020204030204" pitchFamily="49" charset="0"/>
+              </a:rPr>
+              <a:t>(</a:t>
+            </a:r>
+            <a:r>
+              <a:rPr lang="en-US" b="0" dirty="0" err="1">
+                <a:solidFill>
+                  <a:srgbClr val="C9D1D9"/>
+                </a:solidFill>
+                <a:effectLst/>
+                <a:latin typeface="Consolas" panose="020B0609020204030204" pitchFamily="49" charset="0"/>
+              </a:rPr>
+              <a:t>df</a:t>
+            </a:r>
+            <a:r>
+              <a:rPr lang="en-US" b="0" dirty="0" err="1">
+                <a:solidFill>
+                  <a:srgbClr val="BBBEBF"/>
+                </a:solidFill>
+                <a:effectLst/>
+                <a:latin typeface="Consolas" panose="020B0609020204030204" pitchFamily="49" charset="0"/>
+              </a:rPr>
+              <a:t>.</a:t>
+            </a:r>
+            <a:r>
+              <a:rPr lang="en-US" b="0" dirty="0" err="1">
+                <a:solidFill>
+                  <a:srgbClr val="D2A8FF"/>
+                </a:solidFill>
+                <a:effectLst/>
+                <a:latin typeface="Consolas" panose="020B0609020204030204" pitchFamily="49" charset="0"/>
+              </a:rPr>
+              <a:t>head</a:t>
+            </a:r>
+            <a:r>
+              <a:rPr lang="en-US" b="0" dirty="0">
+                <a:solidFill>
+                  <a:srgbClr val="BBBEBF"/>
+                </a:solidFill>
+                <a:effectLst/>
+                <a:latin typeface="Consolas" panose="020B0609020204030204" pitchFamily="49" charset="0"/>
+              </a:rPr>
+              <a:t>())</a:t>
+            </a:r>
+          </a:p>
+          <a:p>
+            <a:pPr>
+              <a:lnSpc>
+                <a:spcPts val="1425"/>
+              </a:lnSpc>
+              <a:buNone/>
+            </a:pPr>
+            <a:r>
+              <a:rPr lang="en-US" b="0" dirty="0">
+                <a:solidFill>
+                  <a:srgbClr val="D2A8FF"/>
+                </a:solidFill>
+                <a:effectLst/>
+                <a:latin typeface="Consolas" panose="020B0609020204030204" pitchFamily="49" charset="0"/>
+              </a:rPr>
+              <a:t>print</a:t>
+            </a:r>
+            <a:r>
+              <a:rPr lang="en-US" b="0" dirty="0">
+                <a:solidFill>
+                  <a:srgbClr val="BBBEBF"/>
+                </a:solidFill>
+                <a:effectLst/>
+                <a:latin typeface="Consolas" panose="020B0609020204030204" pitchFamily="49" charset="0"/>
+              </a:rPr>
+              <a:t>(</a:t>
+            </a:r>
+            <a:r>
+              <a:rPr lang="en-US" b="0" dirty="0">
+                <a:solidFill>
+                  <a:srgbClr val="C9D1D9"/>
+                </a:solidFill>
+                <a:effectLst/>
+                <a:latin typeface="Consolas" panose="020B0609020204030204" pitchFamily="49" charset="0"/>
+              </a:rPr>
+              <a:t>df</a:t>
+            </a:r>
+            <a:r>
+              <a:rPr lang="en-US" b="0" dirty="0">
+                <a:solidFill>
+                  <a:srgbClr val="BBBEBF"/>
+                </a:solidFill>
+                <a:effectLst/>
+                <a:latin typeface="Consolas" panose="020B0609020204030204" pitchFamily="49" charset="0"/>
+              </a:rPr>
+              <a:t>.</a:t>
+            </a:r>
+            <a:r>
+              <a:rPr lang="en-US" b="0" dirty="0">
+                <a:solidFill>
+                  <a:srgbClr val="D2A8FF"/>
+                </a:solidFill>
+                <a:effectLst/>
+                <a:latin typeface="Consolas" panose="020B0609020204030204" pitchFamily="49" charset="0"/>
+              </a:rPr>
+              <a:t>info</a:t>
+            </a:r>
+            <a:r>
+              <a:rPr lang="en-US" b="0" dirty="0">
+                <a:solidFill>
+                  <a:srgbClr val="BBBEBF"/>
+                </a:solidFill>
+                <a:effectLst/>
+                <a:latin typeface="Consolas" panose="020B0609020204030204" pitchFamily="49" charset="0"/>
+              </a:rPr>
+              <a:t>())</a:t>
+            </a:r>
+          </a:p>
+          <a:p>
+            <a:pPr>
+              <a:lnSpc>
+                <a:spcPts val="1425"/>
+              </a:lnSpc>
+              <a:buNone/>
+            </a:pPr>
+            <a:r>
+              <a:rPr lang="en-US" b="0" dirty="0">
+                <a:solidFill>
+                  <a:srgbClr val="D2A8FF"/>
+                </a:solidFill>
+                <a:effectLst/>
+                <a:latin typeface="Consolas" panose="020B0609020204030204" pitchFamily="49" charset="0"/>
+              </a:rPr>
+              <a:t>print</a:t>
+            </a:r>
+            <a:r>
+              <a:rPr lang="en-US" b="0" dirty="0">
+                <a:solidFill>
+                  <a:srgbClr val="BBBEBF"/>
+                </a:solidFill>
+                <a:effectLst/>
+                <a:latin typeface="Consolas" panose="020B0609020204030204" pitchFamily="49" charset="0"/>
+              </a:rPr>
+              <a:t>(</a:t>
+            </a:r>
+            <a:r>
+              <a:rPr lang="en-US" b="0" dirty="0" err="1">
+                <a:solidFill>
+                  <a:srgbClr val="C9D1D9"/>
+                </a:solidFill>
+                <a:effectLst/>
+                <a:latin typeface="Consolas" panose="020B0609020204030204" pitchFamily="49" charset="0"/>
+              </a:rPr>
+              <a:t>df</a:t>
+            </a:r>
+            <a:r>
+              <a:rPr lang="en-US" b="0" dirty="0" err="1">
+                <a:solidFill>
+                  <a:srgbClr val="BBBEBF"/>
+                </a:solidFill>
+                <a:effectLst/>
+                <a:latin typeface="Consolas" panose="020B0609020204030204" pitchFamily="49" charset="0"/>
+              </a:rPr>
+              <a:t>.</a:t>
+            </a:r>
+            <a:r>
+              <a:rPr lang="en-US" b="0" dirty="0" err="1">
+                <a:solidFill>
+                  <a:srgbClr val="D2A8FF"/>
+                </a:solidFill>
+                <a:effectLst/>
+                <a:latin typeface="Consolas" panose="020B0609020204030204" pitchFamily="49" charset="0"/>
+              </a:rPr>
+              <a:t>isnull</a:t>
+            </a:r>
+            <a:r>
+              <a:rPr lang="en-US" b="0" dirty="0">
+                <a:solidFill>
+                  <a:srgbClr val="BBBEBF"/>
+                </a:solidFill>
+                <a:effectLst/>
+                <a:latin typeface="Consolas" panose="020B0609020204030204" pitchFamily="49" charset="0"/>
+              </a:rPr>
+              <a:t>().</a:t>
+            </a:r>
+            <a:r>
+              <a:rPr lang="en-US" b="0" dirty="0">
+                <a:solidFill>
+                  <a:srgbClr val="D2A8FF"/>
+                </a:solidFill>
+                <a:effectLst/>
+                <a:latin typeface="Consolas" panose="020B0609020204030204" pitchFamily="49" charset="0"/>
+              </a:rPr>
+              <a:t>sum</a:t>
+            </a:r>
+            <a:r>
+              <a:rPr lang="en-US" b="0" dirty="0">
+                <a:solidFill>
+                  <a:srgbClr val="BBBEBF"/>
+                </a:solidFill>
+                <a:effectLst/>
+                <a:latin typeface="Consolas" panose="020B0609020204030204" pitchFamily="49" charset="0"/>
+              </a:rPr>
+              <a:t>())</a:t>
+            </a:r>
+          </a:p>
+        </p:txBody>
+      </p:sp>
+    </p:spTree>
+    <p:extLst>
+      <p:ext uri="{BB962C8B-B14F-4D97-AF65-F5344CB8AC3E}">
+        <p14:creationId xmlns:p14="http://schemas.microsoft.com/office/powerpoint/2010/main" val="1432981980"/>
+      </p:ext>
+    </p:extLst>
+  </p:cSld>
+  <p:clrMapOvr>
+    <a:masterClrMapping/>
+  </p:clrMapOvr>
+</p:sld>
+</file>
+
+<file path=ppt/slides/slide46.xml><?xml version="1.0" encoding="utf-8"?>
+<p:sld xmlns:a="http://schemas.openxmlformats.org/drawingml/2006/main" xmlns:r="http://schemas.openxmlformats.org/officeDocument/2006/relationships" xmlns:p="http://schemas.openxmlformats.org/presentationml/2006/main">
+  <p:cSld>
+    <p:spTree>
+      <p:nvGrpSpPr>
+        <p:cNvPr id="1" name=""/>
+        <p:cNvGrpSpPr/>
+        <p:nvPr/>
+      </p:nvGrpSpPr>
+      <p:grpSpPr>
+        <a:xfrm>
+          <a:off x="0" y="0"/>
+          <a:ext cx="0" cy="0"/>
+          <a:chOff x="0" y="0"/>
+          <a:chExt cx="0" cy="0"/>
+        </a:xfrm>
+      </p:grpSpPr>
+      <p:sp>
+        <p:nvSpPr>
+          <p:cNvPr id="2" name="Title 1">
+            <a:extLst>
+              <a:ext uri="{FF2B5EF4-FFF2-40B4-BE49-F238E27FC236}">
+                <a16:creationId xmlns:a16="http://schemas.microsoft.com/office/drawing/2014/main" id="{513F2487-C0E6-6A04-C54E-AFB4AE7D2C49}"/>
+              </a:ext>
+            </a:extLst>
+          </p:cNvPr>
+          <p:cNvSpPr>
+            <a:spLocks noGrp="1"/>
+          </p:cNvSpPr>
+          <p:nvPr>
+            <p:ph type="title"/>
+          </p:nvPr>
+        </p:nvSpPr>
+        <p:spPr/>
+        <p:txBody>
+          <a:bodyPr/>
+          <a:lstStyle/>
+          <a:p>
+            <a:r>
+              <a:rPr lang="en-US" dirty="0" err="1"/>
+              <a:t>Esercizio</a:t>
+            </a:r>
+            <a:endParaRPr lang="en-US" dirty="0"/>
+          </a:p>
+        </p:txBody>
+      </p:sp>
+      <p:sp>
+        <p:nvSpPr>
+          <p:cNvPr id="3" name="Content Placeholder 2">
+            <a:extLst>
+              <a:ext uri="{FF2B5EF4-FFF2-40B4-BE49-F238E27FC236}">
+                <a16:creationId xmlns:a16="http://schemas.microsoft.com/office/drawing/2014/main" id="{A1C20FA2-AF16-C6EF-B1BC-8C98894158FE}"/>
+              </a:ext>
+            </a:extLst>
+          </p:cNvPr>
+          <p:cNvSpPr>
+            <a:spLocks noGrp="1"/>
+          </p:cNvSpPr>
+          <p:nvPr>
+            <p:ph idx="1"/>
+          </p:nvPr>
+        </p:nvSpPr>
+        <p:spPr/>
+        <p:txBody>
+          <a:bodyPr>
+            <a:normAutofit fontScale="70000" lnSpcReduction="20000"/>
+          </a:bodyPr>
+          <a:lstStyle/>
+          <a:p>
+            <a:r>
+              <a:rPr lang="it-IT" dirty="0"/>
+              <a:t>Siete il team antifrode di una banca.</a:t>
+            </a:r>
+          </a:p>
+          <a:p>
+            <a:r>
+              <a:rPr lang="it-IT" dirty="0"/>
+              <a:t>Solo il 5% delle transazioni è fraudolento.</a:t>
+            </a:r>
+          </a:p>
+          <a:p>
+            <a:r>
+              <a:rPr lang="it-IT" dirty="0"/>
+              <a:t>Il vostro obiettivo non è massimizzare l'accuracy, ma trovare il maggior numero possibile di frodi senza sommergere gli operatori di falsi allarmi.</a:t>
+            </a:r>
+          </a:p>
+          <a:p>
+            <a:pPr marL="0" indent="0">
+              <a:buNone/>
+            </a:pPr>
+            <a:r>
+              <a:rPr lang="it-IT" dirty="0"/>
+              <a:t>Provare:</a:t>
+            </a:r>
+          </a:p>
+          <a:p>
+            <a:r>
+              <a:rPr lang="it-IT" dirty="0"/>
+              <a:t>LogisticRegression </a:t>
+            </a:r>
+          </a:p>
+          <a:p>
+            <a:r>
+              <a:rPr lang="it-IT" dirty="0"/>
+              <a:t>RandomForestClassifier </a:t>
+            </a:r>
+          </a:p>
+          <a:p>
+            <a:r>
+              <a:rPr lang="it-IT" dirty="0"/>
+              <a:t>GradientBoostingClassifier</a:t>
+            </a:r>
+          </a:p>
+          <a:p>
+            <a:pPr marL="0" indent="0">
+              <a:buNone/>
+            </a:pPr>
+            <a:r>
+              <a:rPr lang="it-IT" dirty="0"/>
+              <a:t>Domande</a:t>
+            </a:r>
+          </a:p>
+          <a:p>
+            <a:r>
+              <a:rPr lang="it-IT" dirty="0"/>
+              <a:t>Quanto vale l'accuracy?</a:t>
+            </a:r>
+          </a:p>
+          <a:p>
+            <a:r>
+              <a:rPr lang="it-IT" dirty="0"/>
+              <a:t>Quante frodi vengono individuate?</a:t>
+            </a:r>
+          </a:p>
+          <a:p>
+            <a:r>
+              <a:rPr lang="it-IT" dirty="0"/>
+              <a:t>Qual è più importante: precision o recall?</a:t>
+            </a:r>
+          </a:p>
+          <a:p>
+            <a:r>
+              <a:rPr lang="it-IT" dirty="0"/>
+              <a:t>Un modello con il 99% di accuracy è davvero buono?</a:t>
+            </a:r>
+          </a:p>
+          <a:p>
+            <a:endParaRPr lang="it-IT" dirty="0"/>
+          </a:p>
+          <a:p>
+            <a:endParaRPr lang="it-IT" dirty="0"/>
+          </a:p>
+          <a:p>
+            <a:endParaRPr lang="en-US" dirty="0"/>
+          </a:p>
+        </p:txBody>
+      </p:sp>
+    </p:spTree>
+    <p:extLst>
+      <p:ext uri="{BB962C8B-B14F-4D97-AF65-F5344CB8AC3E}">
+        <p14:creationId xmlns:p14="http://schemas.microsoft.com/office/powerpoint/2010/main" val="525261099"/>
       </p:ext>
     </p:extLst>
   </p:cSld>
